--- a/docs/demo/kataribe-pitch-deck.pptx
+++ b/docs/demo/kataribe-pitch-deck.pptx
@@ -8805,7 +8805,7 @@
                 <a:cs typeface="Google Sans Flex"/>
                 <a:sym typeface="Google Sans Flex"/>
               </a:rPr>
-              <a:t>A story extracted from a live session: life stage, people, places, and her quote matched to the turn it came from.</a:t>
+              <a:t>A story extracted from a live session: life stage, people, places, and the quote matched to the turn it came from.</a:t>
             </a:r>
           </a:p>
         </p:txBody>
@@ -8903,7 +8903,7 @@
                 <a:cs typeface="Google Sans Flex"/>
                 <a:sym typeface="Google Sans Flex"/>
               </a:rPr>
-              <a:t>Her granddaughter's question, the story that answers it, and her own words, one tap from her voice.</a:t>
+              <a:t>A granddaughter's question, the story that answers it, and the senior's own words, one tap from the audio.</a:t>
             </a:r>
           </a:p>
         </p:txBody>
@@ -10425,7 +10425,7 @@
                 <a:cs typeface="Google Sans Flex"/>
                 <a:sym typeface="Google Sans Flex"/>
               </a:rPr>
-              <a:t>Family questions about a topic she refused, the war and the evacuation, were held back; the rest went through. 3 of 3.</a:t>
+              <a:t>Family questions about a topic the senior refused, the war and the evacuation, were held back; the rest went through. 3 of 3.</a:t>
             </a:r>
           </a:p>
           <a:p>
@@ -10796,7 +10796,7 @@
                 <a:cs typeface="Google Sans Flex"/>
                 <a:sym typeface="Google Sans Flex"/>
               </a:rPr>
-              <a:t>It notices her sitting nearby, so there is no button at all</a:t>
+              <a:t>It notices the senior sitting nearby, so there is no button at all</a:t>
             </a:r>
           </a:p>
           <a:p>
@@ -11254,7 +11254,7 @@
                 <a:cs typeface="Google Sans Flex"/>
                 <a:sym typeface="Google Sans Flex"/>
               </a:rPr>
-              <a:t>Sharing with whoever she chooses: a friend, a care worker, a local archive</a:t>
+              <a:t>Sharing with whoever the senior chooses: a friend, a care worker, a local archive</a:t>
             </a:r>
           </a:p>
           <a:p>
@@ -11320,7 +11320,7 @@
                 <a:cs typeface="Google Sans Flex"/>
                 <a:sym typeface="Google Sans Flex"/>
               </a:rPr>
-              <a:t>A printed book of her stories</a:t>
+              <a:t>A printed book of the stories</a:t>
             </a:r>
           </a:p>
         </p:txBody>
@@ -12062,7 +12062,7 @@
       </p:sp>
       <p:sp>
         <p:nvSpPr>
-          <p:cNvPr id="167" name="For her"/>
+          <p:cNvPr id="167" name="For the senior"/>
           <p:cNvSpPr/>
           <p:nvPr/>
         </p:nvSpPr>
@@ -12146,7 +12146,7 @@
       </p:pic>
       <p:sp>
         <p:nvSpPr>
-          <p:cNvPr id="170" name="For her text"/>
+          <p:cNvPr id="170" name="For the senior text"/>
           <p:cNvSpPr txBox="1"/>
           <p:nvPr/>
         </p:nvSpPr>
@@ -12185,7 +12185,7 @@
                 <a:cs typeface="Google Sans Flex SemiBold"/>
                 <a:sym typeface="Google Sans Flex SemiBold"/>
               </a:rPr>
-              <a:t>For her</a:t>
+              <a:t>For the senior</a:t>
             </a:r>
           </a:p>
           <a:p>
@@ -12284,14 +12284,14 @@
                 <a:cs typeface="Google Sans Flex"/>
                 <a:sym typeface="Google Sans Flex"/>
               </a:rPr>
-              <a:t>A life story that lasts, in her own words</a:t>
-            </a:r>
-          </a:p>
-        </p:txBody>
-      </p:sp>
-      <p:sp>
-        <p:nvSpPr>
-          <p:cNvPr id="171" name="For her family"/>
+              <a:t>A life story that lasts, in their own words</a:t>
+            </a:r>
+          </a:p>
+        </p:txBody>
+      </p:sp>
+      <p:sp>
+        <p:nvSpPr>
+          <p:cNvPr id="171" name="For the family"/>
           <p:cNvSpPr/>
           <p:nvPr/>
         </p:nvSpPr>
@@ -12375,7 +12375,7 @@
       </p:pic>
       <p:sp>
         <p:nvSpPr>
-          <p:cNvPr id="174" name="For her family text"/>
+          <p:cNvPr id="174" name="For the family text"/>
           <p:cNvSpPr txBox="1"/>
           <p:nvPr/>
         </p:nvSpPr>
@@ -12414,7 +12414,7 @@
                 <a:cs typeface="Google Sans Flex SemiBold"/>
                 <a:sym typeface="Google Sans Flex SemiBold"/>
               </a:rPr>
-              <a:t>For her family</a:t>
+              <a:t>For the family</a:t>
             </a:r>
           </a:p>
           <a:p>
@@ -12480,7 +12480,7 @@
                 <a:cs typeface="Google Sans Flex"/>
                 <a:sym typeface="Google Sans Flex"/>
               </a:rPr>
-              <a:t>Her voice behind every quote</a:t>
+              <a:t>The original voice behind every quote</a:t>
             </a:r>
           </a:p>
           <a:p>
@@ -14384,7 +14384,7 @@
                 <a:cs typeface="Google Sans Flex"/>
                 <a:sym typeface="Google Sans Flex"/>
               </a:rPr>
-              <a:t>Relatives read what she shared, hear her voice, and send questions she is asked next time.</a:t>
+              <a:t>Relatives read what the senior shared, hear their voice, and send questions for next time.</a:t>
             </a:r>
           </a:p>
         </p:txBody>
@@ -14497,7 +14497,7 @@
                 <a:cs typeface="Google Sans Flex"/>
                 <a:sym typeface="Google Sans Flex"/>
               </a:rPr>
-              <a:t>She decides what is shared. Consent is kept as her own words, checked against the recording.</a:t>
+              <a:t>The senior decides what is shared. Consent is kept in their own words, checked against the recording.</a:t>
             </a:r>
           </a:p>
           <a:p>
@@ -14530,7 +14530,7 @@
                 <a:cs typeface="Google Sans Flex"/>
                 <a:sym typeface="Google Sans Flex"/>
               </a:rPr>
-              <a:t>Faithful, not rewritten. Every quote is verified word for word and plays in her own voice.</a:t>
+              <a:t>Faithful, not rewritten. Every quote is verified word for word and plays in the senior's own voice.</a:t>
             </a:r>
           </a:p>
           <a:p>
@@ -14563,7 +14563,7 @@
                 <a:cs typeface="Google Sans Flex"/>
                 <a:sym typeface="Google Sans Flex"/>
               </a:rPr>
-              <a:t>Built for Japanese: honorific register, names spelled from her profile, patience for long pauses.</a:t>
+              <a:t>Built for Japanese: honorific register, names spelled from the profile, patience for long pauses.</a:t>
             </a:r>
           </a:p>
         </p:txBody>
@@ -15674,7 +15674,7 @@
                 <a:cs typeface="Google Sans Flex"/>
                 <a:sym typeface="Google Sans Flex"/>
               </a:rPr>
-              <a:t>Shared only if she said yes, in words found in the recording. Private by default.</a:t>
+              <a:t>Shared only after a yes, in words found in the recording. Private by default.</a:t>
             </a:r>
           </a:p>
         </p:txBody>
@@ -15804,7 +15804,7 @@
                 <a:cs typeface="Google Sans Flex SemiBold"/>
                 <a:sym typeface="Google Sans Flex SemiBold"/>
               </a:rPr>
-              <a:t>Family page, her voice</a:t>
+              <a:t>Family page, real voice</a:t>
             </a:r>
           </a:p>
           <a:p>
@@ -15830,7 +15830,7 @@
                 <a:cs typeface="Google Sans Flex"/>
                 <a:sym typeface="Google Sans Flex"/>
               </a:rPr>
-              <a:t>Chapters by life stage. Every quote plays as a clip of her own answer.</a:t>
+              <a:t>Chapters by life stage. Every quote plays as a clip of the original answer.</a:t>
             </a:r>
           </a:p>
         </p:txBody>
@@ -16315,7 +16315,7 @@
                 <a:cs typeface="Google Sans Flex"/>
                 <a:sym typeface="Google Sans Flex"/>
               </a:rPr>
-              <a:t>5–10 min in Japanese with Gemini Live. She leads, it follows.</a:t>
+              <a:t>5–10 min in Japanese with Gemini Live. The senior leads, the AI follows.</a:t>
             </a:r>
           </a:p>
         </p:txBody>
@@ -17241,7 +17241,7 @@
                 <a:cs typeface="Google Sans Flex"/>
                 <a:sym typeface="Google Sans Flex"/>
               </a:rPr>
-              <a:t>Only stories she agreed to share, each quote in her voice.</a:t>
+              <a:t>Only stories the senior agreed to share, each with its audio.</a:t>
             </a:r>
           </a:p>
         </p:txBody>
@@ -17553,7 +17553,7 @@
                 <a:cs typeface="Google Sans Flex"/>
                 <a:sym typeface="Google Sans Flex"/>
               </a:rPr>
-              <a:t>A question touching a topic she refused is quietly held back.</a:t>
+              <a:t>A question touching a refused topic is quietly held back.</a:t>
             </a:r>
           </a:p>
         </p:txBody>
@@ -17819,7 +17819,7 @@
                 <a:cs typeface="Google Sans Flex Medium"/>
                 <a:sym typeface="Google Sans Flex Medium"/>
               </a:rPr>
-              <a:t>only what she shared</a:t>
+              <a:t>only what was shared</a:t>
             </a:r>
           </a:p>
         </p:txBody>
@@ -19068,7 +19068,7 @@
                 <a:cs typeface="Google Sans Flex"/>
                 <a:sym typeface="Google Sans Flex"/>
               </a:rPr>
-              <a:t>Greets her by name</a:t>
+              <a:t>Greets the senior by name</a:t>
             </a:r>
           </a:p>
         </p:txBody>
@@ -20179,7 +20179,7 @@
                 <a:cs typeface="Google Sans Flex"/>
                 <a:sym typeface="Google Sans Flex"/>
               </a:rPr>
-              <a:t>Her stories as chapters, by life stage</a:t>
+              <a:t>The senior's stories as chapters, by life stage</a:t>
             </a:r>
           </a:p>
         </p:txBody>
@@ -20279,7 +20279,7 @@
                 <a:cs typeface="Google Sans Flex"/>
                 <a:sym typeface="Google Sans Flex"/>
               </a:rPr>
-              <a:t>Her own words, and a clip of her answer to play</a:t>
+              <a:t>Their own words, with a clip of the answer to play</a:t>
             </a:r>
           </a:p>
         </p:txBody>
@@ -20379,7 +20379,7 @@
                 <a:cs typeface="Google Sans Flex"/>
                 <a:sym typeface="Google Sans Flex"/>
               </a:rPr>
-              <a:t>Ask her something; she hears who is asking</a:t>
+              <a:t>Ask a question; the senior hears who is asking</a:t>
             </a:r>
           </a:p>
         </p:txBody>
@@ -20811,7 +20811,7 @@
                 <a:cs typeface="Google Sans Flex"/>
                 <a:sym typeface="Google Sans Flex"/>
               </a:rPr>
-              <a:t>Records the talk in stereo: her voice left, the AI right</a:t>
+              <a:t>Records the talk in stereo: the senior left, the AI right</a:t>
             </a:r>
           </a:p>
           <a:p>
@@ -20993,7 +20993,7 @@
                 <a:cs typeface="Google Sans Flex"/>
                 <a:sym typeface="Google Sans Flex"/>
               </a:rPr>
-              <a:t>The family page: shared stories, her voice</a:t>
+              <a:t>The family page: shared stories, with audio</a:t>
             </a:r>
           </a:p>
         </p:txBody>
@@ -21271,7 +21271,7 @@
                 <a:cs typeface="Google Sans Flex"/>
                 <a:sym typeface="Google Sans Flex"/>
               </a:rPr>
-              <a:t>Her story so far and family questions, locked into a short-lived Live token</a:t>
+              <a:t>The story so far and family questions, locked into a short-lived Live token</a:t>
             </a:r>
           </a:p>
         </p:txBody>
@@ -21733,7 +21733,7 @@
                 <a:cs typeface="Google Sans Flex"/>
                 <a:sym typeface="Google Sans Flex"/>
               </a:rPr>
-              <a:t>Shared stories only; clips cut from her own channel</a:t>
+              <a:t>Shared stories only; clips cut from the senior's channel</a:t>
             </a:r>
           </a:p>
         </p:txBody>
@@ -23797,7 +23797,7 @@
                 <a:cs typeface="Google Sans Flex"/>
                 <a:sym typeface="Google Sans Flex"/>
               </a:rPr>
-              <a:t>The model never speaks for her. Gemini extracts the stories; plain code then checks every quote, and every yes to sharing, against the transcript.</a:t>
+              <a:t>The model never speaks for the senior. Gemini extracts the stories; plain code then checks every quote, and every yes to sharing, against the transcript.</a:t>
             </a:r>
           </a:p>
         </p:txBody>

--- a/docs/demo/kataribe-pitch-deck.pptx
+++ b/docs/demo/kataribe-pitch-deck.pptx
@@ -13276,7 +13276,7 @@
                 <a:cs typeface="Google Sans Flex SemiBold"/>
                 <a:sym typeface="Google Sans Flex SemiBold"/>
               </a:rPr>
-              <a:t>kataribe </a:t>
+              <a:t>Kataribe </a:t>
             </a:r>
             <a:r>
               <a:rPr lang="en-GB" sz="2400" dirty="0">

--- a/docs/demo/kataribe-pitch-deck.pptx
+++ b/docs/demo/kataribe-pitch-deck.pptx
@@ -8949,7 +8949,7 @@
                 <a:cs typeface="Google Sans Flex"/>
                 <a:sym typeface="Google Sans Flex"/>
               </a:rPr>
-              <a:t>Test persona 田中ハル, voiced by synthesized speech</a:t>
+              <a:t>Persona 田中ハル (Tanaka Haru), synthesized voice</a:t>
             </a:r>
           </a:p>
         </p:txBody>
@@ -13805,7 +13805,7 @@
                 <a:cs typeface="Google Sans Flex"/>
                 <a:sym typeface="Google Sans Flex"/>
               </a:rPr>
-              <a:t>親の雑誌 (Kokoromi), price incl. tax</a:t>
+              <a:t>Oya no Zasshi (親の雑誌, Kokoromi), price incl. tax</a:t>
             </a:r>
           </a:p>
         </p:txBody>
@@ -14172,7 +14172,7 @@
                 <a:cs typeface="Google Sans Flex"/>
                 <a:sym typeface="Google Sans Flex"/>
               </a:rPr>
-              <a:t>Companion AIs (茶の間 Cotomo) keep seniors company, but no life story comes out.</a:t>
+              <a:t>Companion AIs (Cotomo, by Starley) keep seniors company, but no life story comes out.</a:t>
             </a:r>
           </a:p>
           <a:p>
@@ -17397,7 +17397,7 @@
                 <a:cs typeface="Google Sans Flex"/>
                 <a:sym typeface="Google Sans Flex"/>
               </a:rPr>
-              <a:t>A relative writes a question and who they are: 孫のゆか.</a:t>
+              <a:t>A relative writes a question, and who they are: granddaughter Yuka.</a:t>
             </a:r>
           </a:p>
         </p:txBody>
@@ -19490,7 +19490,7 @@
                 <a:cs typeface="Google Sans Flex"/>
                 <a:sym typeface="Google Sans Flex"/>
               </a:rPr>
-              <a:t>1947年生まれ · 長野</a:t>
+              <a:t>Born in 1947 · 長野</a:t>
             </a:r>
           </a:p>
         </p:txBody>
@@ -19536,7 +19536,7 @@
                 <a:cs typeface="Google Sans Flex Medium"/>
                 <a:sym typeface="Google Sans Flex Medium"/>
               </a:rPr>
-              <a:t>子供時代</a:t>
+              <a:t>Childhood</a:t>
             </a:r>
           </a:p>
         </p:txBody>

--- a/docs/demo/kataribe-pitch-deck.pptx
+++ b/docs/demo/kataribe-pitch-deck.pptx
@@ -9536,7 +9536,7 @@
                 <a:cs typeface="Google Sans Flex"/>
                 <a:sym typeface="Google Sans Flex"/>
               </a:rPr>
-              <a:t>A browser session with no drop, 34 transcript entries. Run every night</a:t>
+              <a:t>A browser session with no drop, 34 transcript entries. Run with every live eval</a:t>
             </a:r>
           </a:p>
         </p:txBody>
@@ -23705,7 +23705,7 @@
                 <a:cs typeface="Google Sans Flex"/>
                 <a:sym typeface="Google Sans Flex"/>
               </a:rPr>
-              <a:t>GitHub Actions: checks on every push, the live eval nightly</a:t>
+              <a:t>GitHub Actions: checks on every push, the live eval on demand</a:t>
             </a:r>
           </a:p>
         </p:txBody>

--- a/docs/demo/kataribe-pitch-deck.pptx
+++ b/docs/demo/kataribe-pitch-deck.pptx
@@ -7382,7 +7382,7 @@
                 <a:cs typeface="Google Sans Flex SemiBold"/>
                 <a:sym typeface="Google Sans Flex SemiBold"/>
               </a:rPr>
-              <a:t>≈ $0.12</a:t>
+              <a:t>≈ $0.13</a:t>
             </a:r>
           </a:p>
           <a:p>
@@ -7431,7 +7431,7 @@
                 <a:cs typeface="Google Sans Flex SemiBold"/>
                 <a:sym typeface="Google Sans Flex SemiBold"/>
               </a:rPr>
-              <a:t>≈ ¥6,400</a:t>
+              <a:t>≈ ¥6,900</a:t>
             </a:r>
           </a:p>
           <a:p>
@@ -7483,7 +7483,7 @@
                 <a:cs typeface="Google Sans Flex"/>
                 <a:sym typeface="Google Sans Flex"/>
               </a:rPr>
-              <a:t>Under 3% of one ¥220,000 self-history written by hand.</a:t>
+              <a:t>About 3% of one ¥220,000 self-history written by hand.</a:t>
             </a:r>
           </a:p>
         </p:txBody>
@@ -7498,7 +7498,7 @@
         </p:nvGraphicFramePr>
         <p:xfrm>
           <a:off x="3337560" y="1325880"/>
-          <a:ext cx="5449824" cy="2688336"/>
+          <a:ext cx="5449824" cy="2779776"/>
         </p:xfrm>
         <a:graphic>
           <a:graphicData uri="http://schemas.openxmlformats.org/drawingml/2006/table">
@@ -7511,7 +7511,7 @@
                 <a:gridCol w="2743200"/>
                 <a:gridCol w="1014984"/>
               </a:tblGrid>
-              <a:tr h="384048">
+              <a:tr h="347472">
                 <a:tc>
                   <a:txBody>
                     <a:bodyPr wrap="square" anchor="ctr">
@@ -7636,7 +7636,7 @@
                   </a:tcPr>
                 </a:tc>
               </a:tr>
-              <a:tr h="384048">
+              <a:tr h="347472">
                 <a:tc>
                   <a:txBody>
                     <a:bodyPr wrap="square" anchor="ctr">
@@ -7761,7 +7761,7 @@
                   </a:tcPr>
                 </a:tc>
               </a:tr>
-              <a:tr h="384048">
+              <a:tr h="347472">
                 <a:tc>
                   <a:txBody>
                     <a:bodyPr wrap="square" anchor="ctr">
@@ -7886,7 +7886,7 @@
                   </a:tcPr>
                 </a:tc>
               </a:tr>
-              <a:tr h="384048">
+              <a:tr h="347472">
                 <a:tc>
                   <a:txBody>
                     <a:bodyPr wrap="square" anchor="ctr">
@@ -7913,7 +7913,7 @@
                           <a:cs typeface="Google Sans Flex"/>
                           <a:sym typeface="Google Sans Flex"/>
                         </a:rPr>
-                        <a:t>Gemini Flash processing</a:t>
+                        <a:t>Gemini Flash, writing</a:t>
                       </a:r>
                     </a:p>
                   </a:txBody>
@@ -7954,7 +7954,7 @@
                           <a:cs typeface="Google Sans Flex"/>
                           <a:sym typeface="Google Sans Flex"/>
                         </a:rPr>
-                        <a:t>≈ 15k tokens in, 3k out, across four passes</a:t>
+                        <a:t>≈ 15k tokens in, 3k out: write, screen, plan</a:t>
                       </a:r>
                     </a:p>
                   </a:txBody>
@@ -8011,7 +8011,132 @@
                   </a:tcPr>
                 </a:tc>
               </a:tr>
-              <a:tr h="384048">
+              <a:tr h="347472">
+                <a:tc>
+                  <a:txBody>
+                    <a:bodyPr wrap="square" anchor="ctr">
+                      <a:noAutofit/>
+                    </a:bodyPr>
+                    <a:lstStyle/>
+                    <a:p>
+                      <a:pPr algn="l" marL="0" indent="0">
+                        <a:spcBef>
+                          <a:spcPts val="0"/>
+                        </a:spcBef>
+                        <a:spcAft>
+                          <a:spcPts val="0"/>
+                        </a:spcAft>
+                        <a:buNone/>
+                      </a:pPr>
+                      <a:r>
+                        <a:rPr lang="en-GB" sz="1050" dirty="0">
+                          <a:solidFill>
+                            <a:srgbClr val="202124"/>
+                          </a:solidFill>
+                          <a:latin typeface="Google Sans Flex"/>
+                          <a:ea typeface="Hiragino Sans"/>
+                          <a:cs typeface="Google Sans Flex"/>
+                          <a:sym typeface="Google Sans Flex"/>
+                        </a:rPr>
+                        <a:t>Gemini Flash, listening</a:t>
+                      </a:r>
+                    </a:p>
+                  </a:txBody>
+                  <a:tcPr marL="91440" marR="91440" marT="27432" marB="27432" anchor="ctr">
+                    <a:lnB w="6350">
+                      <a:solidFill>
+                        <a:srgbClr val="DADCE0"/>
+                      </a:solidFill>
+                    </a:lnB>
+                    <a:solidFill>
+                      <a:srgbClr val="FFFFFF"/>
+                    </a:solidFill>
+                  </a:tcPr>
+                </a:tc>
+                <a:tc>
+                  <a:txBody>
+                    <a:bodyPr wrap="square" anchor="ctr">
+                      <a:noAutofit/>
+                    </a:bodyPr>
+                    <a:lstStyle/>
+                    <a:p>
+                      <a:pPr algn="l" marL="0" indent="0">
+                        <a:spcBef>
+                          <a:spcPts val="0"/>
+                        </a:spcBef>
+                        <a:spcAft>
+                          <a:spcPts val="0"/>
+                        </a:spcAft>
+                        <a:buNone/>
+                      </a:pPr>
+                      <a:r>
+                        <a:rPr lang="en-GB" sz="1050" dirty="0">
+                          <a:solidFill>
+                            <a:srgbClr val="202124"/>
+                          </a:solidFill>
+                          <a:latin typeface="Google Sans Flex"/>
+                          <a:ea typeface="Hiragino Sans"/>
+                          <a:cs typeface="Google Sans Flex"/>
+                          <a:sym typeface="Google Sans Flex"/>
+                        </a:rPr>
+                        <a:t>≈ 3 minutes of quoted clips, heard again</a:t>
+                      </a:r>
+                    </a:p>
+                  </a:txBody>
+                  <a:tcPr marL="91440" marR="91440" marT="27432" marB="27432" anchor="ctr">
+                    <a:lnB w="6350">
+                      <a:solidFill>
+                        <a:srgbClr val="DADCE0"/>
+                      </a:solidFill>
+                    </a:lnB>
+                    <a:solidFill>
+                      <a:srgbClr val="FFFFFF"/>
+                    </a:solidFill>
+                  </a:tcPr>
+                </a:tc>
+                <a:tc>
+                  <a:txBody>
+                    <a:bodyPr wrap="square" anchor="ctr">
+                      <a:noAutofit/>
+                    </a:bodyPr>
+                    <a:lstStyle/>
+                    <a:p>
+                      <a:pPr algn="r" marL="0" indent="0">
+                        <a:spcBef>
+                          <a:spcPts val="0"/>
+                        </a:spcBef>
+                        <a:spcAft>
+                          <a:spcPts val="0"/>
+                        </a:spcAft>
+                        <a:buNone/>
+                      </a:pPr>
+                      <a:r>
+                        <a:rPr lang="en-GB" sz="1050" dirty="0">
+                          <a:solidFill>
+                            <a:srgbClr val="202124"/>
+                          </a:solidFill>
+                          <a:latin typeface="Google Sans Flex"/>
+                          <a:ea typeface="Hiragino Sans"/>
+                          <a:cs typeface="Google Sans Flex"/>
+                          <a:sym typeface="Google Sans Flex"/>
+                        </a:rPr>
+                        <a:t>≈ $0.006</a:t>
+                      </a:r>
+                    </a:p>
+                  </a:txBody>
+                  <a:tcPr marL="91440" marR="91440" marT="27432" marB="27432" anchor="ctr">
+                    <a:lnB w="6350">
+                      <a:solidFill>
+                        <a:srgbClr val="DADCE0"/>
+                      </a:solidFill>
+                    </a:lnB>
+                    <a:solidFill>
+                      <a:srgbClr val="FFFFFF"/>
+                    </a:solidFill>
+                  </a:tcPr>
+                </a:tc>
+              </a:tr>
+              <a:tr h="347472">
                 <a:tc>
                   <a:txBody>
                     <a:bodyPr wrap="square" anchor="ctr">
@@ -8136,7 +8261,7 @@
                   </a:tcPr>
                 </a:tc>
               </a:tr>
-              <a:tr h="384048">
+              <a:tr h="347472">
                 <a:tc>
                   <a:txBody>
                     <a:bodyPr wrap="square" anchor="ctr">
@@ -8261,7 +8386,7 @@
                   </a:tcPr>
                 </a:tc>
               </a:tr>
-              <a:tr h="384048">
+              <a:tr h="347472">
                 <a:tc>
                   <a:txBody>
                     <a:bodyPr wrap="square" anchor="ctr">
@@ -8370,7 +8495,7 @@
                           <a:cs typeface="Google Sans Flex SemiBold"/>
                           <a:sym typeface="Google Sans Flex SemiBold"/>
                         </a:rPr>
-                        <a:t>≈ $0.12</a:t>
+                        <a:t>≈ $0.13</a:t>
                       </a:r>
                     </a:p>
                   </a:txBody>
@@ -8398,8 +8523,8 @@
         </p:nvSpPr>
         <p:spPr>
           <a:xfrm>
-            <a:off x="3337560" y="4160520"/>
-            <a:ext cx="5449824" cy="731520"/>
+            <a:off x="3337560" y="4215384"/>
+            <a:ext cx="5449824" cy="685800"/>
           </a:xfrm>
           <a:prstGeom prst="rect">
             <a:avLst/>
@@ -8434,7 +8559,7 @@
                 <a:cs typeface="Google Sans Flex"/>
                 <a:sym typeface="Google Sans Flex"/>
               </a:rPr>
-              <a:t>Audio is billed for the whole time a session is open, silence included. Rates are Google's list prices as of 23 Sep 2026, kept in backend/costs.py; the Flash token counts are estimates. Yen at ¥150 to the dollar.</a:t>
+              <a:t>Audio is billed for the whole time a session is open, silence included. Rates are Google's list prices as of 23 Sep 2026, kept in backend/costs.py; token counts are estimates, the listening at 32 audio tokens a second. Yen at ¥150 to the dollar. Judging: at most 30 visitor conversations a day, about $0.10 each.</a:t>
             </a:r>
           </a:p>
         </p:txBody>
@@ -8616,7 +8741,7 @@
       </p:sp>
       <p:pic>
         <p:nvPicPr>
-          <p:cNvPr id="136" name="Picture 135" descr="console.png"/>
+          <p:cNvPr id="136" name="Picture 135" descr="start.png"/>
           <p:cNvPicPr>
             <a:picLocks noChangeAspect="1"/>
           </p:cNvPicPr>
@@ -8631,7 +8756,7 @@
         <p:spPr>
           <a:xfrm>
             <a:off x="356616" y="1280160"/>
-            <a:ext cx="2621280" cy="2621280"/>
+            <a:ext cx="2621280" cy="2926080"/>
           </a:xfrm>
           <a:prstGeom prst="roundRect">
             <a:avLst>
@@ -8642,14 +8767,14 @@
       </p:pic>
       <p:sp>
         <p:nvSpPr>
-          <p:cNvPr id="137" name="Interview console caption"/>
+          <p:cNvPr id="137" name="The start page caption"/>
           <p:cNvSpPr txBox="1"/>
           <p:nvPr/>
         </p:nvSpPr>
         <p:spPr>
           <a:xfrm>
-            <a:off x="356616" y="3992880"/>
-            <a:ext cx="2621280" cy="868680"/>
+            <a:off x="356616" y="4288536"/>
+            <a:ext cx="2621280" cy="640080"/>
           </a:xfrm>
           <a:prstGeom prst="rect">
             <a:avLst/>
@@ -8667,12 +8792,12 @@
                 <a:spcPts val="0"/>
               </a:spcBef>
               <a:spcAft>
-                <a:spcPts val="200"/>
-              </a:spcAft>
-              <a:buNone/>
-            </a:pPr>
-            <a:r>
-              <a:rPr lang="en-GB" sz="1150" dirty="0">
+                <a:spcPts val="100"/>
+              </a:spcAft>
+              <a:buNone/>
+            </a:pPr>
+            <a:r>
+              <a:rPr lang="en-GB" sz="1100" dirty="0">
                 <a:solidFill>
                   <a:srgbClr val="202124"/>
                 </a:solidFill>
@@ -8681,13 +8806,13 @@
                 <a:cs typeface="Google Sans Flex SemiBold"/>
                 <a:sym typeface="Google Sans Flex SemiBold"/>
               </a:rPr>
-              <a:t>Interview console</a:t>
+              <a:t>The start page</a:t>
             </a:r>
           </a:p>
           <a:p>
             <a:pPr algn="l" marL="0" indent="0">
               <a:lnSpc>
-                <a:spcPct val="105000"/>
+                <a:spcPct val="100000"/>
               </a:lnSpc>
               <a:spcBef>
                 <a:spcPts val="0"/>
@@ -8698,7 +8823,7 @@
               <a:buNone/>
             </a:pPr>
             <a:r>
-              <a:rPr lang="en-GB" sz="950" dirty="0">
+              <a:rPr lang="en-GB" sz="900" dirty="0">
                 <a:solidFill>
                   <a:srgbClr val="5F6368"/>
                 </a:solidFill>
@@ -8707,14 +8832,14 @@
                 <a:cs typeface="Google Sans Flex"/>
                 <a:sym typeface="Google Sans Flex"/>
               </a:rPr>
-              <a:t>Who is being interviewed, which voice, and how long to wait: 5 s, measured, against the model's 0.8 s default.</a:t>
+              <a:t>What it is, who it's for, a family page from the demo, then a judge's own turn.</a:t>
             </a:r>
           </a:p>
         </p:txBody>
       </p:sp>
       <p:pic>
         <p:nvPicPr>
-          <p:cNvPr id="138" name="Picture 137" descr="session.png"/>
+          <p:cNvPr id="138" name="Picture 137" descr="story.png"/>
           <p:cNvPicPr>
             <a:picLocks noChangeAspect="1"/>
           </p:cNvPicPr>
@@ -8729,7 +8854,7 @@
         <p:spPr>
           <a:xfrm>
             <a:off x="3261360" y="1280160"/>
-            <a:ext cx="2621280" cy="2621280"/>
+            <a:ext cx="2621280" cy="2926080"/>
           </a:xfrm>
           <a:prstGeom prst="roundRect">
             <a:avLst>
@@ -8740,14 +8865,14 @@
       </p:pic>
       <p:sp>
         <p:nvSpPr>
-          <p:cNvPr id="139" name="After the session caption"/>
+          <p:cNvPr id="139" name="A story, and what it rests on caption"/>
           <p:cNvSpPr txBox="1"/>
           <p:nvPr/>
         </p:nvSpPr>
         <p:spPr>
           <a:xfrm>
-            <a:off x="3261360" y="3992880"/>
-            <a:ext cx="2621280" cy="868680"/>
+            <a:off x="3261360" y="4288536"/>
+            <a:ext cx="2621280" cy="640080"/>
           </a:xfrm>
           <a:prstGeom prst="rect">
             <a:avLst/>
@@ -8765,12 +8890,12 @@
                 <a:spcPts val="0"/>
               </a:spcBef>
               <a:spcAft>
-                <a:spcPts val="200"/>
-              </a:spcAft>
-              <a:buNone/>
-            </a:pPr>
-            <a:r>
-              <a:rPr lang="en-GB" sz="1150" dirty="0">
+                <a:spcPts val="100"/>
+              </a:spcAft>
+              <a:buNone/>
+            </a:pPr>
+            <a:r>
+              <a:rPr lang="en-GB" sz="1100" dirty="0">
                 <a:solidFill>
                   <a:srgbClr val="202124"/>
                 </a:solidFill>
@@ -8779,13 +8904,13 @@
                 <a:cs typeface="Google Sans Flex SemiBold"/>
                 <a:sym typeface="Google Sans Flex SemiBold"/>
               </a:rPr>
-              <a:t>After the session</a:t>
+              <a:t>A story, and what it rests on</a:t>
             </a:r>
           </a:p>
           <a:p>
             <a:pPr algn="l" marL="0" indent="0">
               <a:lnSpc>
-                <a:spcPct val="105000"/>
+                <a:spcPct val="100000"/>
               </a:lnSpc>
               <a:spcBef>
                 <a:spcPts val="0"/>
@@ -8796,7 +8921,7 @@
               <a:buNone/>
             </a:pPr>
             <a:r>
-              <a:rPr lang="en-GB" sz="950" dirty="0">
+              <a:rPr lang="en-GB" sz="900" dirty="0">
                 <a:solidFill>
                   <a:srgbClr val="5F6368"/>
                 </a:solidFill>
@@ -8805,14 +8930,14 @@
                 <a:cs typeface="Google Sans Flex"/>
                 <a:sym typeface="Google Sans Flex"/>
               </a:rPr>
-              <a:t>A story extracted from a live session: life stage, people, places, and the quote matched to the turn it came from.</a:t>
+              <a:t>A retelling to read; every quote a press away, in Japanese with the English beneath.</a:t>
             </a:r>
           </a:p>
         </p:txBody>
       </p:sp>
       <p:pic>
         <p:nvPicPr>
-          <p:cNvPr id="140" name="Picture 139" descr="family.png"/>
+          <p:cNvPr id="140" name="Picture 139" descr="questions.png"/>
           <p:cNvPicPr>
             <a:picLocks noChangeAspect="1"/>
           </p:cNvPicPr>
@@ -8827,7 +8952,7 @@
         <p:spPr>
           <a:xfrm>
             <a:off x="6166104" y="1280160"/>
-            <a:ext cx="2621280" cy="2621280"/>
+            <a:ext cx="2621280" cy="2926080"/>
           </a:xfrm>
           <a:prstGeom prst="roundRect">
             <a:avLst>
@@ -8838,14 +8963,14 @@
       </p:pic>
       <p:sp>
         <p:nvSpPr>
-          <p:cNvPr id="141" name="Family page caption"/>
+          <p:cNvPr id="141" name="Questions from the family caption"/>
           <p:cNvSpPr txBox="1"/>
           <p:nvPr/>
         </p:nvSpPr>
         <p:spPr>
           <a:xfrm>
-            <a:off x="6166104" y="3992880"/>
-            <a:ext cx="2621280" cy="868680"/>
+            <a:off x="6166104" y="4288536"/>
+            <a:ext cx="2621280" cy="640080"/>
           </a:xfrm>
           <a:prstGeom prst="rect">
             <a:avLst/>
@@ -8863,12 +8988,12 @@
                 <a:spcPts val="0"/>
               </a:spcBef>
               <a:spcAft>
-                <a:spcPts val="200"/>
-              </a:spcAft>
-              <a:buNone/>
-            </a:pPr>
-            <a:r>
-              <a:rPr lang="en-GB" sz="1150" dirty="0">
+                <a:spcPts val="100"/>
+              </a:spcAft>
+              <a:buNone/>
+            </a:pPr>
+            <a:r>
+              <a:rPr lang="en-GB" sz="1100" dirty="0">
                 <a:solidFill>
                   <a:srgbClr val="202124"/>
                 </a:solidFill>
@@ -8877,13 +9002,13 @@
                 <a:cs typeface="Google Sans Flex SemiBold"/>
                 <a:sym typeface="Google Sans Flex SemiBold"/>
               </a:rPr>
-              <a:t>Family page</a:t>
+              <a:t>Questions from the family</a:t>
             </a:r>
           </a:p>
           <a:p>
             <a:pPr algn="l" marL="0" indent="0">
               <a:lnSpc>
-                <a:spcPct val="105000"/>
+                <a:spcPct val="100000"/>
               </a:lnSpc>
               <a:spcBef>
                 <a:spcPts val="0"/>
@@ -8894,7 +9019,7 @@
               <a:buNone/>
             </a:pPr>
             <a:r>
-              <a:rPr lang="en-GB" sz="950" dirty="0">
+              <a:rPr lang="en-GB" sz="900" dirty="0">
                 <a:solidFill>
                   <a:srgbClr val="5F6368"/>
                 </a:solidFill>
@@ -8903,7 +9028,7 @@
                 <a:cs typeface="Google Sans Flex"/>
                 <a:sym typeface="Google Sans Flex"/>
               </a:rPr>
-              <a:t>A granddaughter's question, the story that answers it, and the senior's own words, one tap from the audio.</a:t>
+              <a:t>Who asked, and the story each question led to. A waiting one says so.</a:t>
             </a:r>
           </a:p>
         </p:txBody>
@@ -8916,8 +9041,8 @@
         </p:nvSpPr>
         <p:spPr>
           <a:xfrm>
-            <a:off x="5852160" y="813816"/>
-            <a:ext cx="2935224" cy="274320"/>
+            <a:off x="4754880" y="786384"/>
+            <a:ext cx="4032504" cy="384048"/>
           </a:xfrm>
           <a:prstGeom prst="rect">
             <a:avLst/>
@@ -8931,6 +9056,9 @@
           <a:lstStyle/>
           <a:p>
             <a:pPr algn="r" marL="0" indent="0">
+              <a:lnSpc>
+                <a:spcPct val="100000"/>
+              </a:lnSpc>
               <a:spcBef>
                 <a:spcPts val="0"/>
               </a:spcBef>
@@ -8949,7 +9077,7 @@
                 <a:cs typeface="Google Sans Flex"/>
                 <a:sym typeface="Google Sans Flex"/>
               </a:rPr>
-              <a:t>Persona 田中ハル (Tanaka Haru), synthesized voice</a:t>
+              <a:t>Live at kataribe.kaseovo.com, on a phone. The example persona stands in until the demo take.</a:t>
             </a:r>
           </a:p>
         </p:txBody>
@@ -9131,7 +9259,7 @@
       </p:sp>
       <p:sp>
         <p:nvSpPr>
-          <p:cNvPr id="144" name="Result 12 / 12"/>
+          <p:cNvPr id="144" name="Result 36 / 36"/>
           <p:cNvSpPr/>
           <p:nvPr/>
         </p:nvSpPr>
@@ -9162,7 +9290,7 @@
       </p:sp>
       <p:sp>
         <p:nvSpPr>
-          <p:cNvPr id="145" name="Result 12 / 12 text"/>
+          <p:cNvPr id="145" name="Result 36 / 36 text"/>
           <p:cNvSpPr txBox="1"/>
           <p:nvPr/>
         </p:nvSpPr>
@@ -9201,7 +9329,7 @@
                 <a:cs typeface="Google Sans Flex SemiBold"/>
                 <a:sym typeface="Google Sans Flex SemiBold"/>
               </a:rPr>
-              <a:t>12 / 12</a:t>
+              <a:t>36 / 36</a:t>
             </a:r>
           </a:p>
           <a:p>
@@ -9227,14 +9355,14 @@
                 <a:cs typeface="Google Sans Flex"/>
                 <a:sym typeface="Google Sans Flex"/>
               </a:rPr>
-              <a:t>Consent: a clear yes shared the story; a no, a hesitation or never being asked kept it private</a:t>
-            </a:r>
-          </a:p>
-        </p:txBody>
-      </p:sp>
-      <p:sp>
-        <p:nvSpPr>
-          <p:cNvPr id="146" name="Result 9 / 9"/>
+              <a:t>Consent, twelve cases: a yes shares; a no or a hesitation keeps it private; no reply is asked again</a:t>
+            </a:r>
+          </a:p>
+        </p:txBody>
+      </p:sp>
+      <p:sp>
+        <p:nvSpPr>
+          <p:cNvPr id="146" name="Result 12 / 12"/>
           <p:cNvSpPr/>
           <p:nvPr/>
         </p:nvSpPr>
@@ -9265,7 +9393,7 @@
       </p:sp>
       <p:sp>
         <p:nvSpPr>
-          <p:cNvPr id="147" name="Result 9 / 9 text"/>
+          <p:cNvPr id="147" name="Result 12 / 12 text"/>
           <p:cNvSpPr txBox="1"/>
           <p:nvPr/>
         </p:nvSpPr>
@@ -9304,7 +9432,7 @@
                 <a:cs typeface="Google Sans Flex SemiBold"/>
                 <a:sym typeface="Google Sans Flex SemiBold"/>
               </a:rPr>
-              <a:t>9 / 9</a:t>
+              <a:t>12 / 12</a:t>
             </a:r>
           </a:p>
           <a:p>
@@ -9330,14 +9458,14 @@
                 <a:cs typeface="Google Sans Flex"/>
                 <a:sym typeface="Google Sans Flex"/>
               </a:rPr>
-              <a:t>Family questions: answered, never raised, or let pass, each reported correctly</a:t>
-            </a:r>
-          </a:p>
-        </p:txBody>
-      </p:sp>
-      <p:sp>
-        <p:nvSpPr>
-          <p:cNvPr id="148" name="Result 6 / 6"/>
+              <a:t>The recording check: the same words confirmed, 18 for 十八 accepted, a changed place caught</a:t>
+            </a:r>
+          </a:p>
+        </p:txBody>
+      </p:sp>
+      <p:sp>
+        <p:nvSpPr>
+          <p:cNvPr id="148" name="Result 3 / 3"/>
           <p:cNvSpPr/>
           <p:nvPr/>
         </p:nvSpPr>
@@ -9368,7 +9496,7 @@
       </p:sp>
       <p:sp>
         <p:nvSpPr>
-          <p:cNvPr id="149" name="Result 6 / 6 text"/>
+          <p:cNvPr id="149" name="Result 3 / 3 text"/>
           <p:cNvSpPr txBox="1"/>
           <p:nvPr/>
         </p:nvSpPr>
@@ -9407,7 +9535,7 @@
                 <a:cs typeface="Google Sans Flex SemiBold"/>
                 <a:sym typeface="Google Sans Flex SemiBold"/>
               </a:rPr>
-              <a:t>6 / 6</a:t>
+              <a:t>3 / 3</a:t>
             </a:r>
           </a:p>
           <a:p>
@@ -9433,7 +9561,7 @@
                 <a:cs typeface="Google Sans Flex"/>
                 <a:sym typeface="Google Sans Flex"/>
               </a:rPr>
-              <a:t>Openings that recall last time, then put the family's question</a:t>
+              <a:t>A judge's whole path on the live service, from the start page to their own family page</a:t>
             </a:r>
           </a:p>
         </p:txBody>
@@ -9536,7 +9664,7 @@
                 <a:cs typeface="Google Sans Flex"/>
                 <a:sym typeface="Google Sans Flex"/>
               </a:rPr>
-              <a:t>A browser session with no drop, 34 transcript entries. Run with every live eval</a:t>
+              <a:t>A browser session with no drop, 34 transcript entries</a:t>
             </a:r>
           </a:p>
         </p:txBody>
@@ -10280,7 +10408,7 @@
                 <a:cs typeface="Google Sans Flex Medium"/>
                 <a:sym typeface="Google Sans Flex Medium"/>
               </a:rPr>
-              <a:t>Default set to 5,000 ms. The model's own is 800 ms.</a:t>
+              <a:t>Japanese: 5,000 ms, measured. English visitors: 4 s. The model's own: 800 ms.</a:t>
             </a:r>
           </a:p>
         </p:txBody>
@@ -10359,7 +10487,7 @@
                 <a:cs typeface="Google Sans Flex"/>
                 <a:sym typeface="Google Sans Flex"/>
               </a:rPr>
-              <a:t>Real models, three runs a case. Japanese speech is streamed at the Live API in real time; replies are graded by rules and by a model judging them against the interviewer's own prompt.</a:t>
+              <a:t>Real models, three runs a case: speech streamed at the Live API in real time, replies graded by rules and by a model judging them against the prompt.</a:t>
             </a:r>
           </a:p>
           <a:p>
@@ -10425,7 +10553,7 @@
                 <a:cs typeface="Google Sans Flex"/>
                 <a:sym typeface="Google Sans Flex"/>
               </a:rPr>
-              <a:t>Family questions about a topic the senior refused, the war and the evacuation, were held back; the rest went through. 3 of 3.</a:t>
+              <a:t>The recording check caught a real slip on its own: 私は transcribed as 私を. The quote was held back.</a:t>
             </a:r>
           </a:p>
           <a:p>
@@ -10640,7 +10768,7 @@
       </p:sp>
       <p:sp>
         <p:nvSpPr>
-          <p:cNvPr id="152" name="Next, on the same tablet"/>
+          <p:cNvPr id="152" name="Next, on the same screen"/>
           <p:cNvSpPr/>
           <p:nvPr/>
         </p:nvSpPr>
@@ -10724,7 +10852,7 @@
       </p:pic>
       <p:sp>
         <p:nvSpPr>
-          <p:cNvPr id="155" name="Next, on the same tablet text"/>
+          <p:cNvPr id="155" name="Next, on the same screen text"/>
           <p:cNvSpPr txBox="1"/>
           <p:nvPr/>
         </p:nvSpPr>
@@ -10763,7 +10891,7 @@
                 <a:cs typeface="Google Sans Flex SemiBold"/>
                 <a:sym typeface="Google Sans Flex SemiBold"/>
               </a:rPr>
-              <a:t>Next, on the same tablet</a:t>
+              <a:t>Next, on the same screen</a:t>
             </a:r>
           </a:p>
           <a:p>
@@ -11254,7 +11382,7 @@
                 <a:cs typeface="Google Sans Flex"/>
                 <a:sym typeface="Google Sans Flex"/>
               </a:rPr>
-              <a:t>Sharing with whoever the senior chooses: a friend, a care worker, a local archive</a:t>
+              <a:t>The teller chooses who else may read: a friend, a care worker, a local archive</a:t>
             </a:r>
           </a:p>
           <a:p>
@@ -11287,7 +11415,7 @@
                 <a:cs typeface="Google Sans Flex"/>
                 <a:sym typeface="Google Sans Flex"/>
               </a:rPr>
-              <a:t>Municipalities as payers: Yokosuka City has trialled conversation AI for seniors since 2025</a:t>
+              <a:t>Testimony, the oldest sense of 語り部: the war, the bombings, the disasters, told by those who lived them</a:t>
             </a:r>
           </a:p>
           <a:p>
@@ -11320,7 +11448,7 @@
                 <a:cs typeface="Google Sans Flex"/>
                 <a:sym typeface="Google Sans Flex"/>
               </a:rPr>
-              <a:t>A printed book of the stories</a:t>
+              <a:t>Municipalities as payers: Yokosuka City has trialled conversation AI for seniors since 2025</a:t>
             </a:r>
           </a:p>
         </p:txBody>
@@ -11654,7 +11782,7 @@
                 <a:sym typeface="Google Sans Flex Medium"/>
                 <a:hlinkClick r:id="rId5"/>
               </a:rPr>
-              <a:t>github.com/tpemeja/kataribe</a:t>
+              <a:t>github.com/kaseovo/kataribe</a:t>
             </a:r>
             <a:endParaRPr>
               <a:latin typeface="Google Sans Flex Medium"/>
@@ -11751,14 +11879,15 @@
             <a:r>
               <a:rPr lang="en-GB" sz="1400" dirty="0">
                 <a:solidFill>
-                  <a:srgbClr val="C5221F"/>
-                </a:solidFill>
-                <a:latin typeface="Google Sans Flex SemiBold"/>
+                  <a:srgbClr val="A0561B"/>
+                </a:solidFill>
+                <a:latin typeface="Google Sans Flex Medium"/>
                 <a:ea typeface="Hiragino Sans"/>
-                <a:cs typeface="Google Sans Flex SemiBold"/>
-                <a:sym typeface="Google Sans Flex SemiBold"/>
-              </a:rPr>
-              <a:t>TBD</a:t>
+                <a:cs typeface="Google Sans Flex Medium"/>
+                <a:sym typeface="Google Sans Flex Medium"/>
+                <a:hlinkClick r:id="rId6"/>
+              </a:rPr>
+              <a:t>kataribe.kaseovo.com</a:t>
             </a:r>
             <a:endParaRPr>
               <a:latin typeface="Google Sans Flex Medium"/>
@@ -11791,22 +11920,22 @@
       </p:sp>
       <p:pic>
         <p:nvPicPr>
-          <p:cNvPr id="160" name="Picture 159" descr="qr-repo.png"/>
+          <p:cNvPr id="160" name="Picture 159" descr="qr-product.png"/>
           <p:cNvPicPr>
             <a:picLocks noChangeAspect="1"/>
           </p:cNvPicPr>
           <p:nvPr/>
         </p:nvPicPr>
         <p:blipFill>
-          <a:blip r:embed="rId6"/>
+          <a:blip r:embed="rId7"/>
           <a:stretch>
             <a:fillRect/>
           </a:stretch>
         </p:blipFill>
         <p:spPr>
           <a:xfrm>
-            <a:off x="448056" y="2514600"/>
-            <a:ext cx="1554480" cy="1554480"/>
+            <a:off x="448056" y="2606040"/>
+            <a:ext cx="1325880" cy="1325880"/>
           </a:xfrm>
           <a:prstGeom prst="rect">
             <a:avLst/>
@@ -11815,14 +11944,14 @@
       </p:pic>
       <p:sp>
         <p:nvSpPr>
-          <p:cNvPr id="161" name="Repo note"/>
+          <p:cNvPr id="161" name="Try it on your own life note"/>
           <p:cNvSpPr txBox="1"/>
           <p:nvPr/>
         </p:nvSpPr>
         <p:spPr>
           <a:xfrm>
-            <a:off x="2231136" y="2788920"/>
-            <a:ext cx="4114800" cy="1097280"/>
+            <a:off x="1956816" y="2606040"/>
+            <a:ext cx="2514600" cy="1325880"/>
           </a:xfrm>
           <a:prstGeom prst="rect">
             <a:avLst/>
@@ -11854,7 +11983,7 @@
                 <a:cs typeface="Google Sans Flex SemiBold"/>
                 <a:sym typeface="Google Sans Flex SemiBold"/>
               </a:rPr>
-              <a:t>The code, the tests, and the plan behind them</a:t>
+              <a:t>Try it on your own life</a:t>
             </a:r>
           </a:p>
           <a:p>
@@ -11871,7 +12000,7 @@
               <a:buNone/>
             </a:pPr>
             <a:r>
-              <a:rPr lang="en-GB" sz="1050" dirty="0">
+              <a:rPr lang="en-GB" sz="1000" dirty="0">
                 <a:solidFill>
                   <a:srgbClr val="5F6368"/>
                 </a:solidFill>
@@ -11880,7 +12009,103 @@
                 <a:cs typeface="Google Sans Flex"/>
                 <a:sym typeface="Google Sans Flex"/>
               </a:rPr>
-              <a:t>Built in the open over four weeks, from the first commit on 22 Sep 2026.</a:t>
+              <a:t>A family page from the demo, then a conversation of your own, in English. About three minutes.</a:t>
+            </a:r>
+          </a:p>
+        </p:txBody>
+      </p:sp>
+      <p:pic>
+        <p:nvPicPr>
+          <p:cNvPr id="162" name="Picture 161" descr="qr-repo.png"/>
+          <p:cNvPicPr>
+            <a:picLocks noChangeAspect="1"/>
+          </p:cNvPicPr>
+          <p:nvPr/>
+        </p:nvPicPr>
+        <p:blipFill>
+          <a:blip r:embed="rId8"/>
+          <a:stretch>
+            <a:fillRect/>
+          </a:stretch>
+        </p:blipFill>
+        <p:spPr>
+          <a:xfrm>
+            <a:off x="4700016" y="2606040"/>
+            <a:ext cx="1325880" cy="1325880"/>
+          </a:xfrm>
+          <a:prstGeom prst="rect">
+            <a:avLst/>
+          </a:prstGeom>
+        </p:spPr>
+      </p:pic>
+      <p:sp>
+        <p:nvSpPr>
+          <p:cNvPr id="163" name="The code, the tests, and the plan behind them note"/>
+          <p:cNvSpPr txBox="1"/>
+          <p:nvPr/>
+        </p:nvSpPr>
+        <p:spPr>
+          <a:xfrm>
+            <a:off x="6208776" y="2606040"/>
+            <a:ext cx="2514600" cy="1325880"/>
+          </a:xfrm>
+          <a:prstGeom prst="rect">
+            <a:avLst/>
+          </a:prstGeom>
+          <a:noFill/>
+        </p:spPr>
+        <p:txBody>
+          <a:bodyPr wrap="square" lIns="0" tIns="0" rIns="0" bIns="0" anchor="ctr">
+            <a:noAutofit/>
+          </a:bodyPr>
+          <a:lstStyle/>
+          <a:p>
+            <a:pPr algn="l" marL="0" indent="0">
+              <a:spcBef>
+                <a:spcPts val="0"/>
+              </a:spcBef>
+              <a:spcAft>
+                <a:spcPts val="400"/>
+              </a:spcAft>
+              <a:buNone/>
+            </a:pPr>
+            <a:r>
+              <a:rPr lang="en-GB" sz="1200" dirty="0">
+                <a:solidFill>
+                  <a:srgbClr val="202124"/>
+                </a:solidFill>
+                <a:latin typeface="Google Sans Flex SemiBold"/>
+                <a:ea typeface="Hiragino Sans"/>
+                <a:cs typeface="Google Sans Flex SemiBold"/>
+                <a:sym typeface="Google Sans Flex SemiBold"/>
+              </a:rPr>
+              <a:t>The code, the tests, and the plan behind them</a:t>
+            </a:r>
+          </a:p>
+          <a:p>
+            <a:pPr algn="l" marL="0" indent="0">
+              <a:lnSpc>
+                <a:spcPct val="105000"/>
+              </a:lnSpc>
+              <a:spcBef>
+                <a:spcPts val="0"/>
+              </a:spcBef>
+              <a:spcAft>
+                <a:spcPts val="0"/>
+              </a:spcAft>
+              <a:buNone/>
+            </a:pPr>
+            <a:r>
+              <a:rPr lang="en-GB" sz="1000" dirty="0">
+                <a:solidFill>
+                  <a:srgbClr val="5F6368"/>
+                </a:solidFill>
+                <a:latin typeface="Google Sans Flex"/>
+                <a:ea typeface="Hiragino Sans"/>
+                <a:cs typeface="Google Sans Flex"/>
+                <a:sym typeface="Google Sans Flex"/>
+              </a:rPr>
+              <a:t>Open source, under the MIT licence. Built in the open from the first commit on 22 Sep 2026.</a:t>
             </a:r>
           </a:p>
         </p:txBody>
@@ -12062,7 +12287,7 @@
       </p:sp>
       <p:sp>
         <p:nvSpPr>
-          <p:cNvPr id="167" name="For the senior"/>
+          <p:cNvPr id="167" name="For them"/>
           <p:cNvSpPr/>
           <p:nvPr/>
         </p:nvSpPr>
@@ -12146,7 +12371,7 @@
       </p:pic>
       <p:sp>
         <p:nvSpPr>
-          <p:cNvPr id="170" name="For the senior text"/>
+          <p:cNvPr id="170" name="For them text"/>
           <p:cNvSpPr txBox="1"/>
           <p:nvPr/>
         </p:nvSpPr>
@@ -12185,7 +12410,7 @@
                 <a:cs typeface="Google Sans Flex SemiBold"/>
                 <a:sym typeface="Google Sans Flex SemiBold"/>
               </a:rPr>
-              <a:t>For the senior</a:t>
+              <a:t>For them</a:t>
             </a:r>
           </a:p>
           <a:p>
@@ -12218,7 +12443,7 @@
                 <a:cs typeface="Google Sans Flex"/>
                 <a:sym typeface="Google Sans Flex"/>
               </a:rPr>
-              <a:t>Being listened to, a few minutes every day</a:t>
+              <a:t>A few minutes a day that are theirs, about their own life</a:t>
             </a:r>
           </a:p>
           <a:p>
@@ -12251,7 +12476,7 @@
                 <a:cs typeface="Google Sans Flex"/>
                 <a:sym typeface="Google Sans Flex"/>
               </a:rPr>
-              <a:t>Reminiscence (回想法) is established practice in Japanese elderly care</a:t>
+              <a:t>Remembering out loud, with someone who waits for a name or a year</a:t>
             </a:r>
           </a:p>
           <a:p>
@@ -12284,14 +12509,14 @@
                 <a:cs typeface="Google Sans Flex"/>
                 <a:sym typeface="Google Sans Flex"/>
               </a:rPr>
-              <a:t>A life story that lasts, in their own words</a:t>
-            </a:r>
-          </a:p>
-        </p:txBody>
-      </p:sp>
-      <p:sp>
-        <p:nvSpPr>
-          <p:cNvPr id="171" name="For the family"/>
+              <a:t>Theirs to give: nothing reaches the family until they say so</a:t>
+            </a:r>
+          </a:p>
+        </p:txBody>
+      </p:sp>
+      <p:sp>
+        <p:nvSpPr>
+          <p:cNvPr id="171" name="For their family"/>
           <p:cNvSpPr/>
           <p:nvPr/>
         </p:nvSpPr>
@@ -12375,7 +12600,7 @@
       </p:pic>
       <p:sp>
         <p:nvSpPr>
-          <p:cNvPr id="174" name="For the family text"/>
+          <p:cNvPr id="174" name="For their family text"/>
           <p:cNvSpPr txBox="1"/>
           <p:nvPr/>
         </p:nvSpPr>
@@ -12414,7 +12639,7 @@
                 <a:cs typeface="Google Sans Flex SemiBold"/>
                 <a:sym typeface="Google Sans Flex SemiBold"/>
               </a:rPr>
-              <a:t>For the family</a:t>
+              <a:t>For their family</a:t>
             </a:r>
           </a:p>
           <a:p>
@@ -12447,7 +12672,7 @@
                 <a:cs typeface="Google Sans Flex"/>
                 <a:sym typeface="Google Sans Flex"/>
               </a:rPr>
-              <a:t>Stories they never found the time to ask about</a:t>
+              <a:t>The stories they never asked for: not for lack of love, for lack of a moment</a:t>
             </a:r>
           </a:p>
           <a:p>
@@ -12480,7 +12705,7 @@
                 <a:cs typeface="Google Sans Flex"/>
                 <a:sym typeface="Google Sans Flex"/>
               </a:rPr>
-              <a:t>The original voice behind every quote</a:t>
+              <a:t>In their own words, with their voice behind each quote</a:t>
             </a:r>
           </a:p>
           <a:p>
@@ -12513,14 +12738,14 @@
                 <a:cs typeface="Google Sans Flex"/>
                 <a:sym typeface="Google Sans Flex"/>
               </a:rPr>
-              <a:t>A reason to call, and to ask more</a:t>
-            </a:r>
-          </a:p>
-        </p:txBody>
-      </p:sp>
-      <p:sp>
-        <p:nvSpPr>
-          <p:cNvPr id="175" name="For the community"/>
+              <a:t>Something to talk about, and a question to send</a:t>
+            </a:r>
+          </a:p>
+        </p:txBody>
+      </p:sp>
+      <p:sp>
+        <p:nvSpPr>
+          <p:cNvPr id="175" name="For their town, next"/>
           <p:cNvSpPr/>
           <p:nvPr/>
         </p:nvSpPr>
@@ -12604,7 +12829,7 @@
       </p:pic>
       <p:sp>
         <p:nvSpPr>
-          <p:cNvPr id="178" name="For the community text"/>
+          <p:cNvPr id="178" name="For their town, next text"/>
           <p:cNvSpPr txBox="1"/>
           <p:nvPr/>
         </p:nvSpPr>
@@ -12643,7 +12868,7 @@
                 <a:cs typeface="Google Sans Flex SemiBold"/>
                 <a:sym typeface="Google Sans Flex SemiBold"/>
               </a:rPr>
-              <a:t>For the community</a:t>
+              <a:t>For their town, next</a:t>
             </a:r>
           </a:p>
           <a:p>
@@ -12676,7 +12901,7 @@
                 <a:cs typeface="Google Sans Flex"/>
                 <a:sym typeface="Google Sans Flex"/>
               </a:rPr>
-              <a:t>Many of the 6.72 million who live alone have nobody nearby. The interviewer plans its own questions, so no family is needed</a:t>
+              <a:t>Whoever they choose: a friend, a care worker, a local archive</a:t>
             </a:r>
           </a:p>
           <a:p>
@@ -12709,7 +12934,40 @@
                 <a:cs typeface="Google Sans Flex"/>
                 <a:sym typeface="Google Sans Flex"/>
               </a:rPr>
-              <a:t>A local archive is the original kataribe</a:t>
+              <a:t>Many of the 6.72 million who live alone have nobody nearby; no family is needed</a:t>
+            </a:r>
+          </a:p>
+          <a:p>
+            <a:pPr algn="l" marL="146685" indent="-146685">
+              <a:lnSpc>
+                <a:spcPct val="105000"/>
+              </a:lnSpc>
+              <a:spcBef>
+                <a:spcPts val="0"/>
+              </a:spcBef>
+              <a:spcAft>
+                <a:spcPts val="500"/>
+              </a:spcAft>
+              <a:buClr>
+                <a:solidFill>
+                  <a:srgbClr val="D98F4E"/>
+                </a:solidFill>
+              </a:buClr>
+              <a:buSzPct val="100000"/>
+              <a:buFont typeface="Arial"/>
+              <a:buChar char="•"/>
+            </a:pPr>
+            <a:r>
+              <a:rPr lang="en-GB" sz="1050" dirty="0">
+                <a:solidFill>
+                  <a:srgbClr val="202124"/>
+                </a:solidFill>
+                <a:latin typeface="Google Sans Flex"/>
+                <a:ea typeface="Hiragino Sans"/>
+                <a:cs typeface="Google Sans Flex"/>
+                <a:sym typeface="Google Sans Flex"/>
+              </a:rPr>
+              <a:t>What a town lived through, in the voices of those who lived it</a:t>
             </a:r>
           </a:p>
         </p:txBody>
@@ -13002,7 +13260,7 @@
                 <a:cs typeface="Google Sans Flex"/>
                 <a:sym typeface="Google Sans Flex"/>
               </a:rPr>
-              <a:t>≈ ¥530 a month for a daily conversation</a:t>
+              <a:t>≈ ¥570 a month for a daily conversation</a:t>
             </a:r>
           </a:p>
         </p:txBody>
@@ -13301,8 +13559,8 @@
         </p:nvSpPr>
         <p:spPr>
           <a:xfrm>
-            <a:off x="356616" y="1874520"/>
-            <a:ext cx="5029200" cy="777240"/>
+            <a:off x="356616" y="1847088"/>
+            <a:ext cx="5029200" cy="960120"/>
           </a:xfrm>
           <a:prstGeom prst="rect">
             <a:avLst/>
@@ -13314,6 +13572,29 @@
             <a:noAutofit/>
           </a:bodyPr>
           <a:lstStyle/>
+          <a:p>
+            <a:pPr algn="l" marL="0" indent="0">
+              <a:spcBef>
+                <a:spcPts val="0"/>
+              </a:spcBef>
+              <a:spcAft>
+                <a:spcPts val="400"/>
+              </a:spcAft>
+              <a:buNone/>
+            </a:pPr>
+            <a:r>
+              <a:rPr lang="en-GB" sz="1400" dirty="0">
+                <a:solidFill>
+                  <a:srgbClr val="202124"/>
+                </a:solidFill>
+                <a:latin typeface="Google Sans Flex SemiBold"/>
+                <a:ea typeface="Hiragino Sans"/>
+                <a:cs typeface="Google Sans Flex SemiBold"/>
+                <a:sym typeface="Google Sans Flex SemiBold"/>
+              </a:rPr>
+              <a:t>Every grandparent has stories nobody has asked about yet.</a:t>
+            </a:r>
+          </a:p>
           <a:p>
             <a:pPr algn="l" marL="0" indent="0">
               <a:lnSpc>
@@ -13328,16 +13609,16 @@
               <a:buNone/>
             </a:pPr>
             <a:r>
-              <a:rPr lang="en-GB" sz="1400" dirty="0">
+              <a:rPr lang="en-GB" sz="1150" dirty="0">
                 <a:solidFill>
                   <a:srgbClr val="202124"/>
                 </a:solidFill>
-                <a:latin typeface="Google Sans Flex Medium"/>
+                <a:latin typeface="Google Sans Flex"/>
                 <a:ea typeface="Hiragino Sans"/>
-                <a:cs typeface="Google Sans Flex Medium"/>
-                <a:sym typeface="Google Sans Flex Medium"/>
-              </a:rPr>
-              <a:t>A voice AI that talks with an elderly person for a few minutes a day, and turns their memories into a life story their family can read and hear.</a:t>
+                <a:cs typeface="Google Sans Flex"/>
+                <a:sym typeface="Google Sans Flex"/>
+              </a:rPr>
+              <a:t>Kataribe talks with an elderly person for a few minutes a day, in Japanese, and turns what they remember into a life story their family can read, and hear in their own voice.</a:t>
             </a:r>
           </a:p>
         </p:txBody>
@@ -13350,8 +13631,8 @@
         </p:nvSpPr>
         <p:spPr>
           <a:xfrm>
-            <a:off x="356616" y="2743200"/>
-            <a:ext cx="5029200" cy="685800"/>
+            <a:off x="356616" y="2852928"/>
+            <a:ext cx="5029200" cy="658368"/>
           </a:xfrm>
           <a:prstGeom prst="rect">
             <a:avLst/>
@@ -13400,7 +13681,7 @@
               <a:buNone/>
             </a:pPr>
             <a:r>
-              <a:rPr lang="en-GB" sz="1150" dirty="0">
+              <a:rPr lang="en-GB" sz="1100" dirty="0">
                 <a:solidFill>
                   <a:srgbClr val="202124"/>
                 </a:solidFill>
@@ -13416,14 +13697,14 @@
       </p:sp>
       <p:sp>
         <p:nvSpPr>
-          <p:cNvPr id="75" name="The Idea"/>
+          <p:cNvPr id="75" name="Who It'S For"/>
           <p:cNvSpPr txBox="1"/>
           <p:nvPr/>
         </p:nvSpPr>
         <p:spPr>
           <a:xfrm>
-            <a:off x="356616" y="3456432"/>
-            <a:ext cx="5029200" cy="685800"/>
+            <a:off x="356616" y="3529584"/>
+            <a:ext cx="5029200" cy="658368"/>
           </a:xfrm>
           <a:prstGeom prst="rect">
             <a:avLst/>
@@ -13455,7 +13736,7 @@
                 <a:cs typeface="Google Sans Flex SemiBold"/>
                 <a:sym typeface="Google Sans Flex SemiBold"/>
               </a:rPr>
-              <a:t>THE IDEA</a:t>
+              <a:t>WHO IT'S FOR</a:t>
             </a:r>
           </a:p>
           <a:p>
@@ -13472,7 +13753,7 @@
               <a:buNone/>
             </a:pPr>
             <a:r>
-              <a:rPr lang="en-GB" sz="1150" dirty="0">
+              <a:rPr lang="en-GB" sz="1100" dirty="0">
                 <a:solidFill>
                   <a:srgbClr val="202124"/>
                 </a:solidFill>
@@ -13481,21 +13762,21 @@
                 <a:cs typeface="Google Sans Flex"/>
                 <a:sym typeface="Google Sans Flex"/>
               </a:rPr>
-              <a:t>A kataribe is the traditional keeper of oral history. Ours listens, remembers what was said, and plans what to ask next, always in the person's own words.</a:t>
-            </a:r>
-          </a:p>
-        </p:txBody>
-      </p:sp>
-      <p:sp>
-        <p:nvSpPr>
-          <p:cNvPr id="76" name="Who Benefits"/>
+              <a:t>Them: a few minutes a day about their own life. Their family: the stories they never asked for. Next, their town: a friend, a carer, a local archive.</a:t>
+            </a:r>
+          </a:p>
+        </p:txBody>
+      </p:sp>
+      <p:sp>
+        <p:nvSpPr>
+          <p:cNvPr id="76" name="Not A Companion"/>
           <p:cNvSpPr txBox="1"/>
           <p:nvPr/>
         </p:nvSpPr>
         <p:spPr>
           <a:xfrm>
-            <a:off x="356616" y="4169664"/>
-            <a:ext cx="5029200" cy="685800"/>
+            <a:off x="356616" y="4206240"/>
+            <a:ext cx="5029200" cy="658368"/>
           </a:xfrm>
           <a:prstGeom prst="rect">
             <a:avLst/>
@@ -13527,7 +13808,7 @@
                 <a:cs typeface="Google Sans Flex SemiBold"/>
                 <a:sym typeface="Google Sans Flex SemiBold"/>
               </a:rPr>
-              <a:t>WHO BENEFITS</a:t>
+              <a:t>NOT A COMPANION</a:t>
             </a:r>
           </a:p>
           <a:p>
@@ -13544,7 +13825,7 @@
               <a:buNone/>
             </a:pPr>
             <a:r>
-              <a:rPr lang="en-GB" sz="1150" dirty="0">
+              <a:rPr lang="en-GB" sz="1100" dirty="0">
                 <a:solidFill>
                   <a:srgbClr val="202124"/>
                 </a:solidFill>
@@ -13553,7 +13834,7 @@
                 <a:cs typeface="Google Sans Flex"/>
                 <a:sym typeface="Google Sans Flex"/>
               </a:rPr>
-              <a:t>The senior: being listened to, memory work, a story that lasts. The family: stories they never asked about, and a reason to call.</a:t>
+              <a:t>It does not stand in for anyone. A kataribe is a keeper of oral history; this one helps the people around them know them better.</a:t>
             </a:r>
           </a:p>
         </p:txBody>
@@ -14017,7 +14298,7 @@
               <a:buNone/>
             </a:pPr>
             <a:r>
-              <a:rPr lang="en-GB" sz="1400" dirty="0">
+              <a:rPr lang="en-GB" sz="1300" dirty="0">
                 <a:solidFill>
                   <a:srgbClr val="A0561B"/>
                 </a:solidFill>
@@ -14026,7 +14307,7 @@
                 <a:cs typeface="Google Sans Flex Medium"/>
                 <a:sym typeface="Google Sans Flex Medium"/>
               </a:rPr>
-              <a:t>The senior leads. The AI plans what to ask. The family can join.</a:t>
+              <a:t>Not a companion that stands in for anyone: a way for the people around them to know them better.</a:t>
             </a:r>
           </a:p>
         </p:txBody>
@@ -14110,7 +14391,7 @@
             </a:r>
           </a:p>
           <a:p>
-            <a:pPr algn="l" marL="160655" indent="-160655">
+            <a:pPr algn="l" marL="153670" indent="-153670">
               <a:lnSpc>
                 <a:spcPct val="105000"/>
               </a:lnSpc>
@@ -14130,7 +14411,7 @@
               <a:buChar char="•"/>
             </a:pPr>
             <a:r>
-              <a:rPr lang="en-GB" sz="1150" dirty="0">
+              <a:rPr lang="en-GB" sz="1100" dirty="0">
                 <a:solidFill>
                   <a:srgbClr val="202124"/>
                 </a:solidFill>
@@ -14143,7 +14424,7 @@
             </a:r>
           </a:p>
           <a:p>
-            <a:pPr algn="l" marL="160655" indent="-160655">
+            <a:pPr algn="l" marL="153670" indent="-153670">
               <a:lnSpc>
                 <a:spcPct val="105000"/>
               </a:lnSpc>
@@ -14163,7 +14444,7 @@
               <a:buChar char="•"/>
             </a:pPr>
             <a:r>
-              <a:rPr lang="en-GB" sz="1150" dirty="0">
+              <a:rPr lang="en-GB" sz="1100" dirty="0">
                 <a:solidFill>
                   <a:srgbClr val="202124"/>
                 </a:solidFill>
@@ -14176,7 +14457,7 @@
             </a:r>
           </a:p>
           <a:p>
-            <a:pPr algn="l" marL="160655" indent="-160655">
+            <a:pPr algn="l" marL="153670" indent="-153670">
               <a:lnSpc>
                 <a:spcPct val="105000"/>
               </a:lnSpc>
@@ -14196,7 +14477,7 @@
               <a:buChar char="•"/>
             </a:pPr>
             <a:r>
-              <a:rPr lang="en-GB" sz="1150" dirty="0">
+              <a:rPr lang="en-GB" sz="1100" dirty="0">
                 <a:solidFill>
                   <a:srgbClr val="202124"/>
                 </a:solidFill>
@@ -14289,7 +14570,7 @@
             </a:r>
           </a:p>
           <a:p>
-            <a:pPr algn="l" marL="160655" indent="-160655">
+            <a:pPr algn="l" marL="153670" indent="-153670">
               <a:lnSpc>
                 <a:spcPct val="105000"/>
               </a:lnSpc>
@@ -14309,7 +14590,7 @@
               <a:buChar char="•"/>
             </a:pPr>
             <a:r>
-              <a:rPr lang="en-GB" sz="1150" dirty="0">
+              <a:rPr lang="en-GB" sz="1100" dirty="0">
                 <a:solidFill>
                   <a:srgbClr val="202124"/>
                 </a:solidFill>
@@ -14318,11 +14599,11 @@
                 <a:cs typeface="Google Sans Flex"/>
                 <a:sym typeface="Google Sans Flex"/>
               </a:rPr>
-              <a:t>A few minutes of conversation a day in natural Japanese. Nothing to install, open or type.</a:t>
-            </a:r>
-          </a:p>
-          <a:p>
-            <a:pPr algn="l" marL="160655" indent="-160655">
+              <a:t>A few minutes a day in natural Japanese. The interviewer speaks first: nothing to install or learn.</a:t>
+            </a:r>
+          </a:p>
+          <a:p>
+            <a:pPr algn="l" marL="153670" indent="-153670">
               <a:lnSpc>
                 <a:spcPct val="105000"/>
               </a:lnSpc>
@@ -14342,7 +14623,7 @@
               <a:buChar char="•"/>
             </a:pPr>
             <a:r>
-              <a:rPr lang="en-GB" sz="1150" dirty="0">
+              <a:rPr lang="en-GB" sz="1100" dirty="0">
                 <a:solidFill>
                   <a:srgbClr val="202124"/>
                 </a:solidFill>
@@ -14351,11 +14632,11 @@
                 <a:cs typeface="Google Sans Flex"/>
                 <a:sym typeface="Google Sans Flex"/>
               </a:rPr>
-              <a:t>Each talk becomes stories, people and places on a life timeline. The gaps plan the next talk.</a:t>
-            </a:r>
-          </a:p>
-          <a:p>
-            <a:pPr algn="l" marL="160655" indent="-160655">
+              <a:t>Each conversation becomes stories, set as a book by time of life. What is untold plans the next.</a:t>
+            </a:r>
+          </a:p>
+          <a:p>
+            <a:pPr algn="l" marL="153670" indent="-153670">
               <a:lnSpc>
                 <a:spcPct val="105000"/>
               </a:lnSpc>
@@ -14375,7 +14656,7 @@
               <a:buChar char="•"/>
             </a:pPr>
             <a:r>
-              <a:rPr lang="en-GB" sz="1150" dirty="0">
+              <a:rPr lang="en-GB" sz="1100" dirty="0">
                 <a:solidFill>
                   <a:srgbClr val="202124"/>
                 </a:solidFill>
@@ -14384,7 +14665,7 @@
                 <a:cs typeface="Google Sans Flex"/>
                 <a:sym typeface="Google Sans Flex"/>
               </a:rPr>
-              <a:t>Relatives read what the senior shared, hear their voice, and send questions for next time.</a:t>
+              <a:t>Relatives read what was shared, hear the voice behind each quote, and send questions it asks next.</a:t>
             </a:r>
           </a:p>
         </p:txBody>
@@ -14468,7 +14749,7 @@
             </a:r>
           </a:p>
           <a:p>
-            <a:pPr algn="l" marL="160655" indent="-160655">
+            <a:pPr algn="l" marL="153670" indent="-153670">
               <a:lnSpc>
                 <a:spcPct val="105000"/>
               </a:lnSpc>
@@ -14488,7 +14769,7 @@
               <a:buChar char="•"/>
             </a:pPr>
             <a:r>
-              <a:rPr lang="en-GB" sz="1150" dirty="0">
+              <a:rPr lang="en-GB" sz="1100" dirty="0">
                 <a:solidFill>
                   <a:srgbClr val="202124"/>
                 </a:solidFill>
@@ -14497,11 +14778,11 @@
                 <a:cs typeface="Google Sans Flex"/>
                 <a:sym typeface="Google Sans Flex"/>
               </a:rPr>
-              <a:t>The senior decides what is shared. Consent is kept in their own words, checked against the recording.</a:t>
-            </a:r>
-          </a:p>
-          <a:p>
-            <a:pPr algn="l" marL="160655" indent="-160655">
+              <a:t>Theirs to give: nothing reaches the family without a yes in their own words, and any story can be taken back.</a:t>
+            </a:r>
+          </a:p>
+          <a:p>
+            <a:pPr algn="l" marL="153670" indent="-153670">
               <a:lnSpc>
                 <a:spcPct val="105000"/>
               </a:lnSpc>
@@ -14521,7 +14802,7 @@
               <a:buChar char="•"/>
             </a:pPr>
             <a:r>
-              <a:rPr lang="en-GB" sz="1150" dirty="0">
+              <a:rPr lang="en-GB" sz="1100" dirty="0">
                 <a:solidFill>
                   <a:srgbClr val="202124"/>
                 </a:solidFill>
@@ -14530,11 +14811,11 @@
                 <a:cs typeface="Google Sans Flex"/>
                 <a:sym typeface="Google Sans Flex"/>
               </a:rPr>
-              <a:t>Faithful, not rewritten. Every quote is verified word for word and plays in the senior's own voice.</a:t>
-            </a:r>
-          </a:p>
-          <a:p>
-            <a:pPr algn="l" marL="160655" indent="-160655">
+              <a:t>It retells, but never adds: every fact has a quote, found word for word, then heard in the recording.</a:t>
+            </a:r>
+          </a:p>
+          <a:p>
+            <a:pPr algn="l" marL="153670" indent="-153670">
               <a:lnSpc>
                 <a:spcPct val="105000"/>
               </a:lnSpc>
@@ -14554,7 +14835,7 @@
               <a:buChar char="•"/>
             </a:pPr>
             <a:r>
-              <a:rPr lang="en-GB" sz="1150" dirty="0">
+              <a:rPr lang="en-GB" sz="1100" dirty="0">
                 <a:solidFill>
                   <a:srgbClr val="202124"/>
                 </a:solidFill>
@@ -14563,7 +14844,7 @@
                 <a:cs typeface="Google Sans Flex"/>
                 <a:sym typeface="Google Sans Flex"/>
               </a:rPr>
-              <a:t>Built for Japanese: honorific register, names spelled from the profile, patience for long pauses.</a:t>
+              <a:t>Built for Japanese: honorific register, names spelled from the profile, patience for a pause.</a:t>
             </a:r>
           </a:p>
         </p:txBody>
@@ -14894,7 +15175,7 @@
                 <a:cs typeface="Google Sans Flex"/>
                 <a:sym typeface="Google Sans Flex"/>
               </a:rPr>
-              <a:t>Gemini Live, native audio. Waits through long pauses for thought: 5 s, not 0.8 s.</a:t>
+              <a:t>Gemini Live, voice to voice. Speaks first, asks one thing, waits 5 s through a pause.</a:t>
             </a:r>
           </a:p>
         </p:txBody>
@@ -15050,7 +15331,7 @@
                 <a:cs typeface="Google Sans Flex"/>
                 <a:sym typeface="Google Sans Flex"/>
               </a:rPr>
-              <a:t>Opens by recalling last time, then asks what it planned to ask.</a:t>
+              <a:t>Opens by recalling the last conversation, or with a question the family sent.</a:t>
             </a:r>
           </a:p>
         </p:txBody>
@@ -15117,7 +15398,7 @@
       </p:sp>
       <p:pic>
         <p:nvPicPr>
-          <p:cNvPr id="98" name="Picture 97" descr="MdAutoStories-D98F4E.png"/>
+          <p:cNvPr id="98" name="Picture 97" descr="MdMenuBook-D98F4E.png"/>
           <p:cNvPicPr>
             <a:picLocks noChangeAspect="1"/>
           </p:cNvPicPr>
@@ -15180,7 +15461,7 @@
                 <a:cs typeface="Google Sans Flex SemiBold"/>
                 <a:sym typeface="Google Sans Flex SemiBold"/>
               </a:rPr>
-              <a:t>Stories, not transcripts</a:t>
+              <a:t>A life story, as a book</a:t>
             </a:r>
           </a:p>
           <a:p>
@@ -15206,7 +15487,7 @@
                 <a:cs typeface="Google Sans Flex"/>
                 <a:sym typeface="Google Sans Flex"/>
               </a:rPr>
-              <a:t>Each talk becomes stories with people, places and a life stage.</a:t>
+              <a:t>Chapters by time of life. Each story retold, its quotes a press away, each with its clip.</a:t>
             </a:r>
           </a:p>
         </p:txBody>
@@ -15336,7 +15617,7 @@
                 <a:cs typeface="Google Sans Flex SemiBold"/>
                 <a:sym typeface="Google Sans Flex SemiBold"/>
               </a:rPr>
-              <a:t>Never invents</a:t>
+              <a:t>Never adds a detail</a:t>
             </a:r>
           </a:p>
           <a:p>
@@ -15362,7 +15643,7 @@
                 <a:cs typeface="Google Sans Flex"/>
                 <a:sym typeface="Google Sans Flex"/>
               </a:rPr>
-              <a:t>A quote not found word for word in the transcript is dropped.</a:t>
+              <a:t>Every fact retold has a quote; each quote found word for word, then heard in its clip.</a:t>
             </a:r>
           </a:p>
         </p:txBody>
@@ -15518,7 +15799,7 @@
                 <a:cs typeface="Google Sans Flex"/>
                 <a:sym typeface="Google Sans Flex"/>
               </a:rPr>
-              <a:t>Finds thin life stages and people never described, and plans the next three questions.</a:t>
+              <a:t>Finds the times of life not yet told, and plans the next three questions.</a:t>
             </a:r>
           </a:p>
         </p:txBody>
@@ -15648,7 +15929,7 @@
                 <a:cs typeface="Google Sans Flex SemiBold"/>
                 <a:sym typeface="Google Sans Flex SemiBold"/>
               </a:rPr>
-              <a:t>Consent per story</a:t>
+              <a:t>Asked at the close</a:t>
             </a:r>
           </a:p>
           <a:p>
@@ -15674,7 +15955,7 @@
                 <a:cs typeface="Google Sans Flex"/>
                 <a:sym typeface="Google Sans Flex"/>
               </a:rPr>
-              <a:t>Shared only after a yes, in words found in the recording. Private by default.</a:t>
+              <a:t>Shared only on a yes in their own words. No reply: asked again. Any story can be taken back.</a:t>
             </a:r>
           </a:p>
         </p:txBody>
@@ -15741,7 +16022,7 @@
       </p:sp>
       <p:pic>
         <p:nvPicPr>
-          <p:cNvPr id="114" name="Picture 113" descr="MdFamilyRestroom-D98F4E.png"/>
+          <p:cNvPr id="114" name="Picture 113" descr="MdForum-D98F4E.png"/>
           <p:cNvPicPr>
             <a:picLocks noChangeAspect="1"/>
           </p:cNvPicPr>
@@ -15804,7 +16085,7 @@
                 <a:cs typeface="Google Sans Flex SemiBold"/>
                 <a:sym typeface="Google Sans Flex SemiBold"/>
               </a:rPr>
-              <a:t>Family page, real voice</a:t>
+              <a:t>The family asks back</a:t>
             </a:r>
           </a:p>
           <a:p>
@@ -15830,7 +16111,7 @@
                 <a:cs typeface="Google Sans Flex"/>
                 <a:sym typeface="Google Sans Flex"/>
               </a:rPr>
-              <a:t>Chapters by life stage. Every quote plays as a clip of the original answer.</a:t>
+              <a:t>A relative says who they are and asks; it says who asked. Refused topics are never raised.</a:t>
             </a:r>
           </a:p>
         </p:txBody>
@@ -15897,7 +16178,7 @@
       </p:sp>
       <p:pic>
         <p:nvPicPr>
-          <p:cNvPr id="118" name="Picture 117" descr="MdForum-D98F4E.png"/>
+          <p:cNvPr id="118" name="Picture 117" descr="MdTranslate-D98F4E.png"/>
           <p:cNvPicPr>
             <a:picLocks noChangeAspect="1"/>
           </p:cNvPicPr>
@@ -15960,7 +16241,7 @@
                 <a:cs typeface="Google Sans Flex SemiBold"/>
                 <a:sym typeface="Google Sans Flex SemiBold"/>
               </a:rPr>
-              <a:t>The family asks back</a:t>
+              <a:t>Japanese, with English</a:t>
             </a:r>
           </a:p>
           <a:p>
@@ -15986,7 +16267,7 @@
                 <a:cs typeface="Google Sans Flex"/>
                 <a:sym typeface="Google Sans Flex"/>
               </a:rPr>
-              <a:t>Relatives send questions and the AI says who is asking. Refused topics are never asked.</a:t>
+              <a:t>The family page in one language at a time, with a switch. Quotes keep the words as said.</a:t>
             </a:r>
           </a:p>
         </p:txBody>
@@ -16315,7 +16596,7 @@
                 <a:cs typeface="Google Sans Flex"/>
                 <a:sym typeface="Google Sans Flex"/>
               </a:rPr>
-              <a:t>5–10 min in Japanese with Gemini Live. The senior leads, the AI follows.</a:t>
+              <a:t>Live, by voice. Speaks first, asks one thing, waits through a pause.</a:t>
             </a:r>
           </a:p>
         </p:txBody>
@@ -16443,7 +16724,7 @@
                 <a:cs typeface="Google Sans Flex SemiBold"/>
                 <a:sym typeface="Google Sans Flex SemiBold"/>
               </a:rPr>
-              <a:t>Store</a:t>
+              <a:t>Write</a:t>
             </a:r>
           </a:p>
           <a:p>
@@ -16469,7 +16750,7 @@
                 <a:cs typeface="Google Sans Flex"/>
                 <a:sym typeface="Google Sans Flex"/>
               </a:rPr>
-              <a:t>A stereo recording and both transcripts, per session.</a:t>
+              <a:t>The talk becomes stories, each resting on their own sentences.</a:t>
             </a:r>
           </a:p>
         </p:txBody>
@@ -16597,7 +16878,7 @@
                 <a:cs typeface="Google Sans Flex SemiBold"/>
                 <a:sym typeface="Google Sans Flex SemiBold"/>
               </a:rPr>
-              <a:t>Extract and verify</a:t>
+              <a:t>Check</a:t>
             </a:r>
           </a:p>
           <a:p>
@@ -16623,7 +16904,7 @@
                 <a:cs typeface="Google Sans Flex"/>
                 <a:sym typeface="Google Sans Flex"/>
               </a:rPr>
-              <a:t>Stories, people, places. Quotes and consent checked verbatim.</a:t>
+              <a:t>Each quote found word for word, then heard in the recording.</a:t>
             </a:r>
           </a:p>
         </p:txBody>
@@ -16751,7 +17032,7 @@
                 <a:cs typeface="Google Sans Flex SemiBold"/>
                 <a:sym typeface="Google Sans Flex SemiBold"/>
               </a:rPr>
-              <a:t>Timeline</a:t>
+              <a:t>Share</a:t>
             </a:r>
           </a:p>
           <a:p>
@@ -16777,7 +17058,7 @@
                 <a:cs typeface="Google Sans Flex"/>
                 <a:sym typeface="Google Sans Flex"/>
               </a:rPr>
-              <a:t>Stories placed on life stages: childhood, work, marriage…</a:t>
+              <a:t>At the close: may the family read today's? Only a yes goes on.</a:t>
             </a:r>
           </a:p>
         </p:txBody>
@@ -16905,7 +17186,7 @@
                 <a:cs typeface="Google Sans Flex SemiBold"/>
                 <a:sym typeface="Google Sans Flex SemiBold"/>
               </a:rPr>
-              <a:t>Find gaps</a:t>
+              <a:t>Plan</a:t>
             </a:r>
           </a:p>
           <a:p>
@@ -16931,14 +17212,14 @@
                 <a:cs typeface="Google Sans Flex"/>
                 <a:sym typeface="Google Sans Flex"/>
               </a:rPr>
-              <a:t>Thin life stages, people never described, stories cut short.</a:t>
-            </a:r>
-          </a:p>
-        </p:txBody>
-      </p:sp>
-      <p:sp>
-        <p:nvSpPr>
-          <p:cNvPr id="111" name="Step 6"/>
+              <a:t>Finds what is still untold; plans the next three questions.</a:t>
+            </a:r>
+          </a:p>
+        </p:txBody>
+      </p:sp>
+      <p:sp>
+        <p:nvSpPr>
+          <p:cNvPr id="111" name="Next conversation"/>
           <p:cNvSpPr/>
           <p:nvPr/>
         </p:nvSpPr>
@@ -16975,8 +17256,8 @@
         </p:nvSpPr>
         <p:spPr>
           <a:xfrm>
-            <a:off x="484632" y="2670048"/>
-            <a:ext cx="274320" cy="274320"/>
+            <a:off x="466344" y="2651760"/>
+            <a:ext cx="310896" cy="310896"/>
           </a:xfrm>
           <a:prstGeom prst="ellipse">
             <a:avLst/>
@@ -16989,160 +17270,6 @@
           </a:ln>
         </p:spPr>
         <p:txBody>
-          <a:bodyPr rtlCol="0" anchor="ctr" wrap="square" lIns="0" tIns="0" rIns="0" bIns="0">
-            <a:noAutofit/>
-          </a:bodyPr>
-          <a:lstStyle/>
-          <a:p>
-            <a:pPr algn="ctr" marL="0" indent="0">
-              <a:spcBef>
-                <a:spcPts val="0"/>
-              </a:spcBef>
-              <a:spcAft>
-                <a:spcPts val="0"/>
-              </a:spcAft>
-              <a:buNone/>
-            </a:pPr>
-            <a:r>
-              <a:rPr lang="en-GB" sz="1000" dirty="0">
-                <a:solidFill>
-                  <a:srgbClr val="D98F4E"/>
-                </a:solidFill>
-                <a:latin typeface="Google Sans Flex SemiBold"/>
-                <a:ea typeface="Hiragino Sans"/>
-                <a:cs typeface="Google Sans Flex SemiBold"/>
-                <a:sym typeface="Google Sans Flex SemiBold"/>
-              </a:rPr>
-              <a:t>6</a:t>
-            </a:r>
-          </a:p>
-        </p:txBody>
-      </p:sp>
-      <p:sp>
-        <p:nvSpPr>
-          <p:cNvPr id="113" name="Step 6 text"/>
-          <p:cNvSpPr txBox="1"/>
-          <p:nvPr/>
-        </p:nvSpPr>
-        <p:spPr>
-          <a:xfrm>
-            <a:off x="868680" y="2651760"/>
-            <a:ext cx="1737360" cy="640080"/>
-          </a:xfrm>
-          <a:prstGeom prst="rect">
-            <a:avLst/>
-          </a:prstGeom>
-          <a:noFill/>
-        </p:spPr>
-        <p:txBody>
-          <a:bodyPr wrap="square" lIns="0" tIns="0" rIns="0" bIns="0" anchor="t">
-            <a:noAutofit/>
-          </a:bodyPr>
-          <a:lstStyle/>
-          <a:p>
-            <a:pPr algn="l" marL="0" indent="0">
-              <a:spcBef>
-                <a:spcPts val="0"/>
-              </a:spcBef>
-              <a:spcAft>
-                <a:spcPts val="200"/>
-              </a:spcAft>
-              <a:buNone/>
-            </a:pPr>
-            <a:r>
-              <a:rPr lang="en-GB" sz="1150" dirty="0">
-                <a:solidFill>
-                  <a:srgbClr val="202124"/>
-                </a:solidFill>
-                <a:latin typeface="Google Sans Flex SemiBold"/>
-                <a:ea typeface="Hiragino Sans"/>
-                <a:cs typeface="Google Sans Flex SemiBold"/>
-                <a:sym typeface="Google Sans Flex SemiBold"/>
-              </a:rPr>
-              <a:t>Plan the next talk</a:t>
-            </a:r>
-          </a:p>
-          <a:p>
-            <a:pPr algn="l" marL="0" indent="0">
-              <a:lnSpc>
-                <a:spcPct val="100000"/>
-              </a:lnSpc>
-              <a:spcBef>
-                <a:spcPts val="0"/>
-              </a:spcBef>
-              <a:spcAft>
-                <a:spcPts val="0"/>
-              </a:spcAft>
-              <a:buNone/>
-            </a:pPr>
-            <a:r>
-              <a:rPr lang="en-GB" sz="950" dirty="0">
-                <a:solidFill>
-                  <a:srgbClr val="5F6368"/>
-                </a:solidFill>
-                <a:latin typeface="Google Sans Flex"/>
-                <a:ea typeface="Hiragino Sans"/>
-                <a:cs typeface="Google Sans Flex"/>
-                <a:sym typeface="Google Sans Flex"/>
-              </a:rPr>
-              <a:t>Story so far, three questions, and topics to avoid.</a:t>
-            </a:r>
-          </a:p>
-        </p:txBody>
-      </p:sp>
-      <p:sp>
-        <p:nvSpPr>
-          <p:cNvPr id="114" name="Family reads"/>
-          <p:cNvSpPr/>
-          <p:nvPr/>
-        </p:nvSpPr>
-        <p:spPr>
-          <a:xfrm>
-            <a:off x="6409944" y="3758184"/>
-            <a:ext cx="2377440" cy="822960"/>
-          </a:xfrm>
-          <a:prstGeom prst="roundRect">
-            <a:avLst>
-              <a:gd name="adj" fmla="val 11111"/>
-            </a:avLst>
-          </a:prstGeom>
-          <a:solidFill>
-            <a:srgbClr val="FBEEE2"/>
-          </a:solidFill>
-          <a:ln>
-            <a:noFill/>
-          </a:ln>
-        </p:spPr>
-        <p:txBody>
-          <a:bodyPr rtlCol="0" anchor="ctr"/>
-          <a:lstStyle/>
-          <a:p>
-            <a:pPr algn="ctr"/>
-          </a:p>
-        </p:txBody>
-      </p:sp>
-      <p:sp>
-        <p:nvSpPr>
-          <p:cNvPr id="115" name="Oval 114"/>
-          <p:cNvSpPr/>
-          <p:nvPr/>
-        </p:nvSpPr>
-        <p:spPr>
-          <a:xfrm>
-            <a:off x="6519672" y="3867912"/>
-            <a:ext cx="310896" cy="310896"/>
-          </a:xfrm>
-          <a:prstGeom prst="ellipse">
-            <a:avLst/>
-          </a:prstGeom>
-          <a:solidFill>
-            <a:srgbClr val="1F1F1F"/>
-          </a:solidFill>
-          <a:ln>
-            <a:noFill/>
-          </a:ln>
-        </p:spPr>
-        <p:txBody>
           <a:bodyPr rtlCol="0" anchor="ctr"/>
           <a:lstStyle/>
           <a:p>
@@ -17152,7 +17279,7 @@
       </p:sp>
       <p:pic>
         <p:nvPicPr>
-          <p:cNvPr id="116" name="Picture 115" descr="MdFamilyRestroom-D98F4E.png"/>
+          <p:cNvPr id="113" name="Picture 112" descr="MdHistory-D98F4E.png"/>
           <p:cNvPicPr>
             <a:picLocks noChangeAspect="1"/>
           </p:cNvPicPr>
@@ -17166,7 +17293,7 @@
         </p:blipFill>
         <p:spPr>
           <a:xfrm>
-            <a:off x="6588069" y="3936309"/>
+            <a:off x="534741" y="2720157"/>
             <a:ext cx="174102" cy="174102"/>
           </a:xfrm>
           <a:prstGeom prst="rect">
@@ -17176,13 +17303,13 @@
       </p:pic>
       <p:sp>
         <p:nvSpPr>
-          <p:cNvPr id="117" name="Family reads text"/>
+          <p:cNvPr id="114" name="Next conversation text"/>
           <p:cNvSpPr txBox="1"/>
           <p:nvPr/>
         </p:nvSpPr>
         <p:spPr>
           <a:xfrm>
-            <a:off x="6922008" y="3867912"/>
+            <a:off x="868680" y="2651760"/>
             <a:ext cx="1737360" cy="640080"/>
           </a:xfrm>
           <a:prstGeom prst="rect">
@@ -17215,7 +17342,7 @@
                 <a:cs typeface="Google Sans Flex SemiBold"/>
                 <a:sym typeface="Google Sans Flex SemiBold"/>
               </a:rPr>
-              <a:t>Family reads</a:t>
+              <a:t>Next conversation</a:t>
             </a:r>
           </a:p>
           <a:p>
@@ -17241,20 +17368,20 @@
                 <a:cs typeface="Google Sans Flex"/>
                 <a:sym typeface="Google Sans Flex"/>
               </a:rPr>
-              <a:t>Only stories the senior agreed to share, each with its audio.</a:t>
-            </a:r>
-          </a:p>
-        </p:txBody>
-      </p:sp>
-      <p:sp>
-        <p:nvSpPr>
-          <p:cNvPr id="118" name="Family asks back"/>
+              <a:t>Opens with last time, or with the family's question.</a:t>
+            </a:r>
+          </a:p>
+        </p:txBody>
+      </p:sp>
+      <p:sp>
+        <p:nvSpPr>
+          <p:cNvPr id="115" name="Screened"/>
           <p:cNvSpPr/>
           <p:nvPr/>
         </p:nvSpPr>
         <p:spPr>
           <a:xfrm>
-            <a:off x="3383280" y="3758184"/>
+            <a:off x="356616" y="3758184"/>
             <a:ext cx="2377440" cy="822960"/>
           </a:xfrm>
           <a:prstGeom prst="roundRect">
@@ -17279,13 +17406,13 @@
       </p:sp>
       <p:sp>
         <p:nvSpPr>
-          <p:cNvPr id="119" name="Oval 118"/>
+          <p:cNvPr id="116" name="Oval 115"/>
           <p:cNvSpPr/>
           <p:nvPr/>
         </p:nvSpPr>
         <p:spPr>
           <a:xfrm>
-            <a:off x="3493008" y="3867912"/>
+            <a:off x="466344" y="3867912"/>
             <a:ext cx="310896" cy="310896"/>
           </a:xfrm>
           <a:prstGeom prst="ellipse">
@@ -17308,7 +17435,7 @@
       </p:sp>
       <p:pic>
         <p:nvPicPr>
-          <p:cNvPr id="120" name="Picture 119" descr="MdForum-D98F4E.png"/>
+          <p:cNvPr id="117" name="Picture 116" descr="MdVerifiedUser-D98F4E.png"/>
           <p:cNvPicPr>
             <a:picLocks noChangeAspect="1"/>
           </p:cNvPicPr>
@@ -17322,7 +17449,7 @@
         </p:blipFill>
         <p:spPr>
           <a:xfrm>
-            <a:off x="3561405" y="3936309"/>
+            <a:off x="534741" y="3936309"/>
             <a:ext cx="174102" cy="174102"/>
           </a:xfrm>
           <a:prstGeom prst="rect">
@@ -17332,13 +17459,13 @@
       </p:pic>
       <p:sp>
         <p:nvSpPr>
-          <p:cNvPr id="121" name="Family asks back text"/>
+          <p:cNvPr id="118" name="Screened text"/>
           <p:cNvSpPr txBox="1"/>
           <p:nvPr/>
         </p:nvSpPr>
         <p:spPr>
           <a:xfrm>
-            <a:off x="3895344" y="3867912"/>
+            <a:off x="868680" y="3867912"/>
             <a:ext cx="1737360" cy="640080"/>
           </a:xfrm>
           <a:prstGeom prst="rect">
@@ -17371,7 +17498,7 @@
                 <a:cs typeface="Google Sans Flex SemiBold"/>
                 <a:sym typeface="Google Sans Flex SemiBold"/>
               </a:rPr>
-              <a:t>Family asks back</a:t>
+              <a:t>Screened</a:t>
             </a:r>
           </a:p>
           <a:p>
@@ -17397,20 +17524,20 @@
                 <a:cs typeface="Google Sans Flex"/>
                 <a:sym typeface="Google Sans Flex"/>
               </a:rPr>
-              <a:t>A relative writes a question, and who they are: granddaughter Yuka.</a:t>
-            </a:r>
-          </a:p>
-        </p:txBody>
-      </p:sp>
-      <p:sp>
-        <p:nvSpPr>
-          <p:cNvPr id="122" name="Screened"/>
+              <a:t>A question touching a refused topic is quietly held back.</a:t>
+            </a:r>
+          </a:p>
+        </p:txBody>
+      </p:sp>
+      <p:sp>
+        <p:nvSpPr>
+          <p:cNvPr id="119" name="Family asks back"/>
           <p:cNvSpPr/>
           <p:nvPr/>
         </p:nvSpPr>
         <p:spPr>
           <a:xfrm>
-            <a:off x="356616" y="3758184"/>
+            <a:off x="3383280" y="3758184"/>
             <a:ext cx="2377440" cy="822960"/>
           </a:xfrm>
           <a:prstGeom prst="roundRect">
@@ -17435,13 +17562,13 @@
       </p:sp>
       <p:sp>
         <p:nvSpPr>
-          <p:cNvPr id="123" name="Oval 122"/>
+          <p:cNvPr id="120" name="Oval 119"/>
           <p:cNvSpPr/>
           <p:nvPr/>
         </p:nvSpPr>
         <p:spPr>
           <a:xfrm>
-            <a:off x="466344" y="3867912"/>
+            <a:off x="3493008" y="3867912"/>
             <a:ext cx="310896" cy="310896"/>
           </a:xfrm>
           <a:prstGeom prst="ellipse">
@@ -17464,7 +17591,7 @@
       </p:sp>
       <p:pic>
         <p:nvPicPr>
-          <p:cNvPr id="124" name="Picture 123" descr="MdVerifiedUser-D98F4E.png"/>
+          <p:cNvPr id="121" name="Picture 120" descr="MdForum-D98F4E.png"/>
           <p:cNvPicPr>
             <a:picLocks noChangeAspect="1"/>
           </p:cNvPicPr>
@@ -17478,7 +17605,7 @@
         </p:blipFill>
         <p:spPr>
           <a:xfrm>
-            <a:off x="534741" y="3936309"/>
+            <a:off x="3561405" y="3936309"/>
             <a:ext cx="174102" cy="174102"/>
           </a:xfrm>
           <a:prstGeom prst="rect">
@@ -17488,13 +17615,13 @@
       </p:pic>
       <p:sp>
         <p:nvSpPr>
-          <p:cNvPr id="125" name="Screened text"/>
+          <p:cNvPr id="122" name="Family asks back text"/>
           <p:cNvSpPr txBox="1"/>
           <p:nvPr/>
         </p:nvSpPr>
         <p:spPr>
           <a:xfrm>
-            <a:off x="868680" y="3867912"/>
+            <a:off x="3895344" y="3867912"/>
             <a:ext cx="1737360" cy="640080"/>
           </a:xfrm>
           <a:prstGeom prst="rect">
@@ -17527,7 +17654,7 @@
                 <a:cs typeface="Google Sans Flex SemiBold"/>
                 <a:sym typeface="Google Sans Flex SemiBold"/>
               </a:rPr>
-              <a:t>Screened</a:t>
+              <a:t>Family asks back</a:t>
             </a:r>
           </a:p>
           <a:p>
@@ -17553,14 +17680,170 @@
                 <a:cs typeface="Google Sans Flex"/>
                 <a:sym typeface="Google Sans Flex"/>
               </a:rPr>
-              <a:t>A question touching a refused topic is quietly held back.</a:t>
+              <a:t>A relative says who they are, then asks: grandchild Yuka.</a:t>
+            </a:r>
+          </a:p>
+        </p:txBody>
+      </p:sp>
+      <p:sp>
+        <p:nvSpPr>
+          <p:cNvPr id="123" name="Family reads"/>
+          <p:cNvSpPr/>
+          <p:nvPr/>
+        </p:nvSpPr>
+        <p:spPr>
+          <a:xfrm>
+            <a:off x="6409944" y="3758184"/>
+            <a:ext cx="2377440" cy="822960"/>
+          </a:xfrm>
+          <a:prstGeom prst="roundRect">
+            <a:avLst>
+              <a:gd name="adj" fmla="val 11111"/>
+            </a:avLst>
+          </a:prstGeom>
+          <a:solidFill>
+            <a:srgbClr val="FBEEE2"/>
+          </a:solidFill>
+          <a:ln>
+            <a:noFill/>
+          </a:ln>
+        </p:spPr>
+        <p:txBody>
+          <a:bodyPr rtlCol="0" anchor="ctr"/>
+          <a:lstStyle/>
+          <a:p>
+            <a:pPr algn="ctr"/>
+          </a:p>
+        </p:txBody>
+      </p:sp>
+      <p:sp>
+        <p:nvSpPr>
+          <p:cNvPr id="124" name="Oval 123"/>
+          <p:cNvSpPr/>
+          <p:nvPr/>
+        </p:nvSpPr>
+        <p:spPr>
+          <a:xfrm>
+            <a:off x="6519672" y="3867912"/>
+            <a:ext cx="310896" cy="310896"/>
+          </a:xfrm>
+          <a:prstGeom prst="ellipse">
+            <a:avLst/>
+          </a:prstGeom>
+          <a:solidFill>
+            <a:srgbClr val="1F1F1F"/>
+          </a:solidFill>
+          <a:ln>
+            <a:noFill/>
+          </a:ln>
+        </p:spPr>
+        <p:txBody>
+          <a:bodyPr rtlCol="0" anchor="ctr"/>
+          <a:lstStyle/>
+          <a:p>
+            <a:pPr algn="ctr"/>
+          </a:p>
+        </p:txBody>
+      </p:sp>
+      <p:pic>
+        <p:nvPicPr>
+          <p:cNvPr id="125" name="Picture 124" descr="MdFamilyRestroom-D98F4E.png"/>
+          <p:cNvPicPr>
+            <a:picLocks noChangeAspect="1"/>
+          </p:cNvPicPr>
+          <p:nvPr/>
+        </p:nvPicPr>
+        <p:blipFill>
+          <a:blip r:embed="rId8"/>
+          <a:stretch>
+            <a:fillRect/>
+          </a:stretch>
+        </p:blipFill>
+        <p:spPr>
+          <a:xfrm>
+            <a:off x="6588069" y="3936309"/>
+            <a:ext cx="174102" cy="174102"/>
+          </a:xfrm>
+          <a:prstGeom prst="rect">
+            <a:avLst/>
+          </a:prstGeom>
+        </p:spPr>
+      </p:pic>
+      <p:sp>
+        <p:nvSpPr>
+          <p:cNvPr id="126" name="Family reads text"/>
+          <p:cNvSpPr txBox="1"/>
+          <p:nvPr/>
+        </p:nvSpPr>
+        <p:spPr>
+          <a:xfrm>
+            <a:off x="6922008" y="3867912"/>
+            <a:ext cx="1737360" cy="640080"/>
+          </a:xfrm>
+          <a:prstGeom prst="rect">
+            <a:avLst/>
+          </a:prstGeom>
+          <a:noFill/>
+        </p:spPr>
+        <p:txBody>
+          <a:bodyPr wrap="square" lIns="0" tIns="0" rIns="0" bIns="0" anchor="t">
+            <a:noAutofit/>
+          </a:bodyPr>
+          <a:lstStyle/>
+          <a:p>
+            <a:pPr algn="l" marL="0" indent="0">
+              <a:spcBef>
+                <a:spcPts val="0"/>
+              </a:spcBef>
+              <a:spcAft>
+                <a:spcPts val="200"/>
+              </a:spcAft>
+              <a:buNone/>
+            </a:pPr>
+            <a:r>
+              <a:rPr lang="en-GB" sz="1150" dirty="0">
+                <a:solidFill>
+                  <a:srgbClr val="202124"/>
+                </a:solidFill>
+                <a:latin typeface="Google Sans Flex SemiBold"/>
+                <a:ea typeface="Hiragino Sans"/>
+                <a:cs typeface="Google Sans Flex SemiBold"/>
+                <a:sym typeface="Google Sans Flex SemiBold"/>
+              </a:rPr>
+              <a:t>Family reads</a:t>
+            </a:r>
+          </a:p>
+          <a:p>
+            <a:pPr algn="l" marL="0" indent="0">
+              <a:lnSpc>
+                <a:spcPct val="100000"/>
+              </a:lnSpc>
+              <a:spcBef>
+                <a:spcPts val="0"/>
+              </a:spcBef>
+              <a:spcAft>
+                <a:spcPts val="0"/>
+              </a:spcAft>
+              <a:buNone/>
+            </a:pPr>
+            <a:r>
+              <a:rPr lang="en-GB" sz="950" dirty="0">
+                <a:solidFill>
+                  <a:srgbClr val="5F6368"/>
+                </a:solidFill>
+                <a:latin typeface="Google Sans Flex"/>
+                <a:ea typeface="Hiragino Sans"/>
+                <a:cs typeface="Google Sans Flex"/>
+                <a:sym typeface="Google Sans Flex"/>
+              </a:rPr>
+              <a:t>A book by time of life; each quote with its clip.</a:t>
             </a:r>
           </a:p>
         </p:txBody>
       </p:sp>
       <p:cxnSp>
         <p:nvCxnSpPr>
-          <p:cNvPr id="126" name="Connector 125"/>
+          <p:cNvPr id="127" name="Connector 126"/>
           <p:cNvCxnSpPr/>
           <p:nvPr/>
         </p:nvCxnSpPr>
@@ -17582,7 +17865,7 @@
       </p:cxnSp>
       <p:cxnSp>
         <p:nvCxnSpPr>
-          <p:cNvPr id="127" name="Connector 126"/>
+          <p:cNvPr id="128" name="Connector 127"/>
           <p:cNvCxnSpPr/>
           <p:nvPr/>
         </p:nvCxnSpPr>
@@ -17604,7 +17887,7 @@
       </p:cxnSp>
       <p:cxnSp>
         <p:nvCxnSpPr>
-          <p:cNvPr id="128" name="Connector 127"/>
+          <p:cNvPr id="129" name="Connector 128"/>
           <p:cNvCxnSpPr/>
           <p:nvPr/>
         </p:nvCxnSpPr>
@@ -17626,7 +17909,7 @@
       </p:cxnSp>
       <p:cxnSp>
         <p:nvCxnSpPr>
-          <p:cNvPr id="129" name="Connector 128"/>
+          <p:cNvPr id="130" name="Connector 129"/>
           <p:cNvCxnSpPr/>
           <p:nvPr/>
         </p:nvCxnSpPr>
@@ -17648,7 +17931,7 @@
       </p:cxnSp>
       <p:cxnSp>
         <p:nvCxnSpPr>
-          <p:cNvPr id="130" name="Connector 129"/>
+          <p:cNvPr id="131" name="Connector 130"/>
           <p:cNvCxnSpPr/>
           <p:nvPr/>
         </p:nvCxnSpPr>
@@ -17670,7 +17953,7 @@
       </p:cxnSp>
       <p:cxnSp>
         <p:nvCxnSpPr>
-          <p:cNvPr id="131" name="Connector 130"/>
+          <p:cNvPr id="132" name="Connector 131"/>
           <p:cNvCxnSpPr/>
           <p:nvPr/>
         </p:nvCxnSpPr>
@@ -17692,7 +17975,7 @@
       </p:cxnSp>
       <p:cxnSp>
         <p:nvCxnSpPr>
-          <p:cNvPr id="132" name="Connector 131"/>
+          <p:cNvPr id="133" name="Connector 132"/>
           <p:cNvCxnSpPr/>
           <p:nvPr/>
         </p:nvCxnSpPr>
@@ -17714,7 +17997,7 @@
       </p:cxnSp>
       <p:cxnSp>
         <p:nvCxnSpPr>
-          <p:cNvPr id="133" name="Connector 132"/>
+          <p:cNvPr id="134" name="Connector 133"/>
           <p:cNvCxnSpPr/>
           <p:nvPr/>
         </p:nvCxnSpPr>
@@ -17736,7 +18019,7 @@
       </p:cxnSp>
       <p:cxnSp>
         <p:nvCxnSpPr>
-          <p:cNvPr id="134" name="Connector 133"/>
+          <p:cNvPr id="135" name="Connector 134"/>
           <p:cNvCxnSpPr/>
           <p:nvPr/>
         </p:nvCxnSpPr>
@@ -17758,7 +18041,7 @@
       </p:cxnSp>
       <p:cxnSp>
         <p:nvCxnSpPr>
-          <p:cNvPr id="135" name="Connector 134"/>
+          <p:cNvPr id="136" name="Connector 135"/>
           <p:cNvCxnSpPr/>
           <p:nvPr/>
         </p:nvCxnSpPr>
@@ -17780,7 +18063,7 @@
       </p:cxnSp>
       <p:sp>
         <p:nvSpPr>
-          <p:cNvPr id="136" name="Shared label"/>
+          <p:cNvPr id="137" name="Shared label"/>
           <p:cNvSpPr txBox="1"/>
           <p:nvPr/>
         </p:nvSpPr>
@@ -17826,7 +18109,7 @@
       </p:sp>
       <p:sp>
         <p:nvSpPr>
-          <p:cNvPr id="137" name="Limit label"/>
+          <p:cNvPr id="138" name="Limit label"/>
           <p:cNvSpPr txBox="1"/>
           <p:nvPr/>
         </p:nvSpPr>
@@ -17865,14 +18148,14 @@
                 <a:cs typeface="Google Sans Flex Medium"/>
                 <a:sym typeface="Google Sans Flex Medium"/>
               </a:rPr>
-              <a:t>up to two a session</a:t>
-            </a:r>
-          </a:p>
-        </p:txBody>
-      </p:sp>
-      <p:sp>
-        <p:nvSpPr>
-          <p:cNvPr id="138" name="Loop label"/>
+              <a:t>two at most</a:t>
+            </a:r>
+          </a:p>
+        </p:txBody>
+      </p:sp>
+      <p:sp>
+        <p:nvSpPr>
+          <p:cNvPr id="139" name="Loop label"/>
           <p:cNvSpPr txBox="1"/>
           <p:nvPr/>
         </p:nvSpPr>
@@ -17911,14 +18194,14 @@
                 <a:cs typeface="Google Sans Flex Medium"/>
                 <a:sym typeface="Google Sans Flex Medium"/>
               </a:rPr>
-              <a:t>next session</a:t>
-            </a:r>
-          </a:p>
-        </p:txBody>
-      </p:sp>
-      <p:sp>
-        <p:nvSpPr>
-          <p:cNvPr id="139" name="Legend swatch"/>
+              <a:t>next time</a:t>
+            </a:r>
+          </a:p>
+        </p:txBody>
+      </p:sp>
+      <p:sp>
+        <p:nvSpPr>
+          <p:cNvPr id="140" name="Legend swatch"/>
           <p:cNvSpPr/>
           <p:nvPr/>
         </p:nvSpPr>
@@ -17951,14 +18234,14 @@
       </p:sp>
       <p:sp>
         <p:nvSpPr>
-          <p:cNvPr id="140" name="Legend 1"/>
+          <p:cNvPr id="141" name="Legend 1"/>
           <p:cNvSpPr txBox="1"/>
           <p:nvPr/>
         </p:nvSpPr>
         <p:spPr>
           <a:xfrm>
             <a:off x="6217920" y="813816"/>
-            <a:ext cx="1280160" cy="274320"/>
+            <a:ext cx="1371600" cy="274320"/>
           </a:xfrm>
           <a:prstGeom prst="rect">
             <a:avLst/>
@@ -17990,14 +18273,14 @@
                 <a:cs typeface="Google Sans Flex Medium"/>
                 <a:sym typeface="Google Sans Flex Medium"/>
               </a:rPr>
-              <a:t>Every session</a:t>
-            </a:r>
-          </a:p>
-        </p:txBody>
-      </p:sp>
-      <p:sp>
-        <p:nvSpPr>
-          <p:cNvPr id="141" name="Legend swatch 2"/>
+              <a:t>Every conversation</a:t>
+            </a:r>
+          </a:p>
+        </p:txBody>
+      </p:sp>
+      <p:sp>
+        <p:nvSpPr>
+          <p:cNvPr id="142" name="Legend swatch 2"/>
           <p:cNvSpPr/>
           <p:nvPr/>
         </p:nvSpPr>
@@ -18030,7 +18313,7 @@
       </p:sp>
       <p:sp>
         <p:nvSpPr>
-          <p:cNvPr id="142" name="Legend 2"/>
+          <p:cNvPr id="143" name="Legend 2"/>
           <p:cNvSpPr txBox="1"/>
           <p:nvPr/>
         </p:nvSpPr>
@@ -18320,7 +18603,7 @@
         <p:spPr>
           <a:xfrm>
             <a:off x="658368" y="1581912"/>
-            <a:ext cx="914400" cy="228600"/>
+            <a:ext cx="1828800" cy="228600"/>
           </a:xfrm>
           <a:prstGeom prst="rect">
             <a:avLst/>
@@ -18352,21 +18635,21 @@
                 <a:cs typeface="Google Sans Flex Medium"/>
                 <a:sym typeface="Google Sans Flex Medium"/>
               </a:rPr>
-              <a:t>語り部</a:t>
-            </a:r>
-          </a:p>
-        </p:txBody>
-      </p:sp>
-      <p:sp>
-        <p:nvSpPr>
-          <p:cNvPr id="107" name="Greeting"/>
+              <a:t>田中ハルさん</a:t>
+            </a:r>
+          </a:p>
+        </p:txBody>
+      </p:sp>
+      <p:sp>
+        <p:nvSpPr>
+          <p:cNvPr id="107" name="Interviewer's words"/>
           <p:cNvSpPr txBox="1"/>
           <p:nvPr/>
         </p:nvSpPr>
         <p:spPr>
           <a:xfrm>
-            <a:off x="521208" y="1792224"/>
-            <a:ext cx="3602736" cy="438912"/>
+            <a:off x="749808" y="1783080"/>
+            <a:ext cx="3236976" cy="713232"/>
           </a:xfrm>
           <a:prstGeom prst="rect">
             <a:avLst/>
@@ -18380,16 +18663,19 @@
           <a:lstStyle/>
           <a:p>
             <a:pPr algn="ctr" marL="0" indent="0">
-              <a:spcBef>
-                <a:spcPts val="0"/>
-              </a:spcBef>
-              <a:spcAft>
-                <a:spcPts val="0"/>
-              </a:spcAft>
-              <a:buNone/>
-            </a:pPr>
-            <a:r>
-              <a:rPr lang="en-GB" sz="2200" dirty="0">
+              <a:lnSpc>
+                <a:spcPct val="110000"/>
+              </a:lnSpc>
+              <a:spcBef>
+                <a:spcPts val="0"/>
+              </a:spcBef>
+              <a:spcAft>
+                <a:spcPts val="0"/>
+              </a:spcAft>
+              <a:buNone/>
+            </a:pPr>
+            <a:r>
+              <a:rPr lang="en-GB" sz="1500" dirty="0">
                 <a:solidFill>
                   <a:srgbClr val="F0EBE5"/>
                 </a:solidFill>
@@ -18398,21 +18684,1131 @@
                 <a:cs typeface="Google Sans Flex Medium"/>
                 <a:sym typeface="Google Sans Flex Medium"/>
               </a:rPr>
-              <a:t>こんにちは、ハルさん</a:t>
-            </a:r>
-          </a:p>
-        </p:txBody>
-      </p:sp>
-      <p:sp>
-        <p:nvSpPr>
-          <p:cNvPr id="108" name="Topic"/>
+              <a:t>ハルさん、こんにちは。学校のころのお話を、聞かせてください。</a:t>
+            </a:r>
+          </a:p>
+        </p:txBody>
+      </p:sp>
+      <p:sp>
+        <p:nvSpPr>
+          <p:cNvPr id="108" name="Level 0"/>
           <p:cNvSpPr/>
           <p:nvPr/>
         </p:nvSpPr>
         <p:spPr>
           <a:xfrm>
-            <a:off x="996696" y="2331720"/>
-            <a:ext cx="2651760" cy="310896"/>
+            <a:off x="1933956" y="2688336"/>
+            <a:ext cx="64008" cy="91440"/>
+          </a:xfrm>
+          <a:prstGeom prst="roundRect">
+            <a:avLst>
+              <a:gd name="adj" fmla="val 50000"/>
+            </a:avLst>
+          </a:prstGeom>
+          <a:solidFill>
+            <a:srgbClr val="D98F4E"/>
+          </a:solidFill>
+          <a:ln>
+            <a:noFill/>
+          </a:ln>
+        </p:spPr>
+        <p:txBody>
+          <a:bodyPr rtlCol="0" anchor="ctr"/>
+          <a:lstStyle/>
+          <a:p>
+            <a:pPr algn="ctr"/>
+          </a:p>
+        </p:txBody>
+      </p:sp>
+      <p:sp>
+        <p:nvSpPr>
+          <p:cNvPr id="109" name="Level 1"/>
+          <p:cNvSpPr/>
+          <p:nvPr/>
+        </p:nvSpPr>
+        <p:spPr>
+          <a:xfrm>
+            <a:off x="2052828" y="2633472"/>
+            <a:ext cx="64008" cy="201168"/>
+          </a:xfrm>
+          <a:prstGeom prst="roundRect">
+            <a:avLst>
+              <a:gd name="adj" fmla="val 50000"/>
+            </a:avLst>
+          </a:prstGeom>
+          <a:solidFill>
+            <a:srgbClr val="D98F4E"/>
+          </a:solidFill>
+          <a:ln>
+            <a:noFill/>
+          </a:ln>
+        </p:spPr>
+        <p:txBody>
+          <a:bodyPr rtlCol="0" anchor="ctr"/>
+          <a:lstStyle/>
+          <a:p>
+            <a:pPr algn="ctr"/>
+          </a:p>
+        </p:txBody>
+      </p:sp>
+      <p:sp>
+        <p:nvSpPr>
+          <p:cNvPr id="110" name="Level 2"/>
+          <p:cNvSpPr/>
+          <p:nvPr/>
+        </p:nvSpPr>
+        <p:spPr>
+          <a:xfrm>
+            <a:off x="2171700" y="2578608"/>
+            <a:ext cx="64008" cy="310896"/>
+          </a:xfrm>
+          <a:prstGeom prst="roundRect">
+            <a:avLst>
+              <a:gd name="adj" fmla="val 50000"/>
+            </a:avLst>
+          </a:prstGeom>
+          <a:solidFill>
+            <a:srgbClr val="D98F4E"/>
+          </a:solidFill>
+          <a:ln>
+            <a:noFill/>
+          </a:ln>
+        </p:spPr>
+        <p:txBody>
+          <a:bodyPr rtlCol="0" anchor="ctr"/>
+          <a:lstStyle/>
+          <a:p>
+            <a:pPr algn="ctr"/>
+          </a:p>
+        </p:txBody>
+      </p:sp>
+      <p:sp>
+        <p:nvSpPr>
+          <p:cNvPr id="111" name="Level 3"/>
+          <p:cNvSpPr/>
+          <p:nvPr/>
+        </p:nvSpPr>
+        <p:spPr>
+          <a:xfrm>
+            <a:off x="2290572" y="2642616"/>
+            <a:ext cx="64008" cy="182880"/>
+          </a:xfrm>
+          <a:prstGeom prst="roundRect">
+            <a:avLst>
+              <a:gd name="adj" fmla="val 50000"/>
+            </a:avLst>
+          </a:prstGeom>
+          <a:solidFill>
+            <a:srgbClr val="D98F4E"/>
+          </a:solidFill>
+          <a:ln>
+            <a:noFill/>
+          </a:ln>
+        </p:spPr>
+        <p:txBody>
+          <a:bodyPr rtlCol="0" anchor="ctr"/>
+          <a:lstStyle/>
+          <a:p>
+            <a:pPr algn="ctr"/>
+          </a:p>
+        </p:txBody>
+      </p:sp>
+      <p:sp>
+        <p:nvSpPr>
+          <p:cNvPr id="112" name="Level 4"/>
+          <p:cNvSpPr/>
+          <p:nvPr/>
+        </p:nvSpPr>
+        <p:spPr>
+          <a:xfrm>
+            <a:off x="2409444" y="2606040"/>
+            <a:ext cx="64008" cy="256032"/>
+          </a:xfrm>
+          <a:prstGeom prst="roundRect">
+            <a:avLst>
+              <a:gd name="adj" fmla="val 50000"/>
+            </a:avLst>
+          </a:prstGeom>
+          <a:solidFill>
+            <a:srgbClr val="D98F4E"/>
+          </a:solidFill>
+          <a:ln>
+            <a:noFill/>
+          </a:ln>
+        </p:spPr>
+        <p:txBody>
+          <a:bodyPr rtlCol="0" anchor="ctr"/>
+          <a:lstStyle/>
+          <a:p>
+            <a:pPr algn="ctr"/>
+          </a:p>
+        </p:txBody>
+      </p:sp>
+      <p:sp>
+        <p:nvSpPr>
+          <p:cNvPr id="113" name="Level 5"/>
+          <p:cNvSpPr/>
+          <p:nvPr/>
+        </p:nvSpPr>
+        <p:spPr>
+          <a:xfrm>
+            <a:off x="2528316" y="2670048"/>
+            <a:ext cx="64008" cy="128016"/>
+          </a:xfrm>
+          <a:prstGeom prst="roundRect">
+            <a:avLst>
+              <a:gd name="adj" fmla="val 50000"/>
+            </a:avLst>
+          </a:prstGeom>
+          <a:solidFill>
+            <a:srgbClr val="D98F4E"/>
+          </a:solidFill>
+          <a:ln>
+            <a:noFill/>
+          </a:ln>
+        </p:spPr>
+        <p:txBody>
+          <a:bodyPr rtlCol="0" anchor="ctr"/>
+          <a:lstStyle/>
+          <a:p>
+            <a:pPr algn="ctr"/>
+          </a:p>
+        </p:txBody>
+      </p:sp>
+      <p:sp>
+        <p:nvSpPr>
+          <p:cNvPr id="114" name="Level 6"/>
+          <p:cNvSpPr/>
+          <p:nvPr/>
+        </p:nvSpPr>
+        <p:spPr>
+          <a:xfrm>
+            <a:off x="2647188" y="2697480"/>
+            <a:ext cx="64008" cy="73152"/>
+          </a:xfrm>
+          <a:prstGeom prst="roundRect">
+            <a:avLst>
+              <a:gd name="adj" fmla="val 50000"/>
+            </a:avLst>
+          </a:prstGeom>
+          <a:solidFill>
+            <a:srgbClr val="D98F4E"/>
+          </a:solidFill>
+          <a:ln>
+            <a:noFill/>
+          </a:ln>
+        </p:spPr>
+        <p:txBody>
+          <a:bodyPr rtlCol="0" anchor="ctr"/>
+          <a:lstStyle/>
+          <a:p>
+            <a:pPr algn="ctr"/>
+          </a:p>
+        </p:txBody>
+      </p:sp>
+      <p:sp>
+        <p:nvSpPr>
+          <p:cNvPr id="115" name="Phase"/>
+          <p:cNvSpPr txBox="1"/>
+          <p:nvPr/>
+        </p:nvSpPr>
+        <p:spPr>
+          <a:xfrm>
+            <a:off x="521208" y="2916936"/>
+            <a:ext cx="3602736" cy="228600"/>
+          </a:xfrm>
+          <a:prstGeom prst="rect">
+            <a:avLst/>
+          </a:prstGeom>
+          <a:noFill/>
+        </p:spPr>
+        <p:txBody>
+          <a:bodyPr wrap="square" lIns="0" tIns="0" rIns="0" bIns="0" anchor="t">
+            <a:noAutofit/>
+          </a:bodyPr>
+          <a:lstStyle/>
+          <a:p>
+            <a:pPr algn="ctr" marL="0" indent="0">
+              <a:spcBef>
+                <a:spcPts val="0"/>
+              </a:spcBef>
+              <a:spcAft>
+                <a:spcPts val="0"/>
+              </a:spcAft>
+              <a:buNone/>
+            </a:pPr>
+            <a:r>
+              <a:rPr lang="en-GB" sz="1000" dirty="0">
+                <a:solidFill>
+                  <a:srgbClr val="B5ABA1"/>
+                </a:solidFill>
+                <a:latin typeface="Google Sans Flex Medium"/>
+                <a:ea typeface="Hiragino Sans"/>
+                <a:cs typeface="Google Sans Flex Medium"/>
+                <a:sym typeface="Google Sans Flex Medium"/>
+              </a:rPr>
+              <a:t>お話ししています</a:t>
+            </a:r>
+          </a:p>
+        </p:txBody>
+      </p:sp>
+      <p:sp>
+        <p:nvSpPr>
+          <p:cNvPr id="116" name="Finish button"/>
+          <p:cNvSpPr/>
+          <p:nvPr/>
+        </p:nvSpPr>
+        <p:spPr>
+          <a:xfrm>
+            <a:off x="1636776" y="3209544"/>
+            <a:ext cx="1371600" cy="329184"/>
+          </a:xfrm>
+          <a:prstGeom prst="roundRect">
+            <a:avLst>
+              <a:gd name="adj" fmla="val 50000"/>
+            </a:avLst>
+          </a:prstGeom>
+          <a:solidFill>
+            <a:srgbClr val="A8503F"/>
+          </a:solidFill>
+          <a:ln>
+            <a:noFill/>
+          </a:ln>
+        </p:spPr>
+        <p:txBody>
+          <a:bodyPr rtlCol="0" anchor="ctr" wrap="square" lIns="36576" tIns="36576" rIns="36576" bIns="36576">
+            <a:noAutofit/>
+          </a:bodyPr>
+          <a:lstStyle/>
+          <a:p>
+            <a:pPr algn="ctr" marL="0" indent="0">
+              <a:spcBef>
+                <a:spcPts val="0"/>
+              </a:spcBef>
+              <a:spcAft>
+                <a:spcPts val="0"/>
+              </a:spcAft>
+              <a:buNone/>
+            </a:pPr>
+            <a:r>
+              <a:rPr lang="en-GB" sz="1300" dirty="0">
+                <a:solidFill>
+                  <a:srgbClr val="FFFFFF"/>
+                </a:solidFill>
+                <a:latin typeface="Google Sans Flex SemiBold"/>
+                <a:ea typeface="Hiragino Sans"/>
+                <a:cs typeface="Google Sans Flex SemiBold"/>
+                <a:sym typeface="Google Sans Flex SemiBold"/>
+              </a:rPr>
+              <a:t>おわる</a:t>
+            </a:r>
+          </a:p>
+        </p:txBody>
+      </p:sp>
+      <p:sp>
+        <p:nvSpPr>
+          <p:cNvPr id="117" name="Oval 116"/>
+          <p:cNvSpPr/>
+          <p:nvPr/>
+        </p:nvSpPr>
+        <p:spPr>
+          <a:xfrm>
+            <a:off x="4206240" y="2020824"/>
+            <a:ext cx="219456" cy="219456"/>
+          </a:xfrm>
+          <a:prstGeom prst="ellipse">
+            <a:avLst/>
+          </a:prstGeom>
+          <a:solidFill>
+            <a:srgbClr val="D98F4E"/>
+          </a:solidFill>
+          <a:ln>
+            <a:noFill/>
+          </a:ln>
+        </p:spPr>
+        <p:txBody>
+          <a:bodyPr rtlCol="0" anchor="ctr" wrap="square" lIns="0" tIns="0" rIns="0" bIns="0">
+            <a:noAutofit/>
+          </a:bodyPr>
+          <a:lstStyle/>
+          <a:p>
+            <a:pPr algn="ctr" marL="0" indent="0">
+              <a:spcBef>
+                <a:spcPts val="0"/>
+              </a:spcBef>
+              <a:spcAft>
+                <a:spcPts val="0"/>
+              </a:spcAft>
+              <a:buNone/>
+            </a:pPr>
+            <a:r>
+              <a:rPr lang="en-GB" sz="1000" dirty="0">
+                <a:solidFill>
+                  <a:srgbClr val="1F1F1F"/>
+                </a:solidFill>
+                <a:latin typeface="Google Sans Flex SemiBold"/>
+                <a:ea typeface="Hiragino Sans"/>
+                <a:cs typeface="Google Sans Flex SemiBold"/>
+                <a:sym typeface="Google Sans Flex SemiBold"/>
+              </a:rPr>
+              <a:t>1</a:t>
+            </a:r>
+          </a:p>
+        </p:txBody>
+      </p:sp>
+      <p:sp>
+        <p:nvSpPr>
+          <p:cNvPr id="118" name="Oval 117"/>
+          <p:cNvSpPr/>
+          <p:nvPr/>
+        </p:nvSpPr>
+        <p:spPr>
+          <a:xfrm>
+            <a:off x="4206240" y="2706624"/>
+            <a:ext cx="219456" cy="219456"/>
+          </a:xfrm>
+          <a:prstGeom prst="ellipse">
+            <a:avLst/>
+          </a:prstGeom>
+          <a:solidFill>
+            <a:srgbClr val="D98F4E"/>
+          </a:solidFill>
+          <a:ln>
+            <a:noFill/>
+          </a:ln>
+        </p:spPr>
+        <p:txBody>
+          <a:bodyPr rtlCol="0" anchor="ctr" wrap="square" lIns="0" tIns="0" rIns="0" bIns="0">
+            <a:noAutofit/>
+          </a:bodyPr>
+          <a:lstStyle/>
+          <a:p>
+            <a:pPr algn="ctr" marL="0" indent="0">
+              <a:spcBef>
+                <a:spcPts val="0"/>
+              </a:spcBef>
+              <a:spcAft>
+                <a:spcPts val="0"/>
+              </a:spcAft>
+              <a:buNone/>
+            </a:pPr>
+            <a:r>
+              <a:rPr lang="en-GB" sz="1000" dirty="0">
+                <a:solidFill>
+                  <a:srgbClr val="1F1F1F"/>
+                </a:solidFill>
+                <a:latin typeface="Google Sans Flex SemiBold"/>
+                <a:ea typeface="Hiragino Sans"/>
+                <a:cs typeface="Google Sans Flex SemiBold"/>
+                <a:sym typeface="Google Sans Flex SemiBold"/>
+              </a:rPr>
+              <a:t>2</a:t>
+            </a:r>
+          </a:p>
+        </p:txBody>
+      </p:sp>
+      <p:sp>
+        <p:nvSpPr>
+          <p:cNvPr id="119" name="Oval 118"/>
+          <p:cNvSpPr/>
+          <p:nvPr/>
+        </p:nvSpPr>
+        <p:spPr>
+          <a:xfrm>
+            <a:off x="4206240" y="3264408"/>
+            <a:ext cx="219456" cy="219456"/>
+          </a:xfrm>
+          <a:prstGeom prst="ellipse">
+            <a:avLst/>
+          </a:prstGeom>
+          <a:solidFill>
+            <a:srgbClr val="D98F4E"/>
+          </a:solidFill>
+          <a:ln>
+            <a:noFill/>
+          </a:ln>
+        </p:spPr>
+        <p:txBody>
+          <a:bodyPr rtlCol="0" anchor="ctr" wrap="square" lIns="0" tIns="0" rIns="0" bIns="0">
+            <a:noAutofit/>
+          </a:bodyPr>
+          <a:lstStyle/>
+          <a:p>
+            <a:pPr algn="ctr" marL="0" indent="0">
+              <a:spcBef>
+                <a:spcPts val="0"/>
+              </a:spcBef>
+              <a:spcAft>
+                <a:spcPts val="0"/>
+              </a:spcAft>
+              <a:buNone/>
+            </a:pPr>
+            <a:r>
+              <a:rPr lang="en-GB" sz="1000" dirty="0">
+                <a:solidFill>
+                  <a:srgbClr val="1F1F1F"/>
+                </a:solidFill>
+                <a:latin typeface="Google Sans Flex SemiBold"/>
+                <a:ea typeface="Hiragino Sans"/>
+                <a:cs typeface="Google Sans Flex SemiBold"/>
+                <a:sym typeface="Google Sans Flex SemiBold"/>
+              </a:rPr>
+              <a:t>3</a:t>
+            </a:r>
+          </a:p>
+        </p:txBody>
+      </p:sp>
+      <p:sp>
+        <p:nvSpPr>
+          <p:cNvPr id="120" name="Tablet caption"/>
+          <p:cNvSpPr txBox="1"/>
+          <p:nvPr/>
+        </p:nvSpPr>
+        <p:spPr>
+          <a:xfrm>
+            <a:off x="356616" y="3950208"/>
+            <a:ext cx="4343400" cy="274320"/>
+          </a:xfrm>
+          <a:prstGeom prst="rect">
+            <a:avLst/>
+          </a:prstGeom>
+          <a:noFill/>
+        </p:spPr>
+        <p:txBody>
+          <a:bodyPr wrap="square" lIns="0" tIns="0" rIns="0" bIns="0" anchor="t">
+            <a:noAutofit/>
+          </a:bodyPr>
+          <a:lstStyle/>
+          <a:p>
+            <a:pPr algn="l" marL="0" indent="0">
+              <a:spcBef>
+                <a:spcPts val="0"/>
+              </a:spcBef>
+              <a:spcAft>
+                <a:spcPts val="0"/>
+              </a:spcAft>
+              <a:buNone/>
+            </a:pPr>
+            <a:r>
+              <a:rPr lang="en-GB" sz="1100" dirty="0">
+                <a:solidFill>
+                  <a:srgbClr val="202124"/>
+                </a:solidFill>
+                <a:latin typeface="Google Sans Flex SemiBold"/>
+                <a:ea typeface="Hiragino Sans"/>
+                <a:cs typeface="Google Sans Flex SemiBold"/>
+                <a:sym typeface="Google Sans Flex SemiBold"/>
+              </a:rPr>
+              <a:t>The senior's screen: one button to start, nothing to learn</a:t>
+            </a:r>
+          </a:p>
+        </p:txBody>
+      </p:sp>
+      <p:sp>
+        <p:nvSpPr>
+          <p:cNvPr id="121" name="Oval 120"/>
+          <p:cNvSpPr/>
+          <p:nvPr/>
+        </p:nvSpPr>
+        <p:spPr>
+          <a:xfrm>
+            <a:off x="356616" y="4315968"/>
+            <a:ext cx="201168" cy="201168"/>
+          </a:xfrm>
+          <a:prstGeom prst="ellipse">
+            <a:avLst/>
+          </a:prstGeom>
+          <a:solidFill>
+            <a:srgbClr val="D98F4E"/>
+          </a:solidFill>
+          <a:ln>
+            <a:noFill/>
+          </a:ln>
+        </p:spPr>
+        <p:txBody>
+          <a:bodyPr rtlCol="0" anchor="ctr" wrap="square" lIns="0" tIns="0" rIns="0" bIns="0">
+            <a:noAutofit/>
+          </a:bodyPr>
+          <a:lstStyle/>
+          <a:p>
+            <a:pPr algn="ctr" marL="0" indent="0">
+              <a:spcBef>
+                <a:spcPts val="0"/>
+              </a:spcBef>
+              <a:spcAft>
+                <a:spcPts val="0"/>
+              </a:spcAft>
+              <a:buNone/>
+            </a:pPr>
+            <a:r>
+              <a:rPr lang="en-GB" sz="1000" dirty="0">
+                <a:solidFill>
+                  <a:srgbClr val="1F1F1F"/>
+                </a:solidFill>
+                <a:latin typeface="Google Sans Flex SemiBold"/>
+                <a:ea typeface="Hiragino Sans"/>
+                <a:cs typeface="Google Sans Flex SemiBold"/>
+                <a:sym typeface="Google Sans Flex SemiBold"/>
+              </a:rPr>
+              <a:t>1</a:t>
+            </a:r>
+          </a:p>
+        </p:txBody>
+      </p:sp>
+      <p:sp>
+        <p:nvSpPr>
+          <p:cNvPr id="122" name="Tablet note 1"/>
+          <p:cNvSpPr txBox="1"/>
+          <p:nvPr/>
+        </p:nvSpPr>
+        <p:spPr>
+          <a:xfrm>
+            <a:off x="630936" y="4297680"/>
+            <a:ext cx="1874520" cy="256032"/>
+          </a:xfrm>
+          <a:prstGeom prst="rect">
+            <a:avLst/>
+          </a:prstGeom>
+          <a:noFill/>
+        </p:spPr>
+        <p:txBody>
+          <a:bodyPr wrap="square" lIns="0" tIns="0" rIns="0" bIns="0" anchor="t">
+            <a:noAutofit/>
+          </a:bodyPr>
+          <a:lstStyle/>
+          <a:p>
+            <a:pPr algn="l" marL="0" indent="0">
+              <a:spcBef>
+                <a:spcPts val="0"/>
+              </a:spcBef>
+              <a:spcAft>
+                <a:spcPts val="0"/>
+              </a:spcAft>
+              <a:buNone/>
+            </a:pPr>
+            <a:r>
+              <a:rPr lang="en-GB" sz="950" dirty="0">
+                <a:solidFill>
+                  <a:srgbClr val="5F6368"/>
+                </a:solidFill>
+                <a:latin typeface="Google Sans Flex"/>
+                <a:ea typeface="Hiragino Sans"/>
+                <a:cs typeface="Google Sans Flex"/>
+                <a:sym typeface="Google Sans Flex"/>
+              </a:rPr>
+              <a:t>Its words, large, as it says them</a:t>
+            </a:r>
+          </a:p>
+        </p:txBody>
+      </p:sp>
+      <p:sp>
+        <p:nvSpPr>
+          <p:cNvPr id="123" name="Oval 122"/>
+          <p:cNvSpPr/>
+          <p:nvPr/>
+        </p:nvSpPr>
+        <p:spPr>
+          <a:xfrm>
+            <a:off x="2551176" y="4315968"/>
+            <a:ext cx="201168" cy="201168"/>
+          </a:xfrm>
+          <a:prstGeom prst="ellipse">
+            <a:avLst/>
+          </a:prstGeom>
+          <a:solidFill>
+            <a:srgbClr val="D98F4E"/>
+          </a:solidFill>
+          <a:ln>
+            <a:noFill/>
+          </a:ln>
+        </p:spPr>
+        <p:txBody>
+          <a:bodyPr rtlCol="0" anchor="ctr" wrap="square" lIns="0" tIns="0" rIns="0" bIns="0">
+            <a:noAutofit/>
+          </a:bodyPr>
+          <a:lstStyle/>
+          <a:p>
+            <a:pPr algn="ctr" marL="0" indent="0">
+              <a:spcBef>
+                <a:spcPts val="0"/>
+              </a:spcBef>
+              <a:spcAft>
+                <a:spcPts val="0"/>
+              </a:spcAft>
+              <a:buNone/>
+            </a:pPr>
+            <a:r>
+              <a:rPr lang="en-GB" sz="1000" dirty="0">
+                <a:solidFill>
+                  <a:srgbClr val="1F1F1F"/>
+                </a:solidFill>
+                <a:latin typeface="Google Sans Flex SemiBold"/>
+                <a:ea typeface="Hiragino Sans"/>
+                <a:cs typeface="Google Sans Flex SemiBold"/>
+                <a:sym typeface="Google Sans Flex SemiBold"/>
+              </a:rPr>
+              <a:t>2</a:t>
+            </a:r>
+          </a:p>
+        </p:txBody>
+      </p:sp>
+      <p:sp>
+        <p:nvSpPr>
+          <p:cNvPr id="124" name="Tablet note 2"/>
+          <p:cNvSpPr txBox="1"/>
+          <p:nvPr/>
+        </p:nvSpPr>
+        <p:spPr>
+          <a:xfrm>
+            <a:off x="2825496" y="4297680"/>
+            <a:ext cx="1874520" cy="256032"/>
+          </a:xfrm>
+          <a:prstGeom prst="rect">
+            <a:avLst/>
+          </a:prstGeom>
+          <a:noFill/>
+        </p:spPr>
+        <p:txBody>
+          <a:bodyPr wrap="square" lIns="0" tIns="0" rIns="0" bIns="0" anchor="t">
+            <a:noAutofit/>
+          </a:bodyPr>
+          <a:lstStyle/>
+          <a:p>
+            <a:pPr algn="l" marL="0" indent="0">
+              <a:spcBef>
+                <a:spcPts val="0"/>
+              </a:spcBef>
+              <a:spcAft>
+                <a:spcPts val="0"/>
+              </a:spcAft>
+              <a:buNone/>
+            </a:pPr>
+            <a:r>
+              <a:rPr lang="en-GB" sz="950" dirty="0">
+                <a:solidFill>
+                  <a:srgbClr val="5F6368"/>
+                </a:solidFill>
+                <a:latin typeface="Google Sans Flex"/>
+                <a:ea typeface="Hiragino Sans"/>
+                <a:cs typeface="Google Sans Flex"/>
+                <a:sym typeface="Google Sans Flex"/>
+              </a:rPr>
+              <a:t>Listening or speaking, calmly</a:t>
+            </a:r>
+          </a:p>
+        </p:txBody>
+      </p:sp>
+      <p:sp>
+        <p:nvSpPr>
+          <p:cNvPr id="125" name="Oval 124"/>
+          <p:cNvSpPr/>
+          <p:nvPr/>
+        </p:nvSpPr>
+        <p:spPr>
+          <a:xfrm>
+            <a:off x="356616" y="4608576"/>
+            <a:ext cx="201168" cy="201168"/>
+          </a:xfrm>
+          <a:prstGeom prst="ellipse">
+            <a:avLst/>
+          </a:prstGeom>
+          <a:solidFill>
+            <a:srgbClr val="D98F4E"/>
+          </a:solidFill>
+          <a:ln>
+            <a:noFill/>
+          </a:ln>
+        </p:spPr>
+        <p:txBody>
+          <a:bodyPr rtlCol="0" anchor="ctr" wrap="square" lIns="0" tIns="0" rIns="0" bIns="0">
+            <a:noAutofit/>
+          </a:bodyPr>
+          <a:lstStyle/>
+          <a:p>
+            <a:pPr algn="ctr" marL="0" indent="0">
+              <a:spcBef>
+                <a:spcPts val="0"/>
+              </a:spcBef>
+              <a:spcAft>
+                <a:spcPts val="0"/>
+              </a:spcAft>
+              <a:buNone/>
+            </a:pPr>
+            <a:r>
+              <a:rPr lang="en-GB" sz="1000" dirty="0">
+                <a:solidFill>
+                  <a:srgbClr val="1F1F1F"/>
+                </a:solidFill>
+                <a:latin typeface="Google Sans Flex SemiBold"/>
+                <a:ea typeface="Hiragino Sans"/>
+                <a:cs typeface="Google Sans Flex SemiBold"/>
+                <a:sym typeface="Google Sans Flex SemiBold"/>
+              </a:rPr>
+              <a:t>3</a:t>
+            </a:r>
+          </a:p>
+        </p:txBody>
+      </p:sp>
+      <p:sp>
+        <p:nvSpPr>
+          <p:cNvPr id="126" name="Tablet note 3"/>
+          <p:cNvSpPr txBox="1"/>
+          <p:nvPr/>
+        </p:nvSpPr>
+        <p:spPr>
+          <a:xfrm>
+            <a:off x="630936" y="4590288"/>
+            <a:ext cx="1874520" cy="256032"/>
+          </a:xfrm>
+          <a:prstGeom prst="rect">
+            <a:avLst/>
+          </a:prstGeom>
+          <a:noFill/>
+        </p:spPr>
+        <p:txBody>
+          <a:bodyPr wrap="square" lIns="0" tIns="0" rIns="0" bIns="0" anchor="t">
+            <a:noAutofit/>
+          </a:bodyPr>
+          <a:lstStyle/>
+          <a:p>
+            <a:pPr algn="l" marL="0" indent="0">
+              <a:spcBef>
+                <a:spcPts val="0"/>
+              </a:spcBef>
+              <a:spcAft>
+                <a:spcPts val="0"/>
+              </a:spcAft>
+              <a:buNone/>
+            </a:pPr>
+            <a:r>
+              <a:rPr lang="en-GB" sz="950" dirty="0">
+                <a:solidFill>
+                  <a:srgbClr val="5F6368"/>
+                </a:solidFill>
+                <a:latin typeface="Google Sans Flex"/>
+                <a:ea typeface="Hiragino Sans"/>
+                <a:cs typeface="Google Sans Flex"/>
+                <a:sym typeface="Google Sans Flex"/>
+              </a:rPr>
+              <a:t>One button to finish</a:t>
+            </a:r>
+          </a:p>
+        </p:txBody>
+      </p:sp>
+      <p:sp>
+        <p:nvSpPr>
+          <p:cNvPr id="127" name="Oval 126"/>
+          <p:cNvSpPr/>
+          <p:nvPr/>
+        </p:nvSpPr>
+        <p:spPr>
+          <a:xfrm>
+            <a:off x="2551176" y="4608576"/>
+            <a:ext cx="201168" cy="201168"/>
+          </a:xfrm>
+          <a:prstGeom prst="ellipse">
+            <a:avLst/>
+          </a:prstGeom>
+          <a:solidFill>
+            <a:srgbClr val="D98F4E"/>
+          </a:solidFill>
+          <a:ln>
+            <a:noFill/>
+          </a:ln>
+        </p:spPr>
+        <p:txBody>
+          <a:bodyPr rtlCol="0" anchor="ctr" wrap="square" lIns="0" tIns="0" rIns="0" bIns="0">
+            <a:noAutofit/>
+          </a:bodyPr>
+          <a:lstStyle/>
+          <a:p>
+            <a:pPr algn="ctr" marL="0" indent="0">
+              <a:spcBef>
+                <a:spcPts val="0"/>
+              </a:spcBef>
+              <a:spcAft>
+                <a:spcPts val="0"/>
+              </a:spcAft>
+              <a:buNone/>
+            </a:pPr>
+            <a:r>
+              <a:rPr lang="en-GB" sz="1000" dirty="0">
+                <a:solidFill>
+                  <a:srgbClr val="1F1F1F"/>
+                </a:solidFill>
+                <a:latin typeface="Google Sans Flex SemiBold"/>
+                <a:ea typeface="Hiragino Sans"/>
+                <a:cs typeface="Google Sans Flex SemiBold"/>
+                <a:sym typeface="Google Sans Flex SemiBold"/>
+              </a:rPr>
+              <a:t>4</a:t>
+            </a:r>
+          </a:p>
+        </p:txBody>
+      </p:sp>
+      <p:sp>
+        <p:nvSpPr>
+          <p:cNvPr id="128" name="Tablet note 4"/>
+          <p:cNvSpPr txBox="1"/>
+          <p:nvPr/>
+        </p:nvSpPr>
+        <p:spPr>
+          <a:xfrm>
+            <a:off x="2825496" y="4590288"/>
+            <a:ext cx="1874520" cy="256032"/>
+          </a:xfrm>
+          <a:prstGeom prst="rect">
+            <a:avLst/>
+          </a:prstGeom>
+          <a:noFill/>
+        </p:spPr>
+        <p:txBody>
+          <a:bodyPr wrap="square" lIns="0" tIns="0" rIns="0" bIns="0" anchor="t">
+            <a:noAutofit/>
+          </a:bodyPr>
+          <a:lstStyle/>
+          <a:p>
+            <a:pPr algn="l" marL="0" indent="0">
+              <a:spcBef>
+                <a:spcPts val="0"/>
+              </a:spcBef>
+              <a:spcAft>
+                <a:spcPts val="0"/>
+              </a:spcAft>
+              <a:buNone/>
+            </a:pPr>
+            <a:r>
+              <a:rPr lang="en-GB" sz="950" dirty="0">
+                <a:solidFill>
+                  <a:srgbClr val="5F6368"/>
+                </a:solidFill>
+                <a:latin typeface="Google Sans Flex"/>
+                <a:ea typeface="Hiragino Sans"/>
+                <a:cs typeface="Google Sans Flex"/>
+                <a:sym typeface="Google Sans Flex"/>
+              </a:rPr>
+              <a:t>Then: share today's story, or keep it</a:t>
+            </a:r>
+          </a:p>
+        </p:txBody>
+      </p:sp>
+      <p:sp>
+        <p:nvSpPr>
+          <p:cNvPr id="129" name="Phone frame"/>
+          <p:cNvSpPr/>
+          <p:nvPr/>
+        </p:nvSpPr>
+        <p:spPr>
+          <a:xfrm>
+            <a:off x="4937760" y="1325880"/>
+            <a:ext cx="1600200" cy="3291840"/>
+          </a:xfrm>
+          <a:prstGeom prst="roundRect">
+            <a:avLst>
+              <a:gd name="adj" fmla="val 12571"/>
+            </a:avLst>
+          </a:prstGeom>
+          <a:solidFill>
+            <a:srgbClr val="1F1F1F"/>
+          </a:solidFill>
+          <a:ln>
+            <a:noFill/>
+          </a:ln>
+        </p:spPr>
+        <p:txBody>
+          <a:bodyPr rtlCol="0" anchor="ctr"/>
+          <a:lstStyle/>
+          <a:p>
+            <a:pPr algn="ctr"/>
+          </a:p>
+        </p:txBody>
+      </p:sp>
+      <p:sp>
+        <p:nvSpPr>
+          <p:cNvPr id="130" name="Phone screen"/>
+          <p:cNvSpPr/>
+          <p:nvPr/>
+        </p:nvSpPr>
+        <p:spPr>
+          <a:xfrm>
+            <a:off x="5029200" y="1490472"/>
+            <a:ext cx="1417320" cy="2962656"/>
+          </a:xfrm>
+          <a:prstGeom prst="roundRect">
+            <a:avLst>
+              <a:gd name="adj" fmla="val 5161"/>
+            </a:avLst>
+          </a:prstGeom>
+          <a:solidFill>
+            <a:srgbClr val="12100E"/>
+          </a:solidFill>
+          <a:ln>
+            <a:noFill/>
+          </a:ln>
+        </p:spPr>
+        <p:txBody>
+          <a:bodyPr rtlCol="0" anchor="ctr"/>
+          <a:lstStyle/>
+          <a:p>
+            <a:pPr algn="ctr"/>
+          </a:p>
+        </p:txBody>
+      </p:sp>
+      <p:sp>
+        <p:nvSpPr>
+          <p:cNvPr id="131" name="TextBox 130"/>
+          <p:cNvSpPr txBox="1"/>
+          <p:nvPr/>
+        </p:nvSpPr>
+        <p:spPr>
+          <a:xfrm>
+            <a:off x="5138928" y="1581912"/>
+            <a:ext cx="1234440" cy="566928"/>
+          </a:xfrm>
+          <a:prstGeom prst="rect">
+            <a:avLst/>
+          </a:prstGeom>
+          <a:noFill/>
+        </p:spPr>
+        <p:txBody>
+          <a:bodyPr wrap="square" lIns="0" tIns="0" rIns="0" bIns="0" anchor="t">
+            <a:noAutofit/>
+          </a:bodyPr>
+          <a:lstStyle/>
+          <a:p>
+            <a:pPr algn="l" marL="0" indent="0">
+              <a:spcBef>
+                <a:spcPts val="0"/>
+              </a:spcBef>
+              <a:spcAft>
+                <a:spcPts val="0"/>
+              </a:spcAft>
+              <a:buNone/>
+            </a:pPr>
+            <a:r>
+              <a:rPr lang="en-GB" sz="550" dirty="0">
+                <a:solidFill>
+                  <a:srgbClr val="D98F4E"/>
+                </a:solidFill>
+                <a:latin typeface="Google Sans Flex SemiBold"/>
+                <a:ea typeface="Hiragino Sans"/>
+                <a:cs typeface="Google Sans Flex SemiBold"/>
+                <a:sym typeface="Google Sans Flex SemiBold"/>
+              </a:rPr>
+              <a:t>A LIFE STORY</a:t>
+            </a:r>
+          </a:p>
+          <a:p>
+            <a:pPr algn="l" marL="0" indent="0">
+              <a:spcBef>
+                <a:spcPts val="0"/>
+              </a:spcBef>
+              <a:spcAft>
+                <a:spcPts val="0"/>
+              </a:spcAft>
+              <a:buNone/>
+            </a:pPr>
+            <a:r>
+              <a:rPr lang="en-GB" sz="1100" dirty="0">
+                <a:solidFill>
+                  <a:srgbClr val="F0EBE5"/>
+                </a:solidFill>
+                <a:latin typeface="Google Sans Flex SemiBold"/>
+                <a:ea typeface="Hiragino Sans"/>
+                <a:cs typeface="Google Sans Flex SemiBold"/>
+                <a:sym typeface="Google Sans Flex SemiBold"/>
+              </a:rPr>
+              <a:t>Tanaka Haru</a:t>
+            </a:r>
+          </a:p>
+          <a:p>
+            <a:pPr algn="l" marL="0" indent="0">
+              <a:spcBef>
+                <a:spcPts val="0"/>
+              </a:spcBef>
+              <a:spcAft>
+                <a:spcPts val="0"/>
+              </a:spcAft>
+              <a:buNone/>
+            </a:pPr>
+            <a:r>
+              <a:rPr lang="en-GB" sz="600" dirty="0">
+                <a:solidFill>
+                  <a:srgbClr val="B5ABA1"/>
+                </a:solidFill>
+                <a:latin typeface="Google Sans Flex"/>
+                <a:ea typeface="Hiragino Sans"/>
+                <a:cs typeface="Google Sans Flex"/>
+                <a:sym typeface="Google Sans Flex"/>
+              </a:rPr>
+              <a:t>田中ハル · Born in 1947, Nagano</a:t>
+            </a:r>
+          </a:p>
+        </p:txBody>
+      </p:sp>
+      <p:sp>
+        <p:nvSpPr>
+          <p:cNvPr id="132" name="A life story  3"/>
+          <p:cNvSpPr/>
+          <p:nvPr/>
+        </p:nvSpPr>
+        <p:spPr>
+          <a:xfrm>
+            <a:off x="5138928" y="2185416"/>
+            <a:ext cx="603504" cy="164592"/>
+          </a:xfrm>
+          <a:prstGeom prst="roundRect">
+            <a:avLst>
+              <a:gd name="adj" fmla="val 50000"/>
+            </a:avLst>
+          </a:prstGeom>
+          <a:solidFill>
+            <a:srgbClr val="D98F4E"/>
+          </a:solidFill>
+          <a:ln>
+            <a:noFill/>
+          </a:ln>
+        </p:spPr>
+        <p:txBody>
+          <a:bodyPr rtlCol="0" anchor="ctr" wrap="square" lIns="0" tIns="0" rIns="0" bIns="0">
+            <a:noAutofit/>
+          </a:bodyPr>
+          <a:lstStyle/>
+          <a:p>
+            <a:pPr algn="ctr" marL="0" indent="0">
+              <a:spcBef>
+                <a:spcPts val="0"/>
+              </a:spcBef>
+              <a:spcAft>
+                <a:spcPts val="0"/>
+              </a:spcAft>
+              <a:buNone/>
+            </a:pPr>
+            <a:r>
+              <a:rPr lang="en-GB" sz="550" dirty="0">
+                <a:solidFill>
+                  <a:srgbClr val="1F1F1F"/>
+                </a:solidFill>
+                <a:latin typeface="Google Sans Flex SemiBold"/>
+                <a:ea typeface="Hiragino Sans"/>
+                <a:cs typeface="Google Sans Flex SemiBold"/>
+                <a:sym typeface="Google Sans Flex SemiBold"/>
+              </a:rPr>
+              <a:t>A life story  3</a:t>
+            </a:r>
+          </a:p>
+        </p:txBody>
+      </p:sp>
+      <p:sp>
+        <p:nvSpPr>
+          <p:cNvPr id="133" name="Questions  2"/>
+          <p:cNvSpPr/>
+          <p:nvPr/>
+        </p:nvSpPr>
+        <p:spPr>
+          <a:xfrm>
+            <a:off x="5779008" y="2185416"/>
+            <a:ext cx="548640" cy="164592"/>
           </a:xfrm>
           <a:prstGeom prst="roundRect">
             <a:avLst>
@@ -18427,7 +19823,7 @@
           </a:ln>
         </p:spPr>
         <p:txBody>
-          <a:bodyPr rtlCol="0" anchor="ctr" wrap="square" lIns="36576" tIns="36576" rIns="36576" bIns="36576">
+          <a:bodyPr rtlCol="0" anchor="ctr" wrap="square" lIns="0" tIns="0" rIns="0" bIns="0">
             <a:noAutofit/>
           </a:bodyPr>
           <a:lstStyle/>
@@ -18442,7 +19838,206 @@
               <a:buNone/>
             </a:pPr>
             <a:r>
-              <a:rPr lang="en-GB" sz="1100" dirty="0">
+              <a:rPr lang="en-GB" sz="550" dirty="0">
+                <a:solidFill>
+                  <a:srgbClr val="F0EBE5"/>
+                </a:solidFill>
+                <a:latin typeface="Google Sans Flex SemiBold"/>
+                <a:ea typeface="Hiragino Sans"/>
+                <a:cs typeface="Google Sans Flex SemiBold"/>
+                <a:sym typeface="Google Sans Flex SemiBold"/>
+              </a:rPr>
+              <a:t>Questions  2</a:t>
+            </a:r>
+          </a:p>
+        </p:txBody>
+      </p:sp>
+      <p:sp>
+        <p:nvSpPr>
+          <p:cNvPr id="134" name="TextBox 133"/>
+          <p:cNvSpPr txBox="1"/>
+          <p:nvPr/>
+        </p:nvSpPr>
+        <p:spPr>
+          <a:xfrm>
+            <a:off x="5138928" y="2441448"/>
+            <a:ext cx="1234440" cy="164592"/>
+          </a:xfrm>
+          <a:prstGeom prst="rect">
+            <a:avLst/>
+          </a:prstGeom>
+          <a:noFill/>
+        </p:spPr>
+        <p:txBody>
+          <a:bodyPr wrap="square" lIns="0" tIns="0" rIns="0" bIns="0" anchor="t">
+            <a:noAutofit/>
+          </a:bodyPr>
+          <a:lstStyle/>
+          <a:p>
+            <a:pPr algn="l" marL="0" indent="0">
+              <a:spcBef>
+                <a:spcPts val="0"/>
+              </a:spcBef>
+              <a:spcAft>
+                <a:spcPts val="0"/>
+              </a:spcAft>
+              <a:buNone/>
+            </a:pPr>
+            <a:r>
+              <a:rPr lang="en-GB" sz="550" dirty="0">
+                <a:solidFill>
+                  <a:srgbClr val="D98F4E"/>
+                </a:solidFill>
+                <a:latin typeface="Google Sans Flex SemiBold"/>
+                <a:ea typeface="Hiragino Sans"/>
+                <a:cs typeface="Google Sans Flex SemiBold"/>
+                <a:sym typeface="Google Sans Flex SemiBold"/>
+              </a:rPr>
+              <a:t>CHAPTER 1 · CHILDHOOD</a:t>
+            </a:r>
+          </a:p>
+        </p:txBody>
+      </p:sp>
+      <p:sp>
+        <p:nvSpPr>
+          <p:cNvPr id="135" name="TextBox 134"/>
+          <p:cNvSpPr txBox="1"/>
+          <p:nvPr/>
+        </p:nvSpPr>
+        <p:spPr>
+          <a:xfrm>
+            <a:off x="5138928" y="2587752"/>
+            <a:ext cx="1234440" cy="274320"/>
+          </a:xfrm>
+          <a:prstGeom prst="rect">
+            <a:avLst/>
+          </a:prstGeom>
+          <a:noFill/>
+        </p:spPr>
+        <p:txBody>
+          <a:bodyPr wrap="square" lIns="0" tIns="0" rIns="0" bIns="0" anchor="t">
+            <a:noAutofit/>
+          </a:bodyPr>
+          <a:lstStyle/>
+          <a:p>
+            <a:pPr algn="l" marL="0" indent="0">
+              <a:lnSpc>
+                <a:spcPct val="100000"/>
+              </a:lnSpc>
+              <a:spcBef>
+                <a:spcPts val="0"/>
+              </a:spcBef>
+              <a:spcAft>
+                <a:spcPts val="0"/>
+              </a:spcAft>
+              <a:buNone/>
+            </a:pPr>
+            <a:r>
+              <a:rPr lang="en-GB" sz="750" dirty="0">
+                <a:solidFill>
+                  <a:srgbClr val="F0EBE5"/>
+                </a:solidFill>
+                <a:latin typeface="Google Sans Flex SemiBold"/>
+                <a:ea typeface="Hiragino Sans"/>
+                <a:cs typeface="Google Sans Flex SemiBold"/>
+                <a:sym typeface="Google Sans Flex SemiBold"/>
+              </a:rPr>
+              <a:t>Her father's textile factory</a:t>
+            </a:r>
+          </a:p>
+        </p:txBody>
+      </p:sp>
+      <p:sp>
+        <p:nvSpPr>
+          <p:cNvPr id="136" name="TextBox 135"/>
+          <p:cNvSpPr txBox="1"/>
+          <p:nvPr/>
+        </p:nvSpPr>
+        <p:spPr>
+          <a:xfrm>
+            <a:off x="5138928" y="2880360"/>
+            <a:ext cx="1216152" cy="365760"/>
+          </a:xfrm>
+          <a:prstGeom prst="rect">
+            <a:avLst/>
+          </a:prstGeom>
+          <a:noFill/>
+        </p:spPr>
+        <p:txBody>
+          <a:bodyPr wrap="square" lIns="0" tIns="0" rIns="0" bIns="0" anchor="t">
+            <a:noAutofit/>
+          </a:bodyPr>
+          <a:lstStyle/>
+          <a:p>
+            <a:pPr algn="l" marL="0" indent="0">
+              <a:lnSpc>
+                <a:spcPct val="105000"/>
+              </a:lnSpc>
+              <a:spcBef>
+                <a:spcPts val="0"/>
+              </a:spcBef>
+              <a:spcAft>
+                <a:spcPts val="0"/>
+              </a:spcAft>
+              <a:buNone/>
+            </a:pPr>
+            <a:r>
+              <a:rPr lang="en-GB" sz="600" dirty="0">
+                <a:solidFill>
+                  <a:srgbClr val="F0EBE5"/>
+                </a:solidFill>
+                <a:latin typeface="Google Sans Flex"/>
+                <a:ea typeface="Hiragino Sans"/>
+                <a:cs typeface="Google Sans Flex"/>
+                <a:sym typeface="Google Sans Flex"/>
+              </a:rPr>
+              <a:t>Tanaka Haru grew up in a small mountain village in Nagano. Her father ran a small textile factory…</a:t>
+            </a:r>
+          </a:p>
+        </p:txBody>
+      </p:sp>
+      <p:sp>
+        <p:nvSpPr>
+          <p:cNvPr id="137" name="Quotes button"/>
+          <p:cNvSpPr/>
+          <p:nvPr/>
+        </p:nvSpPr>
+        <p:spPr>
+          <a:xfrm>
+            <a:off x="5138928" y="3273552"/>
+            <a:ext cx="713232" cy="155448"/>
+          </a:xfrm>
+          <a:prstGeom prst="roundRect">
+            <a:avLst>
+              <a:gd name="adj" fmla="val 47058"/>
+            </a:avLst>
+          </a:prstGeom>
+          <a:solidFill>
+            <a:srgbClr val="12100E"/>
+          </a:solidFill>
+          <a:ln w="9525">
+            <a:solidFill>
+              <a:srgbClr val="5A4A3C"/>
+            </a:solidFill>
+          </a:ln>
+        </p:spPr>
+        <p:txBody>
+          <a:bodyPr rtlCol="0" anchor="ctr" wrap="square" lIns="0" tIns="0" rIns="0" bIns="0">
+            <a:noAutofit/>
+          </a:bodyPr>
+          <a:lstStyle/>
+          <a:p>
+            <a:pPr algn="ctr" marL="0" indent="0">
+              <a:spcBef>
+                <a:spcPts val="0"/>
+              </a:spcBef>
+              <a:spcAft>
+                <a:spcPts val="0"/>
+              </a:spcAft>
+              <a:buNone/>
+            </a:pPr>
+            <a:r>
+              <a:rPr lang="en-GB" sz="550" dirty="0">
                 <a:solidFill>
                   <a:srgbClr val="D98F4E"/>
                 </a:solidFill>
@@ -18451,26 +20046,130 @@
                 <a:cs typeface="Google Sans Flex Medium"/>
                 <a:sym typeface="Google Sans Flex Medium"/>
               </a:rPr>
-              <a:t>今日のお話 · お父様の織物工場</a:t>
-            </a:r>
-          </a:p>
-        </p:txBody>
-      </p:sp>
-      <p:sp>
-        <p:nvSpPr>
-          <p:cNvPr id="109" name="Level 0"/>
+              <a:t>All 3 quotes</a:t>
+            </a:r>
+          </a:p>
+        </p:txBody>
+      </p:sp>
+      <p:sp>
+        <p:nvSpPr>
+          <p:cNvPr id="138" name="Quote"/>
           <p:cNvSpPr/>
           <p:nvPr/>
         </p:nvSpPr>
         <p:spPr>
           <a:xfrm>
-            <a:off x="1933956" y="2862072"/>
-            <a:ext cx="64008" cy="91440"/>
+            <a:off x="5138928" y="3502152"/>
+            <a:ext cx="1197864" cy="731520"/>
           </a:xfrm>
           <a:prstGeom prst="roundRect">
             <a:avLst>
-              <a:gd name="adj" fmla="val 50000"/>
+              <a:gd name="adj" fmla="val 6250"/>
             </a:avLst>
+          </a:prstGeom>
+          <a:solidFill>
+            <a:srgbClr val="26211D"/>
+          </a:solidFill>
+          <a:ln>
+            <a:noFill/>
+          </a:ln>
+        </p:spPr>
+        <p:txBody>
+          <a:bodyPr rtlCol="0" anchor="ctr"/>
+          <a:lstStyle/>
+          <a:p>
+            <a:pPr algn="ctr"/>
+          </a:p>
+        </p:txBody>
+      </p:sp>
+      <p:sp>
+        <p:nvSpPr>
+          <p:cNvPr id="139" name="TextBox 138"/>
+          <p:cNvSpPr txBox="1"/>
+          <p:nvPr/>
+        </p:nvSpPr>
+        <p:spPr>
+          <a:xfrm>
+            <a:off x="5212080" y="3538728"/>
+            <a:ext cx="1051560" cy="457200"/>
+          </a:xfrm>
+          <a:prstGeom prst="rect">
+            <a:avLst/>
+          </a:prstGeom>
+          <a:noFill/>
+        </p:spPr>
+        <p:txBody>
+          <a:bodyPr wrap="square" lIns="0" tIns="0" rIns="0" bIns="0" anchor="t">
+            <a:noAutofit/>
+          </a:bodyPr>
+          <a:lstStyle/>
+          <a:p>
+            <a:pPr algn="l" marL="0" indent="0">
+              <a:lnSpc>
+                <a:spcPct val="100000"/>
+              </a:lnSpc>
+              <a:spcBef>
+                <a:spcPts val="0"/>
+              </a:spcBef>
+              <a:spcAft>
+                <a:spcPts val="200"/>
+              </a:spcAft>
+              <a:buNone/>
+            </a:pPr>
+            <a:r>
+              <a:rPr lang="en-GB" sz="600" dirty="0">
+                <a:solidFill>
+                  <a:srgbClr val="F0EBE5"/>
+                </a:solidFill>
+                <a:latin typeface="Google Sans Flex"/>
+                <a:ea typeface="Hiragino Sans"/>
+                <a:cs typeface="Google Sans Flex"/>
+                <a:sym typeface="Google Sans Flex"/>
+              </a:rPr>
+              <a:t>「長野の、山あいの小さな村です。父は村で小さな織物の工場をやっておりました。」</a:t>
+            </a:r>
+          </a:p>
+          <a:p>
+            <a:pPr algn="l" marL="0" indent="0">
+              <a:lnSpc>
+                <a:spcPct val="100000"/>
+              </a:lnSpc>
+              <a:spcBef>
+                <a:spcPts val="0"/>
+              </a:spcBef>
+              <a:spcAft>
+                <a:spcPts val="0"/>
+              </a:spcAft>
+              <a:buNone/>
+            </a:pPr>
+            <a:r>
+              <a:rPr lang="en-GB" sz="550" dirty="0">
+                <a:solidFill>
+                  <a:srgbClr val="B5ABA1"/>
+                </a:solidFill>
+                <a:latin typeface="Google Sans Flex"/>
+                <a:ea typeface="Hiragino Sans"/>
+                <a:cs typeface="Google Sans Flex"/>
+                <a:sym typeface="Google Sans Flex"/>
+              </a:rPr>
+              <a:t>“It was a small village in Nagano…”</a:t>
+            </a:r>
+          </a:p>
+        </p:txBody>
+      </p:sp>
+      <p:sp>
+        <p:nvSpPr>
+          <p:cNvPr id="140" name="Play"/>
+          <p:cNvSpPr/>
+          <p:nvPr/>
+        </p:nvSpPr>
+        <p:spPr>
+          <a:xfrm>
+            <a:off x="5212080" y="4014216"/>
+            <a:ext cx="164592" cy="164592"/>
+          </a:xfrm>
+          <a:prstGeom prst="ellipse">
+            <a:avLst/>
           </a:prstGeom>
           <a:solidFill>
             <a:srgbClr val="D98F4E"/>
@@ -18487,1218 +20186,9 @@
           </a:p>
         </p:txBody>
       </p:sp>
-      <p:sp>
-        <p:nvSpPr>
-          <p:cNvPr id="110" name="Level 1"/>
-          <p:cNvSpPr/>
-          <p:nvPr/>
-        </p:nvSpPr>
-        <p:spPr>
-          <a:xfrm>
-            <a:off x="2052828" y="2807208"/>
-            <a:ext cx="64008" cy="201168"/>
-          </a:xfrm>
-          <a:prstGeom prst="roundRect">
-            <a:avLst>
-              <a:gd name="adj" fmla="val 50000"/>
-            </a:avLst>
-          </a:prstGeom>
-          <a:solidFill>
-            <a:srgbClr val="D98F4E"/>
-          </a:solidFill>
-          <a:ln>
-            <a:noFill/>
-          </a:ln>
-        </p:spPr>
-        <p:txBody>
-          <a:bodyPr rtlCol="0" anchor="ctr"/>
-          <a:lstStyle/>
-          <a:p>
-            <a:pPr algn="ctr"/>
-          </a:p>
-        </p:txBody>
-      </p:sp>
-      <p:sp>
-        <p:nvSpPr>
-          <p:cNvPr id="111" name="Level 2"/>
-          <p:cNvSpPr/>
-          <p:nvPr/>
-        </p:nvSpPr>
-        <p:spPr>
-          <a:xfrm>
-            <a:off x="2171700" y="2752344"/>
-            <a:ext cx="64008" cy="310896"/>
-          </a:xfrm>
-          <a:prstGeom prst="roundRect">
-            <a:avLst>
-              <a:gd name="adj" fmla="val 50000"/>
-            </a:avLst>
-          </a:prstGeom>
-          <a:solidFill>
-            <a:srgbClr val="D98F4E"/>
-          </a:solidFill>
-          <a:ln>
-            <a:noFill/>
-          </a:ln>
-        </p:spPr>
-        <p:txBody>
-          <a:bodyPr rtlCol="0" anchor="ctr"/>
-          <a:lstStyle/>
-          <a:p>
-            <a:pPr algn="ctr"/>
-          </a:p>
-        </p:txBody>
-      </p:sp>
-      <p:sp>
-        <p:nvSpPr>
-          <p:cNvPr id="112" name="Level 3"/>
-          <p:cNvSpPr/>
-          <p:nvPr/>
-        </p:nvSpPr>
-        <p:spPr>
-          <a:xfrm>
-            <a:off x="2290572" y="2816352"/>
-            <a:ext cx="64008" cy="182880"/>
-          </a:xfrm>
-          <a:prstGeom prst="roundRect">
-            <a:avLst>
-              <a:gd name="adj" fmla="val 50000"/>
-            </a:avLst>
-          </a:prstGeom>
-          <a:solidFill>
-            <a:srgbClr val="D98F4E"/>
-          </a:solidFill>
-          <a:ln>
-            <a:noFill/>
-          </a:ln>
-        </p:spPr>
-        <p:txBody>
-          <a:bodyPr rtlCol="0" anchor="ctr"/>
-          <a:lstStyle/>
-          <a:p>
-            <a:pPr algn="ctr"/>
-          </a:p>
-        </p:txBody>
-      </p:sp>
-      <p:sp>
-        <p:nvSpPr>
-          <p:cNvPr id="113" name="Level 4"/>
-          <p:cNvSpPr/>
-          <p:nvPr/>
-        </p:nvSpPr>
-        <p:spPr>
-          <a:xfrm>
-            <a:off x="2409444" y="2779776"/>
-            <a:ext cx="64008" cy="256032"/>
-          </a:xfrm>
-          <a:prstGeom prst="roundRect">
-            <a:avLst>
-              <a:gd name="adj" fmla="val 50000"/>
-            </a:avLst>
-          </a:prstGeom>
-          <a:solidFill>
-            <a:srgbClr val="D98F4E"/>
-          </a:solidFill>
-          <a:ln>
-            <a:noFill/>
-          </a:ln>
-        </p:spPr>
-        <p:txBody>
-          <a:bodyPr rtlCol="0" anchor="ctr"/>
-          <a:lstStyle/>
-          <a:p>
-            <a:pPr algn="ctr"/>
-          </a:p>
-        </p:txBody>
-      </p:sp>
-      <p:sp>
-        <p:nvSpPr>
-          <p:cNvPr id="114" name="Level 5"/>
-          <p:cNvSpPr/>
-          <p:nvPr/>
-        </p:nvSpPr>
-        <p:spPr>
-          <a:xfrm>
-            <a:off x="2528316" y="2843784"/>
-            <a:ext cx="64008" cy="128016"/>
-          </a:xfrm>
-          <a:prstGeom prst="roundRect">
-            <a:avLst>
-              <a:gd name="adj" fmla="val 50000"/>
-            </a:avLst>
-          </a:prstGeom>
-          <a:solidFill>
-            <a:srgbClr val="D98F4E"/>
-          </a:solidFill>
-          <a:ln>
-            <a:noFill/>
-          </a:ln>
-        </p:spPr>
-        <p:txBody>
-          <a:bodyPr rtlCol="0" anchor="ctr"/>
-          <a:lstStyle/>
-          <a:p>
-            <a:pPr algn="ctr"/>
-          </a:p>
-        </p:txBody>
-      </p:sp>
-      <p:sp>
-        <p:nvSpPr>
-          <p:cNvPr id="115" name="Level 6"/>
-          <p:cNvSpPr/>
-          <p:nvPr/>
-        </p:nvSpPr>
-        <p:spPr>
-          <a:xfrm>
-            <a:off x="2647188" y="2871216"/>
-            <a:ext cx="64008" cy="73152"/>
-          </a:xfrm>
-          <a:prstGeom prst="roundRect">
-            <a:avLst>
-              <a:gd name="adj" fmla="val 50000"/>
-            </a:avLst>
-          </a:prstGeom>
-          <a:solidFill>
-            <a:srgbClr val="D98F4E"/>
-          </a:solidFill>
-          <a:ln>
-            <a:noFill/>
-          </a:ln>
-        </p:spPr>
-        <p:txBody>
-          <a:bodyPr rtlCol="0" anchor="ctr"/>
-          <a:lstStyle/>
-          <a:p>
-            <a:pPr algn="ctr"/>
-          </a:p>
-        </p:txBody>
-      </p:sp>
-      <p:sp>
-        <p:nvSpPr>
-          <p:cNvPr id="116" name="Stop button"/>
-          <p:cNvSpPr/>
-          <p:nvPr/>
-        </p:nvSpPr>
-        <p:spPr>
-          <a:xfrm>
-            <a:off x="1636776" y="3191256"/>
-            <a:ext cx="1371600" cy="347472"/>
-          </a:xfrm>
-          <a:prstGeom prst="roundRect">
-            <a:avLst>
-              <a:gd name="adj" fmla="val 50000"/>
-            </a:avLst>
-          </a:prstGeom>
-          <a:solidFill>
-            <a:srgbClr val="A8503F"/>
-          </a:solidFill>
-          <a:ln>
-            <a:noFill/>
-          </a:ln>
-        </p:spPr>
-        <p:txBody>
-          <a:bodyPr rtlCol="0" anchor="ctr" wrap="square" lIns="36576" tIns="36576" rIns="36576" bIns="36576">
-            <a:noAutofit/>
-          </a:bodyPr>
-          <a:lstStyle/>
-          <a:p>
-            <a:pPr algn="ctr" marL="0" indent="0">
-              <a:spcBef>
-                <a:spcPts val="0"/>
-              </a:spcBef>
-              <a:spcAft>
-                <a:spcPts val="0"/>
-              </a:spcAft>
-              <a:buNone/>
-            </a:pPr>
-            <a:r>
-              <a:rPr lang="en-GB" sz="1300" dirty="0">
-                <a:solidFill>
-                  <a:srgbClr val="FFFFFF"/>
-                </a:solidFill>
-                <a:latin typeface="Google Sans Flex SemiBold"/>
-                <a:ea typeface="Hiragino Sans"/>
-                <a:cs typeface="Google Sans Flex SemiBold"/>
-                <a:sym typeface="Google Sans Flex SemiBold"/>
-              </a:rPr>
-              <a:t>おわる</a:t>
-            </a:r>
-          </a:p>
-        </p:txBody>
-      </p:sp>
-      <p:sp>
-        <p:nvSpPr>
-          <p:cNvPr id="117" name="Oval 116"/>
-          <p:cNvSpPr/>
-          <p:nvPr/>
-        </p:nvSpPr>
-        <p:spPr>
-          <a:xfrm>
-            <a:off x="4206240" y="1901952"/>
-            <a:ext cx="219456" cy="219456"/>
-          </a:xfrm>
-          <a:prstGeom prst="ellipse">
-            <a:avLst/>
-          </a:prstGeom>
-          <a:solidFill>
-            <a:srgbClr val="D98F4E"/>
-          </a:solidFill>
-          <a:ln>
-            <a:noFill/>
-          </a:ln>
-        </p:spPr>
-        <p:txBody>
-          <a:bodyPr rtlCol="0" anchor="ctr" wrap="square" lIns="0" tIns="0" rIns="0" bIns="0">
-            <a:noAutofit/>
-          </a:bodyPr>
-          <a:lstStyle/>
-          <a:p>
-            <a:pPr algn="ctr" marL="0" indent="0">
-              <a:spcBef>
-                <a:spcPts val="0"/>
-              </a:spcBef>
-              <a:spcAft>
-                <a:spcPts val="0"/>
-              </a:spcAft>
-              <a:buNone/>
-            </a:pPr>
-            <a:r>
-              <a:rPr lang="en-GB" sz="1000" dirty="0">
-                <a:solidFill>
-                  <a:srgbClr val="1F1F1F"/>
-                </a:solidFill>
-                <a:latin typeface="Google Sans Flex SemiBold"/>
-                <a:ea typeface="Hiragino Sans"/>
-                <a:cs typeface="Google Sans Flex SemiBold"/>
-                <a:sym typeface="Google Sans Flex SemiBold"/>
-              </a:rPr>
-              <a:t>1</a:t>
-            </a:r>
-          </a:p>
-        </p:txBody>
-      </p:sp>
-      <p:sp>
-        <p:nvSpPr>
-          <p:cNvPr id="118" name="Oval 117"/>
-          <p:cNvSpPr/>
-          <p:nvPr/>
-        </p:nvSpPr>
-        <p:spPr>
-          <a:xfrm>
-            <a:off x="4206240" y="2377440"/>
-            <a:ext cx="219456" cy="219456"/>
-          </a:xfrm>
-          <a:prstGeom prst="ellipse">
-            <a:avLst/>
-          </a:prstGeom>
-          <a:solidFill>
-            <a:srgbClr val="D98F4E"/>
-          </a:solidFill>
-          <a:ln>
-            <a:noFill/>
-          </a:ln>
-        </p:spPr>
-        <p:txBody>
-          <a:bodyPr rtlCol="0" anchor="ctr" wrap="square" lIns="0" tIns="0" rIns="0" bIns="0">
-            <a:noAutofit/>
-          </a:bodyPr>
-          <a:lstStyle/>
-          <a:p>
-            <a:pPr algn="ctr" marL="0" indent="0">
-              <a:spcBef>
-                <a:spcPts val="0"/>
-              </a:spcBef>
-              <a:spcAft>
-                <a:spcPts val="0"/>
-              </a:spcAft>
-              <a:buNone/>
-            </a:pPr>
-            <a:r>
-              <a:rPr lang="en-GB" sz="1000" dirty="0">
-                <a:solidFill>
-                  <a:srgbClr val="1F1F1F"/>
-                </a:solidFill>
-                <a:latin typeface="Google Sans Flex SemiBold"/>
-                <a:ea typeface="Hiragino Sans"/>
-                <a:cs typeface="Google Sans Flex SemiBold"/>
-                <a:sym typeface="Google Sans Flex SemiBold"/>
-              </a:rPr>
-              <a:t>2</a:t>
-            </a:r>
-          </a:p>
-        </p:txBody>
-      </p:sp>
-      <p:sp>
-        <p:nvSpPr>
-          <p:cNvPr id="119" name="Oval 118"/>
-          <p:cNvSpPr/>
-          <p:nvPr/>
-        </p:nvSpPr>
-        <p:spPr>
-          <a:xfrm>
-            <a:off x="4206240" y="2798064"/>
-            <a:ext cx="219456" cy="219456"/>
-          </a:xfrm>
-          <a:prstGeom prst="ellipse">
-            <a:avLst/>
-          </a:prstGeom>
-          <a:solidFill>
-            <a:srgbClr val="D98F4E"/>
-          </a:solidFill>
-          <a:ln>
-            <a:noFill/>
-          </a:ln>
-        </p:spPr>
-        <p:txBody>
-          <a:bodyPr rtlCol="0" anchor="ctr" wrap="square" lIns="0" tIns="0" rIns="0" bIns="0">
-            <a:noAutofit/>
-          </a:bodyPr>
-          <a:lstStyle/>
-          <a:p>
-            <a:pPr algn="ctr" marL="0" indent="0">
-              <a:spcBef>
-                <a:spcPts val="0"/>
-              </a:spcBef>
-              <a:spcAft>
-                <a:spcPts val="0"/>
-              </a:spcAft>
-              <a:buNone/>
-            </a:pPr>
-            <a:r>
-              <a:rPr lang="en-GB" sz="1000" dirty="0">
-                <a:solidFill>
-                  <a:srgbClr val="1F1F1F"/>
-                </a:solidFill>
-                <a:latin typeface="Google Sans Flex SemiBold"/>
-                <a:ea typeface="Hiragino Sans"/>
-                <a:cs typeface="Google Sans Flex SemiBold"/>
-                <a:sym typeface="Google Sans Flex SemiBold"/>
-              </a:rPr>
-              <a:t>3</a:t>
-            </a:r>
-          </a:p>
-        </p:txBody>
-      </p:sp>
-      <p:sp>
-        <p:nvSpPr>
-          <p:cNvPr id="120" name="Oval 119"/>
-          <p:cNvSpPr/>
-          <p:nvPr/>
-        </p:nvSpPr>
-        <p:spPr>
-          <a:xfrm>
-            <a:off x="4206240" y="3255264"/>
-            <a:ext cx="219456" cy="219456"/>
-          </a:xfrm>
-          <a:prstGeom prst="ellipse">
-            <a:avLst/>
-          </a:prstGeom>
-          <a:solidFill>
-            <a:srgbClr val="D98F4E"/>
-          </a:solidFill>
-          <a:ln>
-            <a:noFill/>
-          </a:ln>
-        </p:spPr>
-        <p:txBody>
-          <a:bodyPr rtlCol="0" anchor="ctr" wrap="square" lIns="0" tIns="0" rIns="0" bIns="0">
-            <a:noAutofit/>
-          </a:bodyPr>
-          <a:lstStyle/>
-          <a:p>
-            <a:pPr algn="ctr" marL="0" indent="0">
-              <a:spcBef>
-                <a:spcPts val="0"/>
-              </a:spcBef>
-              <a:spcAft>
-                <a:spcPts val="0"/>
-              </a:spcAft>
-              <a:buNone/>
-            </a:pPr>
-            <a:r>
-              <a:rPr lang="en-GB" sz="1000" dirty="0">
-                <a:solidFill>
-                  <a:srgbClr val="1F1F1F"/>
-                </a:solidFill>
-                <a:latin typeface="Google Sans Flex SemiBold"/>
-                <a:ea typeface="Hiragino Sans"/>
-                <a:cs typeface="Google Sans Flex SemiBold"/>
-                <a:sym typeface="Google Sans Flex SemiBold"/>
-              </a:rPr>
-              <a:t>4</a:t>
-            </a:r>
-          </a:p>
-        </p:txBody>
-      </p:sp>
-      <p:sp>
-        <p:nvSpPr>
-          <p:cNvPr id="121" name="Tablet caption"/>
-          <p:cNvSpPr txBox="1"/>
-          <p:nvPr/>
-        </p:nvSpPr>
-        <p:spPr>
-          <a:xfrm>
-            <a:off x="356616" y="3950208"/>
-            <a:ext cx="4343400" cy="274320"/>
-          </a:xfrm>
-          <a:prstGeom prst="rect">
-            <a:avLst/>
-          </a:prstGeom>
-          <a:noFill/>
-        </p:spPr>
-        <p:txBody>
-          <a:bodyPr wrap="square" lIns="0" tIns="0" rIns="0" bIns="0" anchor="t">
-            <a:noAutofit/>
-          </a:bodyPr>
-          <a:lstStyle/>
-          <a:p>
-            <a:pPr algn="l" marL="0" indent="0">
-              <a:spcBef>
-                <a:spcPts val="0"/>
-              </a:spcBef>
-              <a:spcAft>
-                <a:spcPts val="0"/>
-              </a:spcAft>
-              <a:buNone/>
-            </a:pPr>
-            <a:r>
-              <a:rPr lang="en-GB" sz="1100" dirty="0">
-                <a:solidFill>
-                  <a:srgbClr val="202124"/>
-                </a:solidFill>
-                <a:latin typeface="Google Sans Flex SemiBold"/>
-                <a:ea typeface="Hiragino Sans"/>
-                <a:cs typeface="Google Sans Flex SemiBold"/>
-                <a:sym typeface="Google Sans Flex SemiBold"/>
-              </a:rPr>
-              <a:t>Senior's tablet: nothing to open, tap or type</a:t>
-            </a:r>
-          </a:p>
-        </p:txBody>
-      </p:sp>
-      <p:sp>
-        <p:nvSpPr>
-          <p:cNvPr id="122" name="Oval 121"/>
-          <p:cNvSpPr/>
-          <p:nvPr/>
-        </p:nvSpPr>
-        <p:spPr>
-          <a:xfrm>
-            <a:off x="356616" y="4315968"/>
-            <a:ext cx="201168" cy="201168"/>
-          </a:xfrm>
-          <a:prstGeom prst="ellipse">
-            <a:avLst/>
-          </a:prstGeom>
-          <a:solidFill>
-            <a:srgbClr val="D98F4E"/>
-          </a:solidFill>
-          <a:ln>
-            <a:noFill/>
-          </a:ln>
-        </p:spPr>
-        <p:txBody>
-          <a:bodyPr rtlCol="0" anchor="ctr" wrap="square" lIns="0" tIns="0" rIns="0" bIns="0">
-            <a:noAutofit/>
-          </a:bodyPr>
-          <a:lstStyle/>
-          <a:p>
-            <a:pPr algn="ctr" marL="0" indent="0">
-              <a:spcBef>
-                <a:spcPts val="0"/>
-              </a:spcBef>
-              <a:spcAft>
-                <a:spcPts val="0"/>
-              </a:spcAft>
-              <a:buNone/>
-            </a:pPr>
-            <a:r>
-              <a:rPr lang="en-GB" sz="1000" dirty="0">
-                <a:solidFill>
-                  <a:srgbClr val="1F1F1F"/>
-                </a:solidFill>
-                <a:latin typeface="Google Sans Flex SemiBold"/>
-                <a:ea typeface="Hiragino Sans"/>
-                <a:cs typeface="Google Sans Flex SemiBold"/>
-                <a:sym typeface="Google Sans Flex SemiBold"/>
-              </a:rPr>
-              <a:t>1</a:t>
-            </a:r>
-          </a:p>
-        </p:txBody>
-      </p:sp>
-      <p:sp>
-        <p:nvSpPr>
-          <p:cNvPr id="123" name="Tablet note 1"/>
-          <p:cNvSpPr txBox="1"/>
-          <p:nvPr/>
-        </p:nvSpPr>
-        <p:spPr>
-          <a:xfrm>
-            <a:off x="630936" y="4297680"/>
-            <a:ext cx="1874520" cy="256032"/>
-          </a:xfrm>
-          <a:prstGeom prst="rect">
-            <a:avLst/>
-          </a:prstGeom>
-          <a:noFill/>
-        </p:spPr>
-        <p:txBody>
-          <a:bodyPr wrap="square" lIns="0" tIns="0" rIns="0" bIns="0" anchor="t">
-            <a:noAutofit/>
-          </a:bodyPr>
-          <a:lstStyle/>
-          <a:p>
-            <a:pPr algn="l" marL="0" indent="0">
-              <a:spcBef>
-                <a:spcPts val="0"/>
-              </a:spcBef>
-              <a:spcAft>
-                <a:spcPts val="0"/>
-              </a:spcAft>
-              <a:buNone/>
-            </a:pPr>
-            <a:r>
-              <a:rPr lang="en-GB" sz="950" dirty="0">
-                <a:solidFill>
-                  <a:srgbClr val="5F6368"/>
-                </a:solidFill>
-                <a:latin typeface="Google Sans Flex"/>
-                <a:ea typeface="Hiragino Sans"/>
-                <a:cs typeface="Google Sans Flex"/>
-                <a:sym typeface="Google Sans Flex"/>
-              </a:rPr>
-              <a:t>Greets the senior by name</a:t>
-            </a:r>
-          </a:p>
-        </p:txBody>
-      </p:sp>
-      <p:sp>
-        <p:nvSpPr>
-          <p:cNvPr id="124" name="Oval 123"/>
-          <p:cNvSpPr/>
-          <p:nvPr/>
-        </p:nvSpPr>
-        <p:spPr>
-          <a:xfrm>
-            <a:off x="2551176" y="4315968"/>
-            <a:ext cx="201168" cy="201168"/>
-          </a:xfrm>
-          <a:prstGeom prst="ellipse">
-            <a:avLst/>
-          </a:prstGeom>
-          <a:solidFill>
-            <a:srgbClr val="D98F4E"/>
-          </a:solidFill>
-          <a:ln>
-            <a:noFill/>
-          </a:ln>
-        </p:spPr>
-        <p:txBody>
-          <a:bodyPr rtlCol="0" anchor="ctr" wrap="square" lIns="0" tIns="0" rIns="0" bIns="0">
-            <a:noAutofit/>
-          </a:bodyPr>
-          <a:lstStyle/>
-          <a:p>
-            <a:pPr algn="ctr" marL="0" indent="0">
-              <a:spcBef>
-                <a:spcPts val="0"/>
-              </a:spcBef>
-              <a:spcAft>
-                <a:spcPts val="0"/>
-              </a:spcAft>
-              <a:buNone/>
-            </a:pPr>
-            <a:r>
-              <a:rPr lang="en-GB" sz="1000" dirty="0">
-                <a:solidFill>
-                  <a:srgbClr val="1F1F1F"/>
-                </a:solidFill>
-                <a:latin typeface="Google Sans Flex SemiBold"/>
-                <a:ea typeface="Hiragino Sans"/>
-                <a:cs typeface="Google Sans Flex SemiBold"/>
-                <a:sym typeface="Google Sans Flex SemiBold"/>
-              </a:rPr>
-              <a:t>2</a:t>
-            </a:r>
-          </a:p>
-        </p:txBody>
-      </p:sp>
-      <p:sp>
-        <p:nvSpPr>
-          <p:cNvPr id="125" name="Tablet note 2"/>
-          <p:cNvSpPr txBox="1"/>
-          <p:nvPr/>
-        </p:nvSpPr>
-        <p:spPr>
-          <a:xfrm>
-            <a:off x="2825496" y="4297680"/>
-            <a:ext cx="1874520" cy="256032"/>
-          </a:xfrm>
-          <a:prstGeom prst="rect">
-            <a:avLst/>
-          </a:prstGeom>
-          <a:noFill/>
-        </p:spPr>
-        <p:txBody>
-          <a:bodyPr wrap="square" lIns="0" tIns="0" rIns="0" bIns="0" anchor="t">
-            <a:noAutofit/>
-          </a:bodyPr>
-          <a:lstStyle/>
-          <a:p>
-            <a:pPr algn="l" marL="0" indent="0">
-              <a:spcBef>
-                <a:spcPts val="0"/>
-              </a:spcBef>
-              <a:spcAft>
-                <a:spcPts val="0"/>
-              </a:spcAft>
-              <a:buNone/>
-            </a:pPr>
-            <a:r>
-              <a:rPr lang="en-GB" sz="950" dirty="0">
-                <a:solidFill>
-                  <a:srgbClr val="5F6368"/>
-                </a:solidFill>
-                <a:latin typeface="Google Sans Flex"/>
-                <a:ea typeface="Hiragino Sans"/>
-                <a:cs typeface="Google Sans Flex"/>
-                <a:sym typeface="Google Sans Flex"/>
-              </a:rPr>
-              <a:t>One topic, from last time</a:t>
-            </a:r>
-          </a:p>
-        </p:txBody>
-      </p:sp>
-      <p:sp>
-        <p:nvSpPr>
-          <p:cNvPr id="126" name="Oval 125"/>
-          <p:cNvSpPr/>
-          <p:nvPr/>
-        </p:nvSpPr>
-        <p:spPr>
-          <a:xfrm>
-            <a:off x="356616" y="4608576"/>
-            <a:ext cx="201168" cy="201168"/>
-          </a:xfrm>
-          <a:prstGeom prst="ellipse">
-            <a:avLst/>
-          </a:prstGeom>
-          <a:solidFill>
-            <a:srgbClr val="D98F4E"/>
-          </a:solidFill>
-          <a:ln>
-            <a:noFill/>
-          </a:ln>
-        </p:spPr>
-        <p:txBody>
-          <a:bodyPr rtlCol="0" anchor="ctr" wrap="square" lIns="0" tIns="0" rIns="0" bIns="0">
-            <a:noAutofit/>
-          </a:bodyPr>
-          <a:lstStyle/>
-          <a:p>
-            <a:pPr algn="ctr" marL="0" indent="0">
-              <a:spcBef>
-                <a:spcPts val="0"/>
-              </a:spcBef>
-              <a:spcAft>
-                <a:spcPts val="0"/>
-              </a:spcAft>
-              <a:buNone/>
-            </a:pPr>
-            <a:r>
-              <a:rPr lang="en-GB" sz="1000" dirty="0">
-                <a:solidFill>
-                  <a:srgbClr val="1F1F1F"/>
-                </a:solidFill>
-                <a:latin typeface="Google Sans Flex SemiBold"/>
-                <a:ea typeface="Hiragino Sans"/>
-                <a:cs typeface="Google Sans Flex SemiBold"/>
-                <a:sym typeface="Google Sans Flex SemiBold"/>
-              </a:rPr>
-              <a:t>3</a:t>
-            </a:r>
-          </a:p>
-        </p:txBody>
-      </p:sp>
-      <p:sp>
-        <p:nvSpPr>
-          <p:cNvPr id="127" name="Tablet note 3"/>
-          <p:cNvSpPr txBox="1"/>
-          <p:nvPr/>
-        </p:nvSpPr>
-        <p:spPr>
-          <a:xfrm>
-            <a:off x="630936" y="4590288"/>
-            <a:ext cx="1874520" cy="256032"/>
-          </a:xfrm>
-          <a:prstGeom prst="rect">
-            <a:avLst/>
-          </a:prstGeom>
-          <a:noFill/>
-        </p:spPr>
-        <p:txBody>
-          <a:bodyPr wrap="square" lIns="0" tIns="0" rIns="0" bIns="0" anchor="t">
-            <a:noAutofit/>
-          </a:bodyPr>
-          <a:lstStyle/>
-          <a:p>
-            <a:pPr algn="l" marL="0" indent="0">
-              <a:spcBef>
-                <a:spcPts val="0"/>
-              </a:spcBef>
-              <a:spcAft>
-                <a:spcPts val="0"/>
-              </a:spcAft>
-              <a:buNone/>
-            </a:pPr>
-            <a:r>
-              <a:rPr lang="en-GB" sz="950" dirty="0">
-                <a:solidFill>
-                  <a:srgbClr val="5F6368"/>
-                </a:solidFill>
-                <a:latin typeface="Google Sans Flex"/>
-                <a:ea typeface="Hiragino Sans"/>
-                <a:cs typeface="Google Sans Flex"/>
-                <a:sym typeface="Google Sans Flex"/>
-              </a:rPr>
-              <a:t>Listens, and waits</a:t>
-            </a:r>
-          </a:p>
-        </p:txBody>
-      </p:sp>
-      <p:sp>
-        <p:nvSpPr>
-          <p:cNvPr id="128" name="Oval 127"/>
-          <p:cNvSpPr/>
-          <p:nvPr/>
-        </p:nvSpPr>
-        <p:spPr>
-          <a:xfrm>
-            <a:off x="2551176" y="4608576"/>
-            <a:ext cx="201168" cy="201168"/>
-          </a:xfrm>
-          <a:prstGeom prst="ellipse">
-            <a:avLst/>
-          </a:prstGeom>
-          <a:solidFill>
-            <a:srgbClr val="D98F4E"/>
-          </a:solidFill>
-          <a:ln>
-            <a:noFill/>
-          </a:ln>
-        </p:spPr>
-        <p:txBody>
-          <a:bodyPr rtlCol="0" anchor="ctr" wrap="square" lIns="0" tIns="0" rIns="0" bIns="0">
-            <a:noAutofit/>
-          </a:bodyPr>
-          <a:lstStyle/>
-          <a:p>
-            <a:pPr algn="ctr" marL="0" indent="0">
-              <a:spcBef>
-                <a:spcPts val="0"/>
-              </a:spcBef>
-              <a:spcAft>
-                <a:spcPts val="0"/>
-              </a:spcAft>
-              <a:buNone/>
-            </a:pPr>
-            <a:r>
-              <a:rPr lang="en-GB" sz="1000" dirty="0">
-                <a:solidFill>
-                  <a:srgbClr val="1F1F1F"/>
-                </a:solidFill>
-                <a:latin typeface="Google Sans Flex SemiBold"/>
-                <a:ea typeface="Hiragino Sans"/>
-                <a:cs typeface="Google Sans Flex SemiBold"/>
-                <a:sym typeface="Google Sans Flex SemiBold"/>
-              </a:rPr>
-              <a:t>4</a:t>
-            </a:r>
-          </a:p>
-        </p:txBody>
-      </p:sp>
-      <p:sp>
-        <p:nvSpPr>
-          <p:cNvPr id="129" name="Tablet note 4"/>
-          <p:cNvSpPr txBox="1"/>
-          <p:nvPr/>
-        </p:nvSpPr>
-        <p:spPr>
-          <a:xfrm>
-            <a:off x="2825496" y="4590288"/>
-            <a:ext cx="1874520" cy="256032"/>
-          </a:xfrm>
-          <a:prstGeom prst="rect">
-            <a:avLst/>
-          </a:prstGeom>
-          <a:noFill/>
-        </p:spPr>
-        <p:txBody>
-          <a:bodyPr wrap="square" lIns="0" tIns="0" rIns="0" bIns="0" anchor="t">
-            <a:noAutofit/>
-          </a:bodyPr>
-          <a:lstStyle/>
-          <a:p>
-            <a:pPr algn="l" marL="0" indent="0">
-              <a:spcBef>
-                <a:spcPts val="0"/>
-              </a:spcBef>
-              <a:spcAft>
-                <a:spcPts val="0"/>
-              </a:spcAft>
-              <a:buNone/>
-            </a:pPr>
-            <a:r>
-              <a:rPr lang="en-GB" sz="950" dirty="0">
-                <a:solidFill>
-                  <a:srgbClr val="5F6368"/>
-                </a:solidFill>
-                <a:latin typeface="Google Sans Flex"/>
-                <a:ea typeface="Hiragino Sans"/>
-                <a:cs typeface="Google Sans Flex"/>
-                <a:sym typeface="Google Sans Flex"/>
-              </a:rPr>
-              <a:t>One big button to stop</a:t>
-            </a:r>
-          </a:p>
-        </p:txBody>
-      </p:sp>
-      <p:sp>
-        <p:nvSpPr>
-          <p:cNvPr id="130" name="Phone frame"/>
-          <p:cNvSpPr/>
-          <p:nvPr/>
-        </p:nvSpPr>
-        <p:spPr>
-          <a:xfrm>
-            <a:off x="4937760" y="1325880"/>
-            <a:ext cx="1600200" cy="3291840"/>
-          </a:xfrm>
-          <a:prstGeom prst="roundRect">
-            <a:avLst>
-              <a:gd name="adj" fmla="val 12571"/>
-            </a:avLst>
-          </a:prstGeom>
-          <a:solidFill>
-            <a:srgbClr val="1F1F1F"/>
-          </a:solidFill>
-          <a:ln>
-            <a:noFill/>
-          </a:ln>
-        </p:spPr>
-        <p:txBody>
-          <a:bodyPr rtlCol="0" anchor="ctr"/>
-          <a:lstStyle/>
-          <a:p>
-            <a:pPr algn="ctr"/>
-          </a:p>
-        </p:txBody>
-      </p:sp>
-      <p:sp>
-        <p:nvSpPr>
-          <p:cNvPr id="131" name="Phone screen"/>
-          <p:cNvSpPr/>
-          <p:nvPr/>
-        </p:nvSpPr>
-        <p:spPr>
-          <a:xfrm>
-            <a:off x="5029200" y="1490472"/>
-            <a:ext cx="1417320" cy="2962656"/>
-          </a:xfrm>
-          <a:prstGeom prst="roundRect">
-            <a:avLst>
-              <a:gd name="adj" fmla="val 5161"/>
-            </a:avLst>
-          </a:prstGeom>
-          <a:solidFill>
-            <a:srgbClr val="12100E"/>
-          </a:solidFill>
-          <a:ln>
-            <a:noFill/>
-          </a:ln>
-        </p:spPr>
-        <p:txBody>
-          <a:bodyPr rtlCol="0" anchor="ctr"/>
-          <a:lstStyle/>
-          <a:p>
-            <a:pPr algn="ctr"/>
-          </a:p>
-        </p:txBody>
-      </p:sp>
-      <p:sp>
-        <p:nvSpPr>
-          <p:cNvPr id="132" name="TextBox 131"/>
-          <p:cNvSpPr txBox="1"/>
-          <p:nvPr/>
-        </p:nvSpPr>
-        <p:spPr>
-          <a:xfrm>
-            <a:off x="5138928" y="1600200"/>
-            <a:ext cx="1234440" cy="502920"/>
-          </a:xfrm>
-          <a:prstGeom prst="rect">
-            <a:avLst/>
-          </a:prstGeom>
-          <a:noFill/>
-        </p:spPr>
-        <p:txBody>
-          <a:bodyPr wrap="square" lIns="0" tIns="0" rIns="0" bIns="0" anchor="t">
-            <a:noAutofit/>
-          </a:bodyPr>
-          <a:lstStyle/>
-          <a:p>
-            <a:pPr algn="l" marL="0" indent="0">
-              <a:spcBef>
-                <a:spcPts val="0"/>
-              </a:spcBef>
-              <a:spcAft>
-                <a:spcPts val="0"/>
-              </a:spcAft>
-              <a:buNone/>
-            </a:pPr>
-            <a:r>
-              <a:rPr lang="en-GB" sz="1200" dirty="0">
-                <a:solidFill>
-                  <a:srgbClr val="F0EBE5"/>
-                </a:solidFill>
-                <a:latin typeface="Google Sans Flex SemiBold"/>
-                <a:ea typeface="Hiragino Sans"/>
-                <a:cs typeface="Google Sans Flex SemiBold"/>
-                <a:sym typeface="Google Sans Flex SemiBold"/>
-              </a:rPr>
-              <a:t>田中ハル</a:t>
-            </a:r>
-          </a:p>
-          <a:p>
-            <a:pPr algn="l" marL="0" indent="0">
-              <a:spcBef>
-                <a:spcPts val="0"/>
-              </a:spcBef>
-              <a:spcAft>
-                <a:spcPts val="0"/>
-              </a:spcAft>
-              <a:buNone/>
-            </a:pPr>
-            <a:r>
-              <a:rPr lang="en-GB" sz="650" dirty="0">
-                <a:solidFill>
-                  <a:srgbClr val="B5ABA1"/>
-                </a:solidFill>
-                <a:latin typeface="Google Sans Flex"/>
-                <a:ea typeface="Hiragino Sans"/>
-                <a:cs typeface="Google Sans Flex"/>
-                <a:sym typeface="Google Sans Flex"/>
-              </a:rPr>
-              <a:t>Born in 1947 · 長野</a:t>
-            </a:r>
-          </a:p>
-        </p:txBody>
-      </p:sp>
-      <p:sp>
-        <p:nvSpPr>
-          <p:cNvPr id="133" name="TextBox 132"/>
-          <p:cNvSpPr txBox="1"/>
-          <p:nvPr/>
-        </p:nvSpPr>
-        <p:spPr>
-          <a:xfrm>
-            <a:off x="5138928" y="2148840"/>
-            <a:ext cx="1234440" cy="182880"/>
-          </a:xfrm>
-          <a:prstGeom prst="rect">
-            <a:avLst/>
-          </a:prstGeom>
-          <a:noFill/>
-        </p:spPr>
-        <p:txBody>
-          <a:bodyPr wrap="square" lIns="0" tIns="0" rIns="0" bIns="0" anchor="t">
-            <a:noAutofit/>
-          </a:bodyPr>
-          <a:lstStyle/>
-          <a:p>
-            <a:pPr algn="l" marL="0" indent="0">
-              <a:spcBef>
-                <a:spcPts val="0"/>
-              </a:spcBef>
-              <a:spcAft>
-                <a:spcPts val="0"/>
-              </a:spcAft>
-              <a:buNone/>
-            </a:pPr>
-            <a:r>
-              <a:rPr lang="en-GB" sz="650" dirty="0">
-                <a:solidFill>
-                  <a:srgbClr val="D98F4E"/>
-                </a:solidFill>
-                <a:latin typeface="Google Sans Flex Medium"/>
-                <a:ea typeface="Hiragino Sans"/>
-                <a:cs typeface="Google Sans Flex Medium"/>
-                <a:sym typeface="Google Sans Flex Medium"/>
-              </a:rPr>
-              <a:t>Childhood</a:t>
-            </a:r>
-          </a:p>
-        </p:txBody>
-      </p:sp>
-      <p:sp>
-        <p:nvSpPr>
-          <p:cNvPr id="134" name="TextBox 133"/>
-          <p:cNvSpPr txBox="1"/>
-          <p:nvPr/>
-        </p:nvSpPr>
-        <p:spPr>
-          <a:xfrm>
-            <a:off x="5138928" y="2313432"/>
-            <a:ext cx="1234440" cy="228600"/>
-          </a:xfrm>
-          <a:prstGeom prst="rect">
-            <a:avLst/>
-          </a:prstGeom>
-          <a:noFill/>
-        </p:spPr>
-        <p:txBody>
-          <a:bodyPr wrap="square" lIns="0" tIns="0" rIns="0" bIns="0" anchor="t">
-            <a:noAutofit/>
-          </a:bodyPr>
-          <a:lstStyle/>
-          <a:p>
-            <a:pPr algn="l" marL="0" indent="0">
-              <a:spcBef>
-                <a:spcPts val="0"/>
-              </a:spcBef>
-              <a:spcAft>
-                <a:spcPts val="0"/>
-              </a:spcAft>
-              <a:buNone/>
-            </a:pPr>
-            <a:r>
-              <a:rPr lang="en-GB" sz="900" dirty="0">
-                <a:solidFill>
-                  <a:srgbClr val="F0EBE5"/>
-                </a:solidFill>
-                <a:latin typeface="Google Sans Flex SemiBold"/>
-                <a:ea typeface="Hiragino Sans"/>
-                <a:cs typeface="Google Sans Flex SemiBold"/>
-                <a:sym typeface="Google Sans Flex SemiBold"/>
-              </a:rPr>
-              <a:t>織物工場のこと</a:t>
-            </a:r>
-          </a:p>
-        </p:txBody>
-      </p:sp>
-      <p:sp>
-        <p:nvSpPr>
-          <p:cNvPr id="135" name="Quote"/>
-          <p:cNvSpPr/>
-          <p:nvPr/>
-        </p:nvSpPr>
-        <p:spPr>
-          <a:xfrm>
-            <a:off x="5138928" y="2587752"/>
-            <a:ext cx="1197864" cy="457200"/>
-          </a:xfrm>
-          <a:prstGeom prst="roundRect">
-            <a:avLst>
-              <a:gd name="adj" fmla="val 10000"/>
-            </a:avLst>
-          </a:prstGeom>
-          <a:solidFill>
-            <a:srgbClr val="26211D"/>
-          </a:solidFill>
-          <a:ln>
-            <a:noFill/>
-          </a:ln>
-        </p:spPr>
-        <p:txBody>
-          <a:bodyPr rtlCol="0" anchor="ctr"/>
-          <a:lstStyle/>
-          <a:p>
-            <a:pPr algn="ctr"/>
-          </a:p>
-        </p:txBody>
-      </p:sp>
-      <p:sp>
-        <p:nvSpPr>
-          <p:cNvPr id="136" name="TextBox 135"/>
-          <p:cNvSpPr txBox="1"/>
-          <p:nvPr/>
-        </p:nvSpPr>
-        <p:spPr>
-          <a:xfrm>
-            <a:off x="5212080" y="2642616"/>
-            <a:ext cx="822960" cy="384048"/>
-          </a:xfrm>
-          <a:prstGeom prst="rect">
-            <a:avLst/>
-          </a:prstGeom>
-          <a:noFill/>
-        </p:spPr>
-        <p:txBody>
-          <a:bodyPr wrap="square" lIns="0" tIns="0" rIns="0" bIns="0" anchor="t">
-            <a:noAutofit/>
-          </a:bodyPr>
-          <a:lstStyle/>
-          <a:p>
-            <a:pPr algn="l" marL="0" indent="0">
-              <a:lnSpc>
-                <a:spcPct val="100000"/>
-              </a:lnSpc>
-              <a:spcBef>
-                <a:spcPts val="0"/>
-              </a:spcBef>
-              <a:spcAft>
-                <a:spcPts val="0"/>
-              </a:spcAft>
-              <a:buNone/>
-            </a:pPr>
-            <a:r>
-              <a:rPr lang="en-GB" sz="650" dirty="0">
-                <a:solidFill>
-                  <a:srgbClr val="F0EBE5"/>
-                </a:solidFill>
-                <a:latin typeface="Google Sans Flex"/>
-                <a:ea typeface="Hiragino Sans"/>
-                <a:cs typeface="Google Sans Flex"/>
-                <a:sym typeface="Google Sans Flex"/>
-              </a:rPr>
-              <a:t>「父は村で小さな織物の工場をやっておりました。」</a:t>
-            </a:r>
-          </a:p>
-        </p:txBody>
-      </p:sp>
-      <p:sp>
-        <p:nvSpPr>
-          <p:cNvPr id="137" name="Play"/>
-          <p:cNvSpPr/>
-          <p:nvPr/>
-        </p:nvSpPr>
-        <p:spPr>
-          <a:xfrm>
-            <a:off x="6080760" y="2706624"/>
-            <a:ext cx="219456" cy="219456"/>
-          </a:xfrm>
-          <a:prstGeom prst="ellipse">
-            <a:avLst/>
-          </a:prstGeom>
-          <a:solidFill>
-            <a:srgbClr val="D98F4E"/>
-          </a:solidFill>
-          <a:ln>
-            <a:noFill/>
-          </a:ln>
-        </p:spPr>
-        <p:txBody>
-          <a:bodyPr rtlCol="0" anchor="ctr"/>
-          <a:lstStyle/>
-          <a:p>
-            <a:pPr algn="ctr"/>
-          </a:p>
-        </p:txBody>
-      </p:sp>
       <p:pic>
         <p:nvPicPr>
-          <p:cNvPr id="138" name="Picture 137" descr="MdPlayArrow-FFFFFF.png"/>
+          <p:cNvPr id="141" name="Picture 140" descr="MdPlayArrow-FFFFFF.png"/>
           <p:cNvPicPr>
             <a:picLocks noChangeAspect="1"/>
           </p:cNvPicPr>
@@ -19712,8 +20202,8 @@
         </p:blipFill>
         <p:spPr>
           <a:xfrm>
-            <a:off x="6108192" y="2734056"/>
-            <a:ext cx="164592" cy="164592"/>
+            <a:off x="5232197" y="4034333"/>
+            <a:ext cx="123444" cy="123444"/>
           </a:xfrm>
           <a:prstGeom prst="rect">
             <a:avLst/>
@@ -19722,73 +20212,25 @@
       </p:pic>
       <p:sp>
         <p:nvSpPr>
-          <p:cNvPr id="139" name="TextBox 138"/>
-          <p:cNvSpPr txBox="1"/>
-          <p:nvPr/>
-        </p:nvSpPr>
-        <p:spPr>
-          <a:xfrm>
-            <a:off x="5138928" y="3209544"/>
-            <a:ext cx="1234440" cy="201168"/>
-          </a:xfrm>
-          <a:prstGeom prst="rect">
-            <a:avLst/>
-          </a:prstGeom>
-          <a:noFill/>
-        </p:spPr>
-        <p:txBody>
-          <a:bodyPr wrap="square" lIns="0" tIns="0" rIns="0" bIns="0" anchor="t">
-            <a:noAutofit/>
-          </a:bodyPr>
-          <a:lstStyle/>
-          <a:p>
-            <a:pPr algn="l" marL="0" indent="0">
-              <a:spcBef>
-                <a:spcPts val="0"/>
-              </a:spcBef>
-              <a:spcAft>
-                <a:spcPts val="0"/>
-              </a:spcAft>
-              <a:buNone/>
-            </a:pPr>
-            <a:r>
-              <a:rPr lang="en-GB" sz="750" dirty="0">
-                <a:solidFill>
-                  <a:srgbClr val="F0EBE5"/>
-                </a:solidFill>
-                <a:latin typeface="Google Sans Flex SemiBold"/>
-                <a:ea typeface="Hiragino Sans"/>
-                <a:cs typeface="Google Sans Flex SemiBold"/>
-                <a:sym typeface="Google Sans Flex SemiBold"/>
-              </a:rPr>
-              <a:t>Ask 田中ハル something</a:t>
-            </a:r>
-          </a:p>
-        </p:txBody>
-      </p:sp>
-      <p:sp>
-        <p:nvSpPr>
-          <p:cNvPr id="140" name="Field 1"/>
+          <p:cNvPr id="142" name="Progress"/>
           <p:cNvSpPr/>
           <p:nvPr/>
         </p:nvSpPr>
         <p:spPr>
           <a:xfrm>
-            <a:off x="5138928" y="3429000"/>
-            <a:ext cx="1197864" cy="237744"/>
+            <a:off x="5431536" y="4091940"/>
+            <a:ext cx="832104" cy="13716"/>
           </a:xfrm>
           <a:prstGeom prst="roundRect">
             <a:avLst>
-              <a:gd name="adj" fmla="val 15384"/>
+              <a:gd name="adj" fmla="val 0"/>
             </a:avLst>
           </a:prstGeom>
           <a:solidFill>
-            <a:srgbClr val="12100E"/>
+            <a:srgbClr val="5A4A3C"/>
           </a:solidFill>
-          <a:ln w="9525">
-            <a:solidFill>
-              <a:srgbClr val="3A332E"/>
-            </a:solidFill>
+          <a:ln>
+            <a:noFill/>
           </a:ln>
         </p:spPr>
         <p:txBody>
@@ -19801,52 +20243,17 @@
       </p:sp>
       <p:sp>
         <p:nvSpPr>
-          <p:cNvPr id="141" name="Field 2"/>
+          <p:cNvPr id="143" name="Oval 142"/>
           <p:cNvSpPr/>
           <p:nvPr/>
         </p:nvSpPr>
         <p:spPr>
           <a:xfrm>
-            <a:off x="5138928" y="3721608"/>
-            <a:ext cx="1197864" cy="365760"/>
-          </a:xfrm>
-          <a:prstGeom prst="roundRect">
-            <a:avLst>
-              <a:gd name="adj" fmla="val 10000"/>
-            </a:avLst>
-          </a:prstGeom>
-          <a:solidFill>
-            <a:srgbClr val="12100E"/>
-          </a:solidFill>
-          <a:ln w="9525">
-            <a:solidFill>
-              <a:srgbClr val="3A332E"/>
-            </a:solidFill>
-          </a:ln>
-        </p:spPr>
-        <p:txBody>
-          <a:bodyPr rtlCol="0" anchor="ctr"/>
-          <a:lstStyle/>
-          <a:p>
-            <a:pPr algn="ctr"/>
-          </a:p>
-        </p:txBody>
-      </p:sp>
-      <p:sp>
-        <p:nvSpPr>
-          <p:cNvPr id="142" name="Send"/>
-          <p:cNvSpPr/>
-          <p:nvPr/>
-        </p:nvSpPr>
-        <p:spPr>
-          <a:xfrm>
-            <a:off x="5138928" y="4160520"/>
-            <a:ext cx="777240" cy="201168"/>
-          </a:xfrm>
-          <a:prstGeom prst="roundRect">
-            <a:avLst>
-              <a:gd name="adj" fmla="val 27272"/>
-            </a:avLst>
+            <a:off x="6592824" y="1728216"/>
+            <a:ext cx="219456" cy="219456"/>
+          </a:xfrm>
+          <a:prstGeom prst="ellipse">
+            <a:avLst/>
           </a:prstGeom>
           <a:solidFill>
             <a:srgbClr val="D98F4E"/>
@@ -19856,7 +20263,7 @@
           </a:ln>
         </p:spPr>
         <p:txBody>
-          <a:bodyPr rtlCol="0" anchor="ctr" wrap="square" lIns="9144" tIns="9144" rIns="9144" bIns="9144">
+          <a:bodyPr rtlCol="0" anchor="ctr" wrap="square" lIns="0" tIns="0" rIns="0" bIns="0">
             <a:noAutofit/>
           </a:bodyPr>
           <a:lstStyle/>
@@ -19871,7 +20278,7 @@
               <a:buNone/>
             </a:pPr>
             <a:r>
-              <a:rPr lang="en-GB" sz="650" dirty="0">
+              <a:rPr lang="en-GB" sz="1000" dirty="0">
                 <a:solidFill>
                   <a:srgbClr val="1F1F1F"/>
                 </a:solidFill>
@@ -19880,20 +20287,20 @@
                 <a:cs typeface="Google Sans Flex SemiBold"/>
                 <a:sym typeface="Google Sans Flex SemiBold"/>
               </a:rPr>
-              <a:t>Send question</a:t>
-            </a:r>
-          </a:p>
-        </p:txBody>
-      </p:sp>
-      <p:sp>
-        <p:nvSpPr>
-          <p:cNvPr id="143" name="Oval 142"/>
+              <a:t>1</a:t>
+            </a:r>
+          </a:p>
+        </p:txBody>
+      </p:sp>
+      <p:sp>
+        <p:nvSpPr>
+          <p:cNvPr id="144" name="Oval 143"/>
           <p:cNvSpPr/>
           <p:nvPr/>
         </p:nvSpPr>
         <p:spPr>
           <a:xfrm>
-            <a:off x="6592824" y="2130552"/>
+            <a:off x="6592824" y="2157984"/>
             <a:ext cx="219456" cy="219456"/>
           </a:xfrm>
           <a:prstGeom prst="ellipse">
@@ -19931,20 +20338,20 @@
                 <a:cs typeface="Google Sans Flex SemiBold"/>
                 <a:sym typeface="Google Sans Flex SemiBold"/>
               </a:rPr>
-              <a:t>1</a:t>
-            </a:r>
-          </a:p>
-        </p:txBody>
-      </p:sp>
-      <p:sp>
-        <p:nvSpPr>
-          <p:cNvPr id="144" name="Oval 143"/>
+              <a:t>2</a:t>
+            </a:r>
+          </a:p>
+        </p:txBody>
+      </p:sp>
+      <p:sp>
+        <p:nvSpPr>
+          <p:cNvPr id="145" name="Oval 144"/>
           <p:cNvSpPr/>
           <p:nvPr/>
         </p:nvSpPr>
         <p:spPr>
           <a:xfrm>
-            <a:off x="6592824" y="2706624"/>
+            <a:off x="6592824" y="3758184"/>
             <a:ext cx="219456" cy="219456"/>
           </a:xfrm>
           <a:prstGeom prst="ellipse">
@@ -19982,21 +20389,67 @@
                 <a:cs typeface="Google Sans Flex SemiBold"/>
                 <a:sym typeface="Google Sans Flex SemiBold"/>
               </a:rPr>
-              <a:t>2</a:t>
-            </a:r>
-          </a:p>
-        </p:txBody>
-      </p:sp>
-      <p:sp>
-        <p:nvSpPr>
-          <p:cNvPr id="145" name="Oval 144"/>
+              <a:t>3</a:t>
+            </a:r>
+          </a:p>
+        </p:txBody>
+      </p:sp>
+      <p:sp>
+        <p:nvSpPr>
+          <p:cNvPr id="146" name="Phone caption"/>
+          <p:cNvSpPr txBox="1"/>
+          <p:nvPr/>
+        </p:nvSpPr>
+        <p:spPr>
+          <a:xfrm>
+            <a:off x="6967728" y="1325880"/>
+            <a:ext cx="1819656" cy="274320"/>
+          </a:xfrm>
+          <a:prstGeom prst="rect">
+            <a:avLst/>
+          </a:prstGeom>
+          <a:noFill/>
+        </p:spPr>
+        <p:txBody>
+          <a:bodyPr wrap="square" lIns="0" tIns="0" rIns="0" bIns="0" anchor="t">
+            <a:noAutofit/>
+          </a:bodyPr>
+          <a:lstStyle/>
+          <a:p>
+            <a:pPr algn="l" marL="0" indent="0">
+              <a:spcBef>
+                <a:spcPts val="0"/>
+              </a:spcBef>
+              <a:spcAft>
+                <a:spcPts val="0"/>
+              </a:spcAft>
+              <a:buNone/>
+            </a:pPr>
+            <a:r>
+              <a:rPr lang="en-GB" sz="1100" dirty="0">
+                <a:solidFill>
+                  <a:srgbClr val="202124"/>
+                </a:solidFill>
+                <a:latin typeface="Google Sans Flex SemiBold"/>
+                <a:ea typeface="Hiragino Sans"/>
+                <a:cs typeface="Google Sans Flex SemiBold"/>
+                <a:sym typeface="Google Sans Flex SemiBold"/>
+              </a:rPr>
+              <a:t>The family page</a:t>
+            </a:r>
+          </a:p>
+        </p:txBody>
+      </p:sp>
+      <p:sp>
+        <p:nvSpPr>
+          <p:cNvPr id="147" name="Oval 146"/>
           <p:cNvSpPr/>
           <p:nvPr/>
         </p:nvSpPr>
         <p:spPr>
           <a:xfrm>
-            <a:off x="6592824" y="3200400"/>
-            <a:ext cx="219456" cy="219456"/>
+            <a:off x="6967728" y="1755648"/>
+            <a:ext cx="201168" cy="201168"/>
           </a:xfrm>
           <a:prstGeom prst="ellipse">
             <a:avLst/>
@@ -20033,21 +20486,21 @@
                 <a:cs typeface="Google Sans Flex SemiBold"/>
                 <a:sym typeface="Google Sans Flex SemiBold"/>
               </a:rPr>
-              <a:t>3</a:t>
-            </a:r>
-          </a:p>
-        </p:txBody>
-      </p:sp>
-      <p:sp>
-        <p:nvSpPr>
-          <p:cNvPr id="146" name="Phone caption"/>
+              <a:t>1</a:t>
+            </a:r>
+          </a:p>
+        </p:txBody>
+      </p:sp>
+      <p:sp>
+        <p:nvSpPr>
+          <p:cNvPr id="148" name="Family note 1"/>
           <p:cNvSpPr txBox="1"/>
           <p:nvPr/>
         </p:nvSpPr>
         <p:spPr>
           <a:xfrm>
-            <a:off x="6967728" y="1325880"/>
-            <a:ext cx="1819656" cy="274320"/>
+            <a:off x="7242048" y="1737360"/>
+            <a:ext cx="1545336" cy="548640"/>
           </a:xfrm>
           <a:prstGeom prst="rect">
             <a:avLst/>
@@ -20061,38 +20514,41 @@
           <a:lstStyle/>
           <a:p>
             <a:pPr algn="l" marL="0" indent="0">
-              <a:spcBef>
-                <a:spcPts val="0"/>
-              </a:spcBef>
-              <a:spcAft>
-                <a:spcPts val="0"/>
-              </a:spcAft>
-              <a:buNone/>
-            </a:pPr>
-            <a:r>
-              <a:rPr lang="en-GB" sz="1100" dirty="0">
-                <a:solidFill>
-                  <a:srgbClr val="202124"/>
-                </a:solidFill>
-                <a:latin typeface="Google Sans Flex SemiBold"/>
+              <a:lnSpc>
+                <a:spcPct val="100000"/>
+              </a:lnSpc>
+              <a:spcBef>
+                <a:spcPts val="0"/>
+              </a:spcBef>
+              <a:spcAft>
+                <a:spcPts val="0"/>
+              </a:spcAft>
+              <a:buNone/>
+            </a:pPr>
+            <a:r>
+              <a:rPr lang="en-GB" sz="950" dirty="0">
+                <a:solidFill>
+                  <a:srgbClr val="5F6368"/>
+                </a:solidFill>
+                <a:latin typeface="Google Sans Flex"/>
                 <a:ea typeface="Hiragino Sans"/>
-                <a:cs typeface="Google Sans Flex SemiBold"/>
-                <a:sym typeface="Google Sans Flex SemiBold"/>
-              </a:rPr>
-              <a:t>Family page</a:t>
-            </a:r>
-          </a:p>
-        </p:txBody>
-      </p:sp>
-      <p:sp>
-        <p:nvSpPr>
-          <p:cNvPr id="147" name="Oval 146"/>
+                <a:cs typeface="Google Sans Flex"/>
+                <a:sym typeface="Google Sans Flex"/>
+              </a:rPr>
+              <a:t>The life story as a book, by time of life</a:t>
+            </a:r>
+          </a:p>
+        </p:txBody>
+      </p:sp>
+      <p:sp>
+        <p:nvSpPr>
+          <p:cNvPr id="149" name="Oval 148"/>
           <p:cNvSpPr/>
           <p:nvPr/>
         </p:nvSpPr>
         <p:spPr>
           <a:xfrm>
-            <a:off x="6967728" y="1755648"/>
+            <a:off x="6967728" y="2359152"/>
             <a:ext cx="201168" cy="201168"/>
           </a:xfrm>
           <a:prstGeom prst="ellipse">
@@ -20130,21 +20586,21 @@
                 <a:cs typeface="Google Sans Flex SemiBold"/>
                 <a:sym typeface="Google Sans Flex SemiBold"/>
               </a:rPr>
-              <a:t>1</a:t>
-            </a:r>
-          </a:p>
-        </p:txBody>
-      </p:sp>
-      <p:sp>
-        <p:nvSpPr>
-          <p:cNvPr id="148" name="Family note 1"/>
+              <a:t>2</a:t>
+            </a:r>
+          </a:p>
+        </p:txBody>
+      </p:sp>
+      <p:sp>
+        <p:nvSpPr>
+          <p:cNvPr id="150" name="Family note 2"/>
           <p:cNvSpPr txBox="1"/>
           <p:nvPr/>
         </p:nvSpPr>
         <p:spPr>
           <a:xfrm>
-            <a:off x="7242048" y="1737360"/>
-            <a:ext cx="1545336" cy="502920"/>
+            <a:off x="7242048" y="2340864"/>
+            <a:ext cx="1545336" cy="548640"/>
           </a:xfrm>
           <a:prstGeom prst="rect">
             <a:avLst/>
@@ -20179,20 +20635,20 @@
                 <a:cs typeface="Google Sans Flex"/>
                 <a:sym typeface="Google Sans Flex"/>
               </a:rPr>
-              <a:t>The senior's stories as chapters, by life stage</a:t>
-            </a:r>
-          </a:p>
-        </p:txBody>
-      </p:sp>
-      <p:sp>
-        <p:nvSpPr>
-          <p:cNvPr id="149" name="Oval 148"/>
+              <a:t>The family's questions, one tab away, each with the story it led to</a:t>
+            </a:r>
+          </a:p>
+        </p:txBody>
+      </p:sp>
+      <p:sp>
+        <p:nvSpPr>
+          <p:cNvPr id="151" name="Oval 150"/>
           <p:cNvSpPr/>
           <p:nvPr/>
         </p:nvSpPr>
         <p:spPr>
           <a:xfrm>
-            <a:off x="6967728" y="2322576"/>
+            <a:off x="6967728" y="2962656"/>
             <a:ext cx="201168" cy="201168"/>
           </a:xfrm>
           <a:prstGeom prst="ellipse">
@@ -20230,21 +20686,21 @@
                 <a:cs typeface="Google Sans Flex SemiBold"/>
                 <a:sym typeface="Google Sans Flex SemiBold"/>
               </a:rPr>
-              <a:t>2</a:t>
-            </a:r>
-          </a:p>
-        </p:txBody>
-      </p:sp>
-      <p:sp>
-        <p:nvSpPr>
-          <p:cNvPr id="150" name="Family note 2"/>
+              <a:t>3</a:t>
+            </a:r>
+          </a:p>
+        </p:txBody>
+      </p:sp>
+      <p:sp>
+        <p:nvSpPr>
+          <p:cNvPr id="152" name="Family note 3"/>
           <p:cNvSpPr txBox="1"/>
           <p:nvPr/>
         </p:nvSpPr>
         <p:spPr>
           <a:xfrm>
-            <a:off x="7242048" y="2304288"/>
-            <a:ext cx="1545336" cy="502920"/>
+            <a:off x="7242048" y="2944368"/>
+            <a:ext cx="1545336" cy="548640"/>
           </a:xfrm>
           <a:prstGeom prst="rect">
             <a:avLst/>
@@ -20279,72 +20735,21 @@
                 <a:cs typeface="Google Sans Flex"/>
                 <a:sym typeface="Google Sans Flex"/>
               </a:rPr>
-              <a:t>Their own words, with a clip of the answer to play</a:t>
-            </a:r>
-          </a:p>
-        </p:txBody>
-      </p:sp>
-      <p:sp>
-        <p:nvSpPr>
-          <p:cNvPr id="151" name="Oval 150"/>
-          <p:cNvSpPr/>
-          <p:nvPr/>
-        </p:nvSpPr>
-        <p:spPr>
-          <a:xfrm>
-            <a:off x="6967728" y="2889504"/>
-            <a:ext cx="201168" cy="201168"/>
-          </a:xfrm>
-          <a:prstGeom prst="ellipse">
-            <a:avLst/>
-          </a:prstGeom>
-          <a:solidFill>
-            <a:srgbClr val="D98F4E"/>
-          </a:solidFill>
-          <a:ln>
-            <a:noFill/>
-          </a:ln>
-        </p:spPr>
-        <p:txBody>
-          <a:bodyPr rtlCol="0" anchor="ctr" wrap="square" lIns="0" tIns="0" rIns="0" bIns="0">
-            <a:noAutofit/>
-          </a:bodyPr>
-          <a:lstStyle/>
-          <a:p>
-            <a:pPr algn="ctr" marL="0" indent="0">
-              <a:spcBef>
-                <a:spcPts val="0"/>
-              </a:spcBef>
-              <a:spcAft>
-                <a:spcPts val="0"/>
-              </a:spcAft>
-              <a:buNone/>
-            </a:pPr>
-            <a:r>
-              <a:rPr lang="en-GB" sz="1000" dirty="0">
-                <a:solidFill>
-                  <a:srgbClr val="1F1F1F"/>
-                </a:solidFill>
-                <a:latin typeface="Google Sans Flex SemiBold"/>
-                <a:ea typeface="Hiragino Sans"/>
-                <a:cs typeface="Google Sans Flex SemiBold"/>
-                <a:sym typeface="Google Sans Flex SemiBold"/>
-              </a:rPr>
-              <a:t>3</a:t>
-            </a:r>
-          </a:p>
-        </p:txBody>
-      </p:sp>
-      <p:sp>
-        <p:nvSpPr>
-          <p:cNvPr id="152" name="Family note 3"/>
+              <a:t>Each retelling with its quotes, in the words as said, and the voice that said them</a:t>
+            </a:r>
+          </a:p>
+        </p:txBody>
+      </p:sp>
+      <p:sp>
+        <p:nvSpPr>
+          <p:cNvPr id="153" name="Status note"/>
           <p:cNvSpPr txBox="1"/>
           <p:nvPr/>
         </p:nvSpPr>
         <p:spPr>
           <a:xfrm>
-            <a:off x="7242048" y="2871216"/>
-            <a:ext cx="1545336" cy="502920"/>
+            <a:off x="6967728" y="3657600"/>
+            <a:ext cx="1819656" cy="822960"/>
           </a:xfrm>
           <a:prstGeom prst="rect">
             <a:avLst/>
@@ -20359,7 +20764,7 @@
           <a:p>
             <a:pPr algn="l" marL="0" indent="0">
               <a:lnSpc>
-                <a:spcPct val="100000"/>
+                <a:spcPct val="105000"/>
               </a:lnSpc>
               <a:spcBef>
                 <a:spcPts val="0"/>
@@ -20370,7 +20775,7 @@
               <a:buNone/>
             </a:pPr>
             <a:r>
-              <a:rPr lang="en-GB" sz="950" dirty="0">
+              <a:rPr lang="en-GB" sz="900" dirty="0">
                 <a:solidFill>
                   <a:srgbClr val="5F6368"/>
                 </a:solidFill>
@@ -20379,56 +20784,7 @@
                 <a:cs typeface="Google Sans Flex"/>
                 <a:sym typeface="Google Sans Flex"/>
               </a:rPr>
-              <a:t>Ask a question; the senior hears who is asking</a:t>
-            </a:r>
-          </a:p>
-        </p:txBody>
-      </p:sp>
-      <p:sp>
-        <p:nvSpPr>
-          <p:cNvPr id="153" name="Status note"/>
-          <p:cNvSpPr txBox="1"/>
-          <p:nvPr/>
-        </p:nvSpPr>
-        <p:spPr>
-          <a:xfrm>
-            <a:off x="6967728" y="3657600"/>
-            <a:ext cx="1819656" cy="822960"/>
-          </a:xfrm>
-          <a:prstGeom prst="rect">
-            <a:avLst/>
-          </a:prstGeom>
-          <a:noFill/>
-        </p:spPr>
-        <p:txBody>
-          <a:bodyPr wrap="square" lIns="0" tIns="0" rIns="0" bIns="0" anchor="t">
-            <a:noAutofit/>
-          </a:bodyPr>
-          <a:lstStyle/>
-          <a:p>
-            <a:pPr algn="l" marL="0" indent="0">
-              <a:lnSpc>
-                <a:spcPct val="105000"/>
-              </a:lnSpc>
-              <a:spcBef>
-                <a:spcPts val="0"/>
-              </a:spcBef>
-              <a:spcAft>
-                <a:spcPts val="0"/>
-              </a:spcAft>
-              <a:buNone/>
-            </a:pPr>
-            <a:r>
-              <a:rPr lang="en-GB" sz="900" dirty="0">
-                <a:solidFill>
-                  <a:srgbClr val="5F6368"/>
-                </a:solidFill>
-                <a:latin typeface="Google Sans Flex"/>
-                <a:ea typeface="Hiragino Sans"/>
-                <a:cs typeface="Google Sans Flex"/>
-                <a:sym typeface="Google Sans Flex"/>
-              </a:rPr>
-              <a:t>The family page is built. The tablet screen is the next step: today the prototype starts from a Talk button.</a:t>
+              <a:t>Both are built. kataribe.kaseovo.com shows a family page from the demo, and lets anyone try the conversation in English.</a:t>
             </a:r>
           </a:p>
         </p:txBody>
@@ -20610,7 +20966,7 @@
       </p:sp>
       <p:sp>
         <p:nvSpPr>
-          <p:cNvPr id="112" name="Senior's tablet"/>
+          <p:cNvPr id="112" name="Senior's screen"/>
           <p:cNvSpPr/>
           <p:nvPr/>
         </p:nvSpPr>
@@ -20694,7 +21050,7 @@
       </p:pic>
       <p:sp>
         <p:nvSpPr>
-          <p:cNvPr id="115" name="Senior's tablet text"/>
+          <p:cNvPr id="115" name="Senior's screen text"/>
           <p:cNvSpPr txBox="1"/>
           <p:nvPr/>
         </p:nvSpPr>
@@ -20733,7 +21089,7 @@
                 <a:cs typeface="Google Sans Flex SemiBold"/>
                 <a:sym typeface="Google Sans Flex SemiBold"/>
               </a:rPr>
-              <a:t>Senior's tablet</a:t>
+              <a:t>Senior's screen</a:t>
             </a:r>
           </a:p>
           <a:p>
@@ -20785,7 +21141,7 @@
                 <a:cs typeface="Google Sans Flex"/>
                 <a:sym typeface="Google Sans Flex"/>
               </a:rPr>
-              <a:t>Mic in at 16 kHz, voice out at 24 kHz</a:t>
+              <a:t>Mic in, voice out at 24 kHz</a:t>
             </a:r>
           </a:p>
           <a:p>
@@ -20811,7 +21167,7 @@
                 <a:cs typeface="Google Sans Flex"/>
                 <a:sym typeface="Google Sans Flex"/>
               </a:rPr>
-              <a:t>Records the talk in stereo: the senior left, the AI right</a:t>
+              <a:t>Records both voices on one timeline</a:t>
             </a:r>
           </a:p>
           <a:p>
@@ -20837,14 +21193,14 @@
                 <a:cs typeface="Google Sans Flex"/>
                 <a:sym typeface="Google Sans Flex"/>
               </a:rPr>
-              <a:t>Holds only a short-lived token, which cannot change the prompt</a:t>
-            </a:r>
-          </a:p>
-        </p:txBody>
-      </p:sp>
-      <p:sp>
-        <p:nvSpPr>
-          <p:cNvPr id="116" name="Family's phone"/>
+              <a:t>Holds only a single-use token, with the prompt sealed in</a:t>
+            </a:r>
+          </a:p>
+        </p:txBody>
+      </p:sp>
+      <p:sp>
+        <p:nvSpPr>
+          <p:cNvPr id="116" name="Family page"/>
           <p:cNvSpPr/>
           <p:nvPr/>
         </p:nvSpPr>
@@ -20928,7 +21284,7 @@
       </p:pic>
       <p:sp>
         <p:nvSpPr>
-          <p:cNvPr id="119" name="Family's phone text"/>
+          <p:cNvPr id="119" name="Family page text"/>
           <p:cNvSpPr txBox="1"/>
           <p:nvPr/>
         </p:nvSpPr>
@@ -20967,7 +21323,7 @@
                 <a:cs typeface="Google Sans Flex SemiBold"/>
                 <a:sym typeface="Google Sans Flex SemiBold"/>
               </a:rPr>
-              <a:t>Family's phone</a:t>
+              <a:t>Family page</a:t>
             </a:r>
           </a:p>
           <a:p>
@@ -20993,7 +21349,7 @@
                 <a:cs typeface="Google Sans Flex"/>
                 <a:sym typeface="Google Sans Flex"/>
               </a:rPr>
-              <a:t>The family page: shared stories, with audio</a:t>
+              <a:t>Shared stories only, in Japanese or English</a:t>
             </a:r>
           </a:p>
         </p:txBody>
@@ -21094,7 +21450,7 @@
                 <a:cs typeface="Google Sans Flex SemiBold"/>
                 <a:sym typeface="Google Sans Flex SemiBold"/>
               </a:rPr>
-              <a:t>Cloud Run</a:t>
+              <a:t>Cloud Run, Tokyo</a:t>
             </a:r>
           </a:p>
           <a:p>
@@ -21117,7 +21473,7 @@
                 <a:cs typeface="Google Sans Flex"/>
                 <a:sym typeface="Google Sans Flex"/>
               </a:rPr>
-              <a:t>FastAPI and the web app, in one container</a:t>
+              <a:t>kataribe.kaseovo.com · FastAPI and the web app</a:t>
             </a:r>
           </a:p>
         </p:txBody>
@@ -21271,7 +21627,7 @@
                 <a:cs typeface="Google Sans Flex"/>
                 <a:sym typeface="Google Sans Flex"/>
               </a:rPr>
-              <a:t>The story so far and family questions, locked into a short-lived Live token</a:t>
+              <a:t>The story so far and family questions, sealed into a single-use Live token</a:t>
             </a:r>
           </a:p>
         </p:txBody>
@@ -21432,7 +21788,7 @@
       </p:sp>
       <p:sp>
         <p:nvSpPr>
-          <p:cNvPr id="129" name="Processing"/>
+          <p:cNvPr id="129" name="After each conversation"/>
           <p:cNvSpPr/>
           <p:nvPr/>
         </p:nvSpPr>
@@ -21514,7 +21870,7 @@
       </p:sp>
       <p:sp>
         <p:nvSpPr>
-          <p:cNvPr id="131" name="Processing text"/>
+          <p:cNvPr id="131" name="After each conversation text"/>
           <p:cNvSpPr txBox="1"/>
           <p:nvPr/>
         </p:nvSpPr>
@@ -21553,7 +21909,7 @@
                 <a:cs typeface="Google Sans Flex SemiBold"/>
                 <a:sym typeface="Google Sans Flex SemiBold"/>
               </a:rPr>
-              <a:t>Processing</a:t>
+              <a:t>After each conversation</a:t>
             </a:r>
           </a:p>
           <a:p>
@@ -21579,7 +21935,7 @@
                 <a:cs typeface="Google Sans Flex"/>
                 <a:sym typeface="Google Sans Flex"/>
               </a:rPr>
-              <a:t>Extract → verify → screen → plan, after every session</a:t>
+              <a:t>Write → check → screen → plan</a:t>
             </a:r>
           </a:p>
         </p:txBody>
@@ -21733,7 +22089,7 @@
                 <a:cs typeface="Google Sans Flex"/>
                 <a:sym typeface="Google Sans Flex"/>
               </a:rPr>
-              <a:t>Shared stories only; clips cut from the senior's channel</a:t>
+              <a:t>Shared stories only; one clip per quote; English beside it</a:t>
             </a:r>
           </a:p>
         </p:txBody>
@@ -22201,7 +22557,7 @@
                 <a:cs typeface="Google Sans Flex"/>
                 <a:sym typeface="Google Sans Flex"/>
               </a:rPr>
-              <a:t>Recordings, then clips</a:t>
+              <a:t>Recordings; a clip per quote</a:t>
             </a:r>
           </a:p>
         </p:txBody>
@@ -22357,7 +22713,7 @@
                 <a:cs typeface="Google Sans Flex"/>
                 <a:sym typeface="Google Sans Flex"/>
               </a:rPr>
-              <a:t>Extraction, screening, planning</a:t>
+              <a:t>Writes, listens again, translates, plans</a:t>
             </a:r>
           </a:p>
         </p:txBody>
@@ -22952,7 +23308,7 @@
                 <a:cs typeface="Google Sans Flex"/>
                 <a:sym typeface="Google Sans Flex"/>
               </a:rPr>
-              <a:t>Gemini 3.8 Live: real-time Japanese voice, native audio, built-in transcription</a:t>
+              <a:t>Gemini 3.8 Live: real-time voice, native audio, built-in transcription</a:t>
             </a:r>
           </a:p>
           <a:p>
@@ -22985,7 +23341,7 @@
                 <a:cs typeface="Google Sans Flex"/>
                 <a:sym typeface="Google Sans Flex"/>
               </a:rPr>
-              <a:t>Gemini 3.8 Flash: extraction, screening, planning, and judging the evals</a:t>
+              <a:t>Gemini 3.8 Flash: writes the stories, listens to each quote's clip, translates, plans</a:t>
             </a:r>
           </a:p>
           <a:p>
@@ -23018,7 +23374,7 @@
                 <a:cs typeface="Google Sans Flex"/>
                 <a:sym typeface="Google Sans Flex"/>
               </a:rPr>
-              <a:t>Google Gen AI SDK, Python and JavaScript; ephemeral tokens</a:t>
+              <a:t>Google Gen AI SDK, Python and JavaScript; single-use tokens</a:t>
             </a:r>
           </a:p>
         </p:txBody>
@@ -23181,7 +23537,7 @@
                 <a:cs typeface="Google Sans Flex"/>
                 <a:sym typeface="Google Sans Flex"/>
               </a:rPr>
-              <a:t>Cloud Run: the API and the web app in one container</a:t>
+              <a:t>Cloud Run in Tokyo, at kataribe.kaseovo.com</a:t>
             </a:r>
           </a:p>
           <a:p>
@@ -23214,7 +23570,7 @@
                 <a:cs typeface="Google Sans Flex"/>
                 <a:sym typeface="Google Sans Flex"/>
               </a:rPr>
-              <a:t>Firestore: people, sessions, stories, plans, questions</a:t>
+              <a:t>Firestore and Cloud Storage; Secret Manager for the keys</a:t>
             </a:r>
           </a:p>
           <a:p>
@@ -23247,7 +23603,7 @@
                 <a:cs typeface="Google Sans Flex"/>
                 <a:sym typeface="Google Sans Flex"/>
               </a:rPr>
-              <a:t>Cloud Storage: recordings, uploaded in parts</a:t>
+              <a:t>An uptime check, Error Reporting and a budget alert</a:t>
             </a:r>
           </a:p>
         </p:txBody>
@@ -23443,7 +23799,7 @@
                 <a:cs typeface="Google Sans Flex"/>
                 <a:sym typeface="Google Sans Flex"/>
               </a:rPr>
-              <a:t>Web Audio worklet: 16 kHz capture, stereo recording</a:t>
+              <a:t>Web Audio worklet: capture, and both voices on one recording</a:t>
             </a:r>
           </a:p>
           <a:p>
@@ -23705,7 +24061,7 @@
                 <a:cs typeface="Google Sans Flex"/>
                 <a:sym typeface="Google Sans Flex"/>
               </a:rPr>
-              <a:t>GitHub Actions: checks on every push, the live eval on demand</a:t>
+              <a:t>make smoke: a judge's whole path, on the live service</a:t>
             </a:r>
           </a:p>
         </p:txBody>
@@ -23797,7 +24153,7 @@
                 <a:cs typeface="Google Sans Flex"/>
                 <a:sym typeface="Google Sans Flex"/>
               </a:rPr>
-              <a:t>The model never speaks for the senior. Gemini extracts the stories; plain code then checks every quote, and every yes to sharing, against the transcript.</a:t>
+              <a:t>The model never speaks for the senior. Gemini writes the stories; plain code checks every quote and every yes against the transcript, and Gemini hears each one again in the recording.</a:t>
             </a:r>
           </a:p>
         </p:txBody>

--- a/docs/demo/kataribe-pitch-deck.pptx
+++ b/docs/demo/kataribe-pitch-deck.pptx
@@ -9077,7 +9077,7 @@
                 <a:cs typeface="Google Sans Flex"/>
                 <a:sym typeface="Google Sans Flex"/>
               </a:rPr>
-              <a:t>Live at kataribe.kaseovo.com, on a phone. The example persona stands in until the demo take.</a:t>
+              <a:t>Live at kataribe.kaseovo.com, on a phone: the demo's family page, written from the video's conversations.</a:t>
             </a:r>
           </a:p>
         </p:txBody>
@@ -10586,7 +10586,7 @@
                 <a:cs typeface="Google Sans Flex"/>
                 <a:sym typeface="Google Sans Flex"/>
               </a:rPr>
-              <a:t>Not yet measured: elderly voices and dialect. A native speaker reviews with the demo take.</a:t>
+              <a:t>Not yet measured: elderly voices and dialect. A native speaker's review of the Japanese is next.</a:t>
             </a:r>
           </a:p>
         </p:txBody>
@@ -11827,14 +11827,15 @@
             <a:r>
               <a:rPr lang="en-GB" sz="1400" dirty="0">
                 <a:solidFill>
-                  <a:srgbClr val="C5221F"/>
-                </a:solidFill>
-                <a:latin typeface="Google Sans Flex SemiBold"/>
+                  <a:srgbClr val="A0561B"/>
+                </a:solidFill>
+                <a:latin typeface="Google Sans Flex Medium"/>
                 <a:ea typeface="Hiragino Sans"/>
-                <a:cs typeface="Google Sans Flex SemiBold"/>
-                <a:sym typeface="Google Sans Flex SemiBold"/>
-              </a:rPr>
-              <a:t>TBD</a:t>
+                <a:cs typeface="Google Sans Flex Medium"/>
+                <a:sym typeface="Google Sans Flex Medium"/>
+                <a:hlinkClick r:id="rId6"/>
+              </a:rPr>
+              <a:t>youtu.be/wg3SdraT2Oo</a:t>
             </a:r>
             <a:endParaRPr>
               <a:latin typeface="Google Sans Flex Medium"/>
@@ -11885,7 +11886,7 @@
                 <a:ea typeface="Hiragino Sans"/>
                 <a:cs typeface="Google Sans Flex Medium"/>
                 <a:sym typeface="Google Sans Flex Medium"/>
-                <a:hlinkClick r:id="rId6"/>
+                <a:hlinkClick r:id="rId7"/>
               </a:rPr>
               <a:t>kataribe.kaseovo.com</a:t>
             </a:r>
@@ -11920,103 +11921,7 @@
       </p:sp>
       <p:pic>
         <p:nvPicPr>
-          <p:cNvPr id="160" name="Picture 159" descr="qr-product.png"/>
-          <p:cNvPicPr>
-            <a:picLocks noChangeAspect="1"/>
-          </p:cNvPicPr>
-          <p:nvPr/>
-        </p:nvPicPr>
-        <p:blipFill>
-          <a:blip r:embed="rId7"/>
-          <a:stretch>
-            <a:fillRect/>
-          </a:stretch>
-        </p:blipFill>
-        <p:spPr>
-          <a:xfrm>
-            <a:off x="448056" y="2606040"/>
-            <a:ext cx="1325880" cy="1325880"/>
-          </a:xfrm>
-          <a:prstGeom prst="rect">
-            <a:avLst/>
-          </a:prstGeom>
-        </p:spPr>
-      </p:pic>
-      <p:sp>
-        <p:nvSpPr>
-          <p:cNvPr id="161" name="Try it on your own life note"/>
-          <p:cNvSpPr txBox="1"/>
-          <p:nvPr/>
-        </p:nvSpPr>
-        <p:spPr>
-          <a:xfrm>
-            <a:off x="1956816" y="2606040"/>
-            <a:ext cx="2514600" cy="1325880"/>
-          </a:xfrm>
-          <a:prstGeom prst="rect">
-            <a:avLst/>
-          </a:prstGeom>
-          <a:noFill/>
-        </p:spPr>
-        <p:txBody>
-          <a:bodyPr wrap="square" lIns="0" tIns="0" rIns="0" bIns="0" anchor="ctr">
-            <a:noAutofit/>
-          </a:bodyPr>
-          <a:lstStyle/>
-          <a:p>
-            <a:pPr algn="l" marL="0" indent="0">
-              <a:spcBef>
-                <a:spcPts val="0"/>
-              </a:spcBef>
-              <a:spcAft>
-                <a:spcPts val="400"/>
-              </a:spcAft>
-              <a:buNone/>
-            </a:pPr>
-            <a:r>
-              <a:rPr lang="en-GB" sz="1200" dirty="0">
-                <a:solidFill>
-                  <a:srgbClr val="202124"/>
-                </a:solidFill>
-                <a:latin typeface="Google Sans Flex SemiBold"/>
-                <a:ea typeface="Hiragino Sans"/>
-                <a:cs typeface="Google Sans Flex SemiBold"/>
-                <a:sym typeface="Google Sans Flex SemiBold"/>
-              </a:rPr>
-              <a:t>Try it on your own life</a:t>
-            </a:r>
-          </a:p>
-          <a:p>
-            <a:pPr algn="l" marL="0" indent="0">
-              <a:lnSpc>
-                <a:spcPct val="105000"/>
-              </a:lnSpc>
-              <a:spcBef>
-                <a:spcPts val="0"/>
-              </a:spcBef>
-              <a:spcAft>
-                <a:spcPts val="0"/>
-              </a:spcAft>
-              <a:buNone/>
-            </a:pPr>
-            <a:r>
-              <a:rPr lang="en-GB" sz="1000" dirty="0">
-                <a:solidFill>
-                  <a:srgbClr val="5F6368"/>
-                </a:solidFill>
-                <a:latin typeface="Google Sans Flex"/>
-                <a:ea typeface="Hiragino Sans"/>
-                <a:cs typeface="Google Sans Flex"/>
-                <a:sym typeface="Google Sans Flex"/>
-              </a:rPr>
-              <a:t>A family page from the demo, then a conversation of your own, in English. About three minutes.</a:t>
-            </a:r>
-          </a:p>
-        </p:txBody>
-      </p:sp>
-      <p:pic>
-        <p:nvPicPr>
-          <p:cNvPr id="162" name="Picture 161" descr="qr-repo.png"/>
+          <p:cNvPr id="160" name="Picture 159" descr="qr-video.png"/>
           <p:cNvPicPr>
             <a:picLocks noChangeAspect="1"/>
           </p:cNvPicPr>
@@ -12030,8 +11935,8 @@
         </p:blipFill>
         <p:spPr>
           <a:xfrm>
-            <a:off x="4700016" y="2606040"/>
-            <a:ext cx="1325880" cy="1325880"/>
+            <a:off x="448056" y="2606040"/>
+            <a:ext cx="1097280" cy="1097280"/>
           </a:xfrm>
           <a:prstGeom prst="rect">
             <a:avLst/>
@@ -12040,14 +11945,206 @@
       </p:pic>
       <p:sp>
         <p:nvSpPr>
-          <p:cNvPr id="163" name="The code, the tests, and the plan behind them note"/>
+          <p:cNvPr id="161" name="Watch the demo note"/>
           <p:cNvSpPr txBox="1"/>
           <p:nvPr/>
         </p:nvSpPr>
         <p:spPr>
           <a:xfrm>
-            <a:off x="6208776" y="2606040"/>
-            <a:ext cx="2514600" cy="1325880"/>
+            <a:off x="1682496" y="2468880"/>
+            <a:ext cx="1463040" cy="1371600"/>
+          </a:xfrm>
+          <a:prstGeom prst="rect">
+            <a:avLst/>
+          </a:prstGeom>
+          <a:noFill/>
+        </p:spPr>
+        <p:txBody>
+          <a:bodyPr wrap="square" lIns="0" tIns="0" rIns="0" bIns="0" anchor="ctr">
+            <a:noAutofit/>
+          </a:bodyPr>
+          <a:lstStyle/>
+          <a:p>
+            <a:pPr algn="l" marL="0" indent="0">
+              <a:spcBef>
+                <a:spcPts val="0"/>
+              </a:spcBef>
+              <a:spcAft>
+                <a:spcPts val="400"/>
+              </a:spcAft>
+              <a:buNone/>
+            </a:pPr>
+            <a:r>
+              <a:rPr lang="en-GB" sz="1200" dirty="0">
+                <a:solidFill>
+                  <a:srgbClr val="202124"/>
+                </a:solidFill>
+                <a:latin typeface="Google Sans Flex SemiBold"/>
+                <a:ea typeface="Hiragino Sans"/>
+                <a:cs typeface="Google Sans Flex SemiBold"/>
+                <a:sym typeface="Google Sans Flex SemiBold"/>
+              </a:rPr>
+              <a:t>Watch the demo</a:t>
+            </a:r>
+          </a:p>
+          <a:p>
+            <a:pPr algn="l" marL="0" indent="0">
+              <a:lnSpc>
+                <a:spcPct val="105000"/>
+              </a:lnSpc>
+              <a:spcBef>
+                <a:spcPts val="0"/>
+              </a:spcBef>
+              <a:spcAft>
+                <a:spcPts val="0"/>
+              </a:spcAft>
+              <a:buNone/>
+            </a:pPr>
+            <a:r>
+              <a:rPr lang="en-GB" sz="1000" dirty="0">
+                <a:solidFill>
+                  <a:srgbClr val="5F6368"/>
+                </a:solidFill>
+                <a:latin typeface="Google Sans Flex"/>
+                <a:ea typeface="Hiragino Sans"/>
+                <a:cs typeface="Google Sans Flex"/>
+                <a:sym typeface="Google Sans Flex"/>
+              </a:rPr>
+              <a:t>3:48, in English: two conversations, the family page they made, and how to try it yourself.</a:t>
+            </a:r>
+          </a:p>
+        </p:txBody>
+      </p:sp>
+      <p:pic>
+        <p:nvPicPr>
+          <p:cNvPr id="162" name="Picture 161" descr="qr-product.png"/>
+          <p:cNvPicPr>
+            <a:picLocks noChangeAspect="1"/>
+          </p:cNvPicPr>
+          <p:nvPr/>
+        </p:nvPicPr>
+        <p:blipFill>
+          <a:blip r:embed="rId9"/>
+          <a:stretch>
+            <a:fillRect/>
+          </a:stretch>
+        </p:blipFill>
+        <p:spPr>
+          <a:xfrm>
+            <a:off x="3282696" y="2606040"/>
+            <a:ext cx="1097280" cy="1097280"/>
+          </a:xfrm>
+          <a:prstGeom prst="rect">
+            <a:avLst/>
+          </a:prstGeom>
+        </p:spPr>
+      </p:pic>
+      <p:sp>
+        <p:nvSpPr>
+          <p:cNvPr id="163" name="Try it on your own life note"/>
+          <p:cNvSpPr txBox="1"/>
+          <p:nvPr/>
+        </p:nvSpPr>
+        <p:spPr>
+          <a:xfrm>
+            <a:off x="4517136" y="2468880"/>
+            <a:ext cx="1463040" cy="1371600"/>
+          </a:xfrm>
+          <a:prstGeom prst="rect">
+            <a:avLst/>
+          </a:prstGeom>
+          <a:noFill/>
+        </p:spPr>
+        <p:txBody>
+          <a:bodyPr wrap="square" lIns="0" tIns="0" rIns="0" bIns="0" anchor="ctr">
+            <a:noAutofit/>
+          </a:bodyPr>
+          <a:lstStyle/>
+          <a:p>
+            <a:pPr algn="l" marL="0" indent="0">
+              <a:spcBef>
+                <a:spcPts val="0"/>
+              </a:spcBef>
+              <a:spcAft>
+                <a:spcPts val="400"/>
+              </a:spcAft>
+              <a:buNone/>
+            </a:pPr>
+            <a:r>
+              <a:rPr lang="en-GB" sz="1200" dirty="0">
+                <a:solidFill>
+                  <a:srgbClr val="202124"/>
+                </a:solidFill>
+                <a:latin typeface="Google Sans Flex SemiBold"/>
+                <a:ea typeface="Hiragino Sans"/>
+                <a:cs typeface="Google Sans Flex SemiBold"/>
+                <a:sym typeface="Google Sans Flex SemiBold"/>
+              </a:rPr>
+              <a:t>Try it on your own life</a:t>
+            </a:r>
+          </a:p>
+          <a:p>
+            <a:pPr algn="l" marL="0" indent="0">
+              <a:lnSpc>
+                <a:spcPct val="105000"/>
+              </a:lnSpc>
+              <a:spcBef>
+                <a:spcPts val="0"/>
+              </a:spcBef>
+              <a:spcAft>
+                <a:spcPts val="0"/>
+              </a:spcAft>
+              <a:buNone/>
+            </a:pPr>
+            <a:r>
+              <a:rPr lang="en-GB" sz="1000" dirty="0">
+                <a:solidFill>
+                  <a:srgbClr val="5F6368"/>
+                </a:solidFill>
+                <a:latin typeface="Google Sans Flex"/>
+                <a:ea typeface="Hiragino Sans"/>
+                <a:cs typeface="Google Sans Flex"/>
+                <a:sym typeface="Google Sans Flex"/>
+              </a:rPr>
+              <a:t>A family page from the demo, then a conversation of your own, in English. About three minutes.</a:t>
+            </a:r>
+          </a:p>
+        </p:txBody>
+      </p:sp>
+      <p:pic>
+        <p:nvPicPr>
+          <p:cNvPr id="164" name="Picture 163" descr="qr-repo.png"/>
+          <p:cNvPicPr>
+            <a:picLocks noChangeAspect="1"/>
+          </p:cNvPicPr>
+          <p:nvPr/>
+        </p:nvPicPr>
+        <p:blipFill>
+          <a:blip r:embed="rId10"/>
+          <a:stretch>
+            <a:fillRect/>
+          </a:stretch>
+        </p:blipFill>
+        <p:spPr>
+          <a:xfrm>
+            <a:off x="6117336" y="2606040"/>
+            <a:ext cx="1097280" cy="1097280"/>
+          </a:xfrm>
+          <a:prstGeom prst="rect">
+            <a:avLst/>
+          </a:prstGeom>
+        </p:spPr>
+      </p:pic>
+      <p:sp>
+        <p:nvSpPr>
+          <p:cNvPr id="165" name="The code, the tests, and the plan behind them note"/>
+          <p:cNvSpPr txBox="1"/>
+          <p:nvPr/>
+        </p:nvSpPr>
+        <p:spPr>
+          <a:xfrm>
+            <a:off x="7351776" y="2468880"/>
+            <a:ext cx="1463040" cy="1371600"/>
           </a:xfrm>
           <a:prstGeom prst="rect">
             <a:avLst/>
@@ -18635,7 +18732,7 @@
                 <a:cs typeface="Google Sans Flex Medium"/>
                 <a:sym typeface="Google Sans Flex Medium"/>
               </a:rPr>
-              <a:t>田中ハルさん</a:t>
+              <a:t>小川節子さん</a:t>
             </a:r>
           </a:p>
         </p:txBody>
@@ -18684,7 +18781,7 @@
                 <a:cs typeface="Google Sans Flex Medium"/>
                 <a:sym typeface="Google Sans Flex Medium"/>
               </a:rPr>
-              <a:t>ハルさん、こんにちは。学校のころのお話を、聞かせてください。</a:t>
+              <a:t>郡上おどり、いいですねえ。どなたと踊られたんですか。</a:t>
             </a:r>
           </a:p>
         </p:txBody>
@@ -19718,7 +19815,7 @@
                 <a:cs typeface="Google Sans Flex SemiBold"/>
                 <a:sym typeface="Google Sans Flex SemiBold"/>
               </a:rPr>
-              <a:t>Tanaka Haru</a:t>
+              <a:t>Ogawa Setsuko</a:t>
             </a:r>
           </a:p>
           <a:p>
@@ -19741,7 +19838,7 @@
                 <a:cs typeface="Google Sans Flex"/>
                 <a:sym typeface="Google Sans Flex"/>
               </a:rPr>
-              <a:t>田中ハル · Born in 1947, Nagano</a:t>
+              <a:t>小川節子 · Born in 1944, Gifu</a:t>
             </a:r>
           </a:p>
         </p:txBody>
@@ -19893,7 +19990,7 @@
                 <a:cs typeface="Google Sans Flex SemiBold"/>
                 <a:sym typeface="Google Sans Flex SemiBold"/>
               </a:rPr>
-              <a:t>CHAPTER 1 · CHILDHOOD</a:t>
+              <a:t>CHAPTER 2 · MARRIAGE</a:t>
             </a:r>
           </a:p>
         </p:txBody>
@@ -19942,7 +20039,7 @@
                 <a:cs typeface="Google Sans Flex SemiBold"/>
                 <a:sym typeface="Google Sans Flex SemiBold"/>
               </a:rPr>
-              <a:t>Her father's textile factory</a:t>
+              <a:t>Gujo Odori and Meeting Kazuo</a:t>
             </a:r>
           </a:p>
         </p:txBody>
@@ -19991,7 +20088,7 @@
                 <a:cs typeface="Google Sans Flex"/>
                 <a:sym typeface="Google Sans Flex"/>
               </a:rPr>
-              <a:t>Tanaka Haru grew up in a small mountain village in Nagano. Her father ran a small textile factory…</a:t>
+              <a:t>In the summer of Showa 40, when Setsuko was twenty-one, she met her husband Kazuo at the Gujo Odori…</a:t>
             </a:r>
           </a:p>
         </p:txBody>
@@ -20046,7 +20143,7 @@
                 <a:cs typeface="Google Sans Flex Medium"/>
                 <a:sym typeface="Google Sans Flex Medium"/>
               </a:rPr>
-              <a:t>All 3 quotes</a:t>
+              <a:t>All 2 quotes</a:t>
             </a:r>
           </a:p>
         </p:txBody>
@@ -20126,7 +20223,7 @@
                 <a:cs typeface="Google Sans Flex"/>
                 <a:sym typeface="Google Sans Flex"/>
               </a:rPr>
-              <a:t>「長野の、山あいの小さな村です。父は村で小さな織物の工場をやっておりました。」</a:t>
+              <a:t>「主人の和夫さんとはね、郡上おどりで知り合ったんですよ。…」</a:t>
             </a:r>
           </a:p>
           <a:p>
@@ -20152,7 +20249,7 @@
                 <a:cs typeface="Google Sans Flex"/>
                 <a:sym typeface="Google Sans Flex"/>
               </a:rPr>
-              <a:t>“It was a small village in Nagano…”</a:t>
+              <a:t>“I met my husband Kazuo…”</a:t>
             </a:r>
           </a:p>
         </p:txBody>

--- a/docs/demo/kataribe-pitch-deck.pptx
+++ b/docs/demo/kataribe-pitch-deck.pptx
@@ -19594,51 +19594,46 @@
       </p:sp>
       <p:sp>
         <p:nvSpPr>
-          <p:cNvPr id="127" name="Oval 126"/>
-          <p:cNvSpPr/>
-          <p:nvPr/>
-        </p:nvSpPr>
-        <p:spPr>
-          <a:xfrm>
-            <a:off x="2551176" y="4608576"/>
-            <a:ext cx="201168" cy="201168"/>
-          </a:xfrm>
-          <a:prstGeom prst="ellipse">
-            <a:avLst/>
-          </a:prstGeom>
-          <a:solidFill>
-            <a:srgbClr val="D98F4E"/>
-          </a:solidFill>
-          <a:ln>
-            <a:noFill/>
-          </a:ln>
-        </p:spPr>
-        <p:txBody>
-          <a:bodyPr rtlCol="0" anchor="ctr" wrap="square" lIns="0" tIns="0" rIns="0" bIns="0">
+          <p:cNvPr id="127" name="Tablet then"/>
+          <p:cNvSpPr txBox="1"/>
+          <p:nvPr/>
+        </p:nvSpPr>
+        <p:spPr>
+          <a:xfrm>
+            <a:off x="2551176" y="4572000"/>
+            <a:ext cx="274320" cy="256032"/>
+          </a:xfrm>
+          <a:prstGeom prst="rect">
+            <a:avLst/>
+          </a:prstGeom>
+          <a:noFill/>
+        </p:spPr>
+        <p:txBody>
+          <a:bodyPr wrap="square" lIns="0" tIns="0" rIns="0" bIns="0" anchor="t">
             <a:noAutofit/>
           </a:bodyPr>
           <a:lstStyle/>
           <a:p>
-            <a:pPr algn="ctr" marL="0" indent="0">
-              <a:spcBef>
-                <a:spcPts val="0"/>
-              </a:spcBef>
-              <a:spcAft>
-                <a:spcPts val="0"/>
-              </a:spcAft>
-              <a:buNone/>
-            </a:pPr>
-            <a:r>
-              <a:rPr lang="en-GB" sz="1000" dirty="0">
-                <a:solidFill>
-                  <a:srgbClr val="1F1F1F"/>
+            <a:pPr algn="l" marL="0" indent="0">
+              <a:spcBef>
+                <a:spcPts val="0"/>
+              </a:spcBef>
+              <a:spcAft>
+                <a:spcPts val="0"/>
+              </a:spcAft>
+              <a:buNone/>
+            </a:pPr>
+            <a:r>
+              <a:rPr lang="en-GB" sz="1100" dirty="0">
+                <a:solidFill>
+                  <a:srgbClr val="A0561B"/>
                 </a:solidFill>
                 <a:latin typeface="Google Sans Flex SemiBold"/>
                 <a:ea typeface="Hiragino Sans"/>
                 <a:cs typeface="Google Sans Flex SemiBold"/>
                 <a:sym typeface="Google Sans Flex SemiBold"/>
               </a:rPr>
-              <a:t>4</a:t>
+              <a:t>→</a:t>
             </a:r>
           </a:p>
         </p:txBody>
@@ -19684,7 +19679,7 @@
                 <a:cs typeface="Google Sans Flex"/>
                 <a:sym typeface="Google Sans Flex"/>
               </a:rPr>
-              <a:t>Then: share today's story, or keep it</a:t>
+              <a:t>Then, at the close: share today's story, or keep it</a:t>
             </a:r>
           </a:p>
         </p:txBody>
@@ -20499,8 +20494,8 @@
         </p:nvSpPr>
         <p:spPr>
           <a:xfrm>
-            <a:off x="6967728" y="1325880"/>
-            <a:ext cx="1819656" cy="274320"/>
+            <a:off x="6903720" y="1325880"/>
+            <a:ext cx="1883664" cy="274320"/>
           </a:xfrm>
           <a:prstGeom prst="rect">
             <a:avLst/>
@@ -20539,65 +20534,14 @@
       </p:sp>
       <p:sp>
         <p:nvSpPr>
-          <p:cNvPr id="147" name="Oval 146"/>
-          <p:cNvSpPr/>
-          <p:nvPr/>
-        </p:nvSpPr>
-        <p:spPr>
-          <a:xfrm>
-            <a:off x="6967728" y="1755648"/>
-            <a:ext cx="201168" cy="201168"/>
-          </a:xfrm>
-          <a:prstGeom prst="ellipse">
-            <a:avLst/>
-          </a:prstGeom>
-          <a:solidFill>
-            <a:srgbClr val="D98F4E"/>
-          </a:solidFill>
-          <a:ln>
-            <a:noFill/>
-          </a:ln>
-        </p:spPr>
-        <p:txBody>
-          <a:bodyPr rtlCol="0" anchor="ctr" wrap="square" lIns="0" tIns="0" rIns="0" bIns="0">
-            <a:noAutofit/>
-          </a:bodyPr>
-          <a:lstStyle/>
-          <a:p>
-            <a:pPr algn="ctr" marL="0" indent="0">
-              <a:spcBef>
-                <a:spcPts val="0"/>
-              </a:spcBef>
-              <a:spcAft>
-                <a:spcPts val="0"/>
-              </a:spcAft>
-              <a:buNone/>
-            </a:pPr>
-            <a:r>
-              <a:rPr lang="en-GB" sz="1000" dirty="0">
-                <a:solidFill>
-                  <a:srgbClr val="1F1F1F"/>
-                </a:solidFill>
-                <a:latin typeface="Google Sans Flex SemiBold"/>
-                <a:ea typeface="Hiragino Sans"/>
-                <a:cs typeface="Google Sans Flex SemiBold"/>
-                <a:sym typeface="Google Sans Flex SemiBold"/>
-              </a:rPr>
-              <a:t>1</a:t>
-            </a:r>
-          </a:p>
-        </p:txBody>
-      </p:sp>
-      <p:sp>
-        <p:nvSpPr>
-          <p:cNvPr id="148" name="Family note 1"/>
+          <p:cNvPr id="147" name="Family note 1"/>
           <p:cNvSpPr txBox="1"/>
           <p:nvPr/>
         </p:nvSpPr>
         <p:spPr>
           <a:xfrm>
-            <a:off x="7242048" y="1737360"/>
-            <a:ext cx="1545336" cy="548640"/>
+            <a:off x="6903720" y="1764792"/>
+            <a:ext cx="1883664" cy="548640"/>
           </a:xfrm>
           <a:prstGeom prst="rect">
             <a:avLst/>
@@ -20639,65 +20583,14 @@
       </p:sp>
       <p:sp>
         <p:nvSpPr>
-          <p:cNvPr id="149" name="Oval 148"/>
-          <p:cNvSpPr/>
-          <p:nvPr/>
-        </p:nvSpPr>
-        <p:spPr>
-          <a:xfrm>
-            <a:off x="6967728" y="2359152"/>
-            <a:ext cx="201168" cy="201168"/>
-          </a:xfrm>
-          <a:prstGeom prst="ellipse">
-            <a:avLst/>
-          </a:prstGeom>
-          <a:solidFill>
-            <a:srgbClr val="D98F4E"/>
-          </a:solidFill>
-          <a:ln>
-            <a:noFill/>
-          </a:ln>
-        </p:spPr>
-        <p:txBody>
-          <a:bodyPr rtlCol="0" anchor="ctr" wrap="square" lIns="0" tIns="0" rIns="0" bIns="0">
-            <a:noAutofit/>
-          </a:bodyPr>
-          <a:lstStyle/>
-          <a:p>
-            <a:pPr algn="ctr" marL="0" indent="0">
-              <a:spcBef>
-                <a:spcPts val="0"/>
-              </a:spcBef>
-              <a:spcAft>
-                <a:spcPts val="0"/>
-              </a:spcAft>
-              <a:buNone/>
-            </a:pPr>
-            <a:r>
-              <a:rPr lang="en-GB" sz="1000" dirty="0">
-                <a:solidFill>
-                  <a:srgbClr val="1F1F1F"/>
-                </a:solidFill>
-                <a:latin typeface="Google Sans Flex SemiBold"/>
-                <a:ea typeface="Hiragino Sans"/>
-                <a:cs typeface="Google Sans Flex SemiBold"/>
-                <a:sym typeface="Google Sans Flex SemiBold"/>
-              </a:rPr>
-              <a:t>2</a:t>
-            </a:r>
-          </a:p>
-        </p:txBody>
-      </p:sp>
-      <p:sp>
-        <p:nvSpPr>
-          <p:cNvPr id="150" name="Family note 2"/>
+          <p:cNvPr id="148" name="Family note 2"/>
           <p:cNvSpPr txBox="1"/>
           <p:nvPr/>
         </p:nvSpPr>
         <p:spPr>
           <a:xfrm>
-            <a:off x="7242048" y="2340864"/>
-            <a:ext cx="1545336" cy="548640"/>
+            <a:off x="6903720" y="2194560"/>
+            <a:ext cx="1883664" cy="548640"/>
           </a:xfrm>
           <a:prstGeom prst="rect">
             <a:avLst/>
@@ -20739,65 +20632,14 @@
       </p:sp>
       <p:sp>
         <p:nvSpPr>
-          <p:cNvPr id="151" name="Oval 150"/>
-          <p:cNvSpPr/>
-          <p:nvPr/>
-        </p:nvSpPr>
-        <p:spPr>
-          <a:xfrm>
-            <a:off x="6967728" y="2962656"/>
-            <a:ext cx="201168" cy="201168"/>
-          </a:xfrm>
-          <a:prstGeom prst="ellipse">
-            <a:avLst/>
-          </a:prstGeom>
-          <a:solidFill>
-            <a:srgbClr val="D98F4E"/>
-          </a:solidFill>
-          <a:ln>
-            <a:noFill/>
-          </a:ln>
-        </p:spPr>
-        <p:txBody>
-          <a:bodyPr rtlCol="0" anchor="ctr" wrap="square" lIns="0" tIns="0" rIns="0" bIns="0">
-            <a:noAutofit/>
-          </a:bodyPr>
-          <a:lstStyle/>
-          <a:p>
-            <a:pPr algn="ctr" marL="0" indent="0">
-              <a:spcBef>
-                <a:spcPts val="0"/>
-              </a:spcBef>
-              <a:spcAft>
-                <a:spcPts val="0"/>
-              </a:spcAft>
-              <a:buNone/>
-            </a:pPr>
-            <a:r>
-              <a:rPr lang="en-GB" sz="1000" dirty="0">
-                <a:solidFill>
-                  <a:srgbClr val="1F1F1F"/>
-                </a:solidFill>
-                <a:latin typeface="Google Sans Flex SemiBold"/>
-                <a:ea typeface="Hiragino Sans"/>
-                <a:cs typeface="Google Sans Flex SemiBold"/>
-                <a:sym typeface="Google Sans Flex SemiBold"/>
-              </a:rPr>
-              <a:t>3</a:t>
-            </a:r>
-          </a:p>
-        </p:txBody>
-      </p:sp>
-      <p:sp>
-        <p:nvSpPr>
-          <p:cNvPr id="152" name="Family note 3"/>
+          <p:cNvPr id="149" name="Family note 3"/>
           <p:cNvSpPr txBox="1"/>
           <p:nvPr/>
         </p:nvSpPr>
         <p:spPr>
           <a:xfrm>
-            <a:off x="7242048" y="2944368"/>
-            <a:ext cx="1545336" cy="548640"/>
+            <a:off x="6903720" y="3794760"/>
+            <a:ext cx="1883664" cy="548640"/>
           </a:xfrm>
           <a:prstGeom prst="rect">
             <a:avLst/>
@@ -20839,14 +20681,14 @@
       </p:sp>
       <p:sp>
         <p:nvSpPr>
-          <p:cNvPr id="153" name="Status note"/>
+          <p:cNvPr id="150" name="Status note"/>
           <p:cNvSpPr txBox="1"/>
           <p:nvPr/>
         </p:nvSpPr>
         <p:spPr>
           <a:xfrm>
-            <a:off x="6967728" y="3657600"/>
-            <a:ext cx="1819656" cy="822960"/>
+            <a:off x="6903720" y="4361688"/>
+            <a:ext cx="1883664" cy="457200"/>
           </a:xfrm>
           <a:prstGeom prst="rect">
             <a:avLst/>
@@ -20881,7 +20723,7 @@
                 <a:cs typeface="Google Sans Flex"/>
                 <a:sym typeface="Google Sans Flex"/>
               </a:rPr>
-              <a:t>Both are built. kataribe.kaseovo.com shows a family page from the demo, and lets anyone try the conversation in English.</a:t>
+              <a:t>Both are live at kataribe.kaseovo.com, with this family page and a conversation to try in English.</a:t>
             </a:r>
           </a:p>
         </p:txBody>
@@ -22823,7 +22665,7 @@
         </p:nvCxnSpPr>
         <p:spPr>
           <a:xfrm>
-            <a:off x="2185416" y="1645920"/>
+            <a:off x="2185416" y="1600200"/>
             <a:ext cx="4352544" cy="0"/>
           </a:xfrm>
           <a:prstGeom prst="line">
@@ -22840,13 +22682,46 @@
       </p:cxnSp>
       <p:sp>
         <p:nvSpPr>
-          <p:cNvPr id="152" name="Oval 151"/>
+          <p:cNvPr id="152" name="The conversation"/>
           <p:cNvSpPr/>
           <p:nvPr/>
         </p:nvSpPr>
         <p:spPr>
           <a:xfrm>
-            <a:off x="4206240" y="1508760"/>
+            <a:off x="2926080" y="1353312"/>
+            <a:ext cx="2926080" cy="493776"/>
+          </a:xfrm>
+          <a:prstGeom prst="roundRect">
+            <a:avLst>
+              <a:gd name="adj" fmla="val 11111"/>
+            </a:avLst>
+          </a:prstGeom>
+          <a:solidFill>
+            <a:srgbClr val="FFFFFF"/>
+          </a:solidFill>
+          <a:ln w="9525">
+            <a:solidFill>
+              <a:srgbClr val="D98F4E"/>
+            </a:solidFill>
+          </a:ln>
+        </p:spPr>
+        <p:txBody>
+          <a:bodyPr rtlCol="0" anchor="ctr"/>
+          <a:lstStyle/>
+          <a:p>
+            <a:pPr algn="ctr"/>
+          </a:p>
+        </p:txBody>
+      </p:sp>
+      <p:sp>
+        <p:nvSpPr>
+          <p:cNvPr id="153" name="Oval 152"/>
+          <p:cNvSpPr/>
+          <p:nvPr/>
+        </p:nvSpPr>
+        <p:spPr>
+          <a:xfrm>
+            <a:off x="3017520" y="1463040"/>
             <a:ext cx="274320" cy="274320"/>
           </a:xfrm>
           <a:prstGeom prst="ellipse">
@@ -22891,14 +22766,14 @@
       </p:sp>
       <p:sp>
         <p:nvSpPr>
-          <p:cNvPr id="153" name="Voice label"/>
+          <p:cNvPr id="154" name="The conversation text"/>
           <p:cNvSpPr txBox="1"/>
           <p:nvPr/>
         </p:nvSpPr>
         <p:spPr>
           <a:xfrm>
-            <a:off x="4553712" y="1344168"/>
-            <a:ext cx="1965960" cy="274320"/>
+            <a:off x="3383280" y="1380744"/>
+            <a:ext cx="2423160" cy="438912"/>
           </a:xfrm>
           <a:prstGeom prst="rect">
             <a:avLst/>
@@ -22906,7 +22781,7 @@
           <a:noFill/>
         </p:spPr>
         <p:txBody>
-          <a:bodyPr wrap="square" lIns="0" tIns="0" rIns="0" bIns="0" anchor="t">
+          <a:bodyPr wrap="square" lIns="0" tIns="0" rIns="0" bIns="0" anchor="ctr">
             <a:noAutofit/>
           </a:bodyPr>
           <a:lstStyle/>
@@ -22916,28 +22791,54 @@
                 <a:spcPts val="0"/>
               </a:spcBef>
               <a:spcAft>
-                <a:spcPts val="0"/>
-              </a:spcAft>
-              <a:buNone/>
-            </a:pPr>
-            <a:r>
-              <a:rPr lang="en-GB" sz="900" dirty="0">
-                <a:solidFill>
-                  <a:srgbClr val="A0561B"/>
-                </a:solidFill>
-                <a:latin typeface="Google Sans Flex Medium"/>
+                <a:spcPts val="100"/>
+              </a:spcAft>
+              <a:buNone/>
+            </a:pPr>
+            <a:r>
+              <a:rPr lang="en-GB" sz="1000" dirty="0">
+                <a:solidFill>
+                  <a:srgbClr val="202124"/>
+                </a:solidFill>
+                <a:latin typeface="Google Sans Flex SemiBold"/>
                 <a:ea typeface="Hiragino Sans"/>
-                <a:cs typeface="Google Sans Flex Medium"/>
-                <a:sym typeface="Google Sans Flex Medium"/>
-              </a:rPr>
-              <a:t>Voice, both ways, with that token</a:t>
+                <a:cs typeface="Google Sans Flex SemiBold"/>
+                <a:sym typeface="Google Sans Flex SemiBold"/>
+              </a:rPr>
+              <a:t>The conversation</a:t>
+            </a:r>
+          </a:p>
+          <a:p>
+            <a:pPr algn="l" marL="0" indent="0">
+              <a:lnSpc>
+                <a:spcPct val="100000"/>
+              </a:lnSpc>
+              <a:spcBef>
+                <a:spcPts val="0"/>
+              </a:spcBef>
+              <a:spcAft>
+                <a:spcPts val="0"/>
+              </a:spcAft>
+              <a:buNone/>
+            </a:pPr>
+            <a:r>
+              <a:rPr lang="en-GB" sz="850" dirty="0">
+                <a:solidFill>
+                  <a:srgbClr val="5F6368"/>
+                </a:solidFill>
+                <a:latin typeface="Google Sans Flex"/>
+                <a:ea typeface="Hiragino Sans"/>
+                <a:cs typeface="Google Sans Flex"/>
+                <a:sym typeface="Google Sans Flex"/>
+              </a:rPr>
+              <a:t>Voice both ways, screen to Gemini, on the token from 1</a:t>
             </a:r>
           </a:p>
         </p:txBody>
       </p:sp>
       <p:cxnSp>
         <p:nvCxnSpPr>
-          <p:cNvPr id="154" name="Connector 153"/>
+          <p:cNvPr id="155" name="Connector 154"/>
           <p:cNvCxnSpPr/>
           <p:nvPr/>
         </p:nvCxnSpPr>
@@ -22960,7 +22861,7 @@
       </p:cxnSp>
       <p:cxnSp>
         <p:nvCxnSpPr>
-          <p:cNvPr id="155" name="Connector 154"/>
+          <p:cNvPr id="156" name="Connector 155"/>
           <p:cNvCxnSpPr/>
           <p:nvPr/>
         </p:nvCxnSpPr>
@@ -22982,7 +22883,7 @@
       </p:cxnSp>
       <p:cxnSp>
         <p:nvCxnSpPr>
-          <p:cNvPr id="156" name="Connector 155"/>
+          <p:cNvPr id="157" name="Connector 156"/>
           <p:cNvCxnSpPr/>
           <p:nvPr/>
         </p:nvCxnSpPr>
@@ -23005,7 +22906,7 @@
       </p:cxnSp>
       <p:cxnSp>
         <p:nvCxnSpPr>
-          <p:cNvPr id="157" name="Connector 156"/>
+          <p:cNvPr id="158" name="Connector 157"/>
           <p:cNvCxnSpPr/>
           <p:nvPr/>
         </p:nvCxnSpPr>
@@ -23028,7 +22929,7 @@
       </p:cxnSp>
       <p:cxnSp>
         <p:nvCxnSpPr>
-          <p:cNvPr id="158" name="Connector 157"/>
+          <p:cNvPr id="159" name="Connector 158"/>
           <p:cNvCxnSpPr/>
           <p:nvPr/>
         </p:nvCxnSpPr>
@@ -23051,7 +22952,7 @@
       </p:cxnSp>
       <p:cxnSp>
         <p:nvCxnSpPr>
-          <p:cNvPr id="159" name="Connector 158"/>
+          <p:cNvPr id="160" name="Connector 159"/>
           <p:cNvCxnSpPr/>
           <p:nvPr/>
         </p:nvCxnSpPr>
